--- a/AI_Anamnesis.pptx
+++ b/AI_Anamnesis.pptx
@@ -253,11 +253,11 @@
         </c:ser>
         <c:gapWidth val="60"/>
         <c:overlap val="0"/>
-        <c:axId val="54229068"/>
-        <c:axId val="19302128"/>
+        <c:axId val="620440"/>
+        <c:axId val="67696096"/>
       </c:barChart>
       <c:catAx>
-        <c:axId val="54229068"/>
+        <c:axId val="620440"/>
         <c:scaling>
           <c:orientation val="minMax"/>
         </c:scaling>
@@ -290,7 +290,7 @@
             </a:pPr>
           </a:p>
         </c:txPr>
-        <c:crossAx val="19302128"/>
+        <c:crossAx val="67696096"/>
         <c:crosses val="autoZero"/>
         <c:auto val="1"/>
         <c:lblAlgn val="ctr"/>
@@ -298,7 +298,7 @@
         <c:noMultiLvlLbl val="0"/>
       </c:catAx>
       <c:valAx>
-        <c:axId val="19302128"/>
+        <c:axId val="67696096"/>
         <c:scaling>
           <c:orientation val="minMax"/>
           <c:max val="16"/>
@@ -342,7 +342,7 @@
             </a:pPr>
           </a:p>
         </c:txPr>
-        <c:crossAx val="54229068"/>
+        <c:crossAx val="620440"/>
         <c:crosses val="autoZero"/>
         <c:crossBetween val="between"/>
       </c:valAx>
@@ -630,11 +630,11 @@
         </c:ser>
         <c:gapWidth val="60"/>
         <c:overlap val="0"/>
-        <c:axId val="86031415"/>
-        <c:axId val="42246654"/>
+        <c:axId val="89359825"/>
+        <c:axId val="60532386"/>
       </c:barChart>
       <c:catAx>
-        <c:axId val="86031415"/>
+        <c:axId val="89359825"/>
         <c:scaling>
           <c:orientation val="minMax"/>
         </c:scaling>
@@ -667,7 +667,7 @@
             </a:pPr>
           </a:p>
         </c:txPr>
-        <c:crossAx val="42246654"/>
+        <c:crossAx val="60532386"/>
         <c:crosses val="autoZero"/>
         <c:auto val="1"/>
         <c:lblAlgn val="ctr"/>
@@ -675,7 +675,7 @@
         <c:noMultiLvlLbl val="0"/>
       </c:catAx>
       <c:valAx>
-        <c:axId val="42246654"/>
+        <c:axId val="60532386"/>
         <c:scaling>
           <c:orientation val="minMax"/>
         </c:scaling>
@@ -718,7 +718,7 @@
             </a:pPr>
           </a:p>
         </c:txPr>
-        <c:crossAx val="86031415"/>
+        <c:crossAx val="89359825"/>
         <c:crosses val="autoZero"/>
         <c:crossBetween val="between"/>
       </c:valAx>
@@ -1006,11 +1006,11 @@
         </c:ser>
         <c:gapWidth val="60"/>
         <c:overlap val="0"/>
-        <c:axId val="23224381"/>
-        <c:axId val="59325843"/>
+        <c:axId val="37445910"/>
+        <c:axId val="15321273"/>
       </c:barChart>
       <c:catAx>
-        <c:axId val="23224381"/>
+        <c:axId val="37445910"/>
         <c:scaling>
           <c:orientation val="minMax"/>
         </c:scaling>
@@ -1043,7 +1043,7 @@
             </a:pPr>
           </a:p>
         </c:txPr>
-        <c:crossAx val="59325843"/>
+        <c:crossAx val="15321273"/>
         <c:crosses val="autoZero"/>
         <c:auto val="1"/>
         <c:lblAlgn val="ctr"/>
@@ -1051,7 +1051,7 @@
         <c:noMultiLvlLbl val="0"/>
       </c:catAx>
       <c:valAx>
-        <c:axId val="59325843"/>
+        <c:axId val="15321273"/>
         <c:scaling>
           <c:orientation val="minMax"/>
         </c:scaling>
@@ -1094,7 +1094,7 @@
             </a:pPr>
           </a:p>
         </c:txPr>
-        <c:crossAx val="23224381"/>
+        <c:crossAx val="37445910"/>
         <c:crosses val="autoZero"/>
         <c:crossBetween val="between"/>
       </c:valAx>
@@ -1294,11 +1294,11 @@
         </c:ser>
         <c:gapWidth val="60"/>
         <c:overlap val="0"/>
-        <c:axId val="56007492"/>
-        <c:axId val="80522977"/>
+        <c:axId val="89309726"/>
+        <c:axId val="58010349"/>
       </c:barChart>
       <c:catAx>
-        <c:axId val="56007492"/>
+        <c:axId val="89309726"/>
         <c:scaling>
           <c:orientation val="minMax"/>
         </c:scaling>
@@ -1331,7 +1331,7 @@
             </a:pPr>
           </a:p>
         </c:txPr>
-        <c:crossAx val="80522977"/>
+        <c:crossAx val="58010349"/>
         <c:crosses val="autoZero"/>
         <c:auto val="1"/>
         <c:lblAlgn val="ctr"/>
@@ -1339,7 +1339,7 @@
         <c:noMultiLvlLbl val="0"/>
       </c:catAx>
       <c:valAx>
-        <c:axId val="80522977"/>
+        <c:axId val="58010349"/>
         <c:scaling>
           <c:orientation val="minMax"/>
         </c:scaling>
@@ -1382,7 +1382,7 @@
             </a:pPr>
           </a:p>
         </c:txPr>
-        <c:crossAx val="56007492"/>
+        <c:crossAx val="89309726"/>
         <c:crosses val="autoZero"/>
         <c:crossBetween val="between"/>
       </c:valAx>
@@ -1670,11 +1670,11 @@
         </c:ser>
         <c:gapWidth val="60"/>
         <c:overlap val="0"/>
-        <c:axId val="17810945"/>
-        <c:axId val="26214815"/>
+        <c:axId val="68733483"/>
+        <c:axId val="85255353"/>
       </c:barChart>
       <c:catAx>
-        <c:axId val="17810945"/>
+        <c:axId val="68733483"/>
         <c:scaling>
           <c:orientation val="minMax"/>
         </c:scaling>
@@ -1707,7 +1707,7 @@
             </a:pPr>
           </a:p>
         </c:txPr>
-        <c:crossAx val="26214815"/>
+        <c:crossAx val="85255353"/>
         <c:crosses val="autoZero"/>
         <c:auto val="1"/>
         <c:lblAlgn val="ctr"/>
@@ -1715,7 +1715,7 @@
         <c:noMultiLvlLbl val="0"/>
       </c:catAx>
       <c:valAx>
-        <c:axId val="26214815"/>
+        <c:axId val="85255353"/>
         <c:scaling>
           <c:orientation val="minMax"/>
           <c:max val="8"/>
@@ -1760,7 +1760,7 @@
             </a:pPr>
           </a:p>
         </c:txPr>
-        <c:crossAx val="17810945"/>
+        <c:crossAx val="68733483"/>
         <c:crosses val="autoZero"/>
         <c:crossBetween val="between"/>
         <c:majorUnit val="2"/>
@@ -1820,9 +1820,11 @@
 <cs:chartStyle xmlns:cs="http://schemas.microsoft.com/office/drawing/2012/chartStyle" xmlns:a="http://schemas.openxmlformats.org/drawingml/2006/main" id="419">
   <cs:axisTitle>
     <cs:lnRef idx="0"/>
+    <cs:lineWidthScale>1</cs:lineWidthScale>
     <cs:fillRef idx="0"/>
     <cs:effectRef idx="0"/>
     <cs:fontRef idx="minor"/>
+    <a:defRPr sz="1800" b="0"/>
   </cs:axisTitle>
   <cs:categoryAxis>
     <cs:lnRef idx="0"/>
@@ -2030,9 +2032,11 @@
 <cs:chartStyle xmlns:cs="http://schemas.microsoft.com/office/drawing/2012/chartStyle" xmlns:a="http://schemas.openxmlformats.org/drawingml/2006/main" id="419">
   <cs:axisTitle>
     <cs:lnRef idx="0"/>
+    <cs:lineWidthScale>1</cs:lineWidthScale>
     <cs:fillRef idx="0"/>
     <cs:effectRef idx="0"/>
     <cs:fontRef idx="minor"/>
+    <a:defRPr sz="1800" b="0"/>
   </cs:axisTitle>
   <cs:categoryAxis>
     <cs:lnRef idx="0"/>
@@ -2240,9 +2244,11 @@
 <cs:chartStyle xmlns:cs="http://schemas.microsoft.com/office/drawing/2012/chartStyle" xmlns:a="http://schemas.openxmlformats.org/drawingml/2006/main" id="419">
   <cs:axisTitle>
     <cs:lnRef idx="0"/>
+    <cs:lineWidthScale>1</cs:lineWidthScale>
     <cs:fillRef idx="0"/>
     <cs:effectRef idx="0"/>
     <cs:fontRef idx="minor"/>
+    <a:defRPr sz="1800" b="0"/>
   </cs:axisTitle>
   <cs:categoryAxis>
     <cs:lnRef idx="0"/>
@@ -2450,9 +2456,11 @@
 <cs:chartStyle xmlns:cs="http://schemas.microsoft.com/office/drawing/2012/chartStyle" xmlns:a="http://schemas.openxmlformats.org/drawingml/2006/main" id="419">
   <cs:axisTitle>
     <cs:lnRef idx="0"/>
+    <cs:lineWidthScale>1</cs:lineWidthScale>
     <cs:fillRef idx="0"/>
     <cs:effectRef idx="0"/>
     <cs:fontRef idx="minor"/>
+    <a:defRPr sz="1800" b="0"/>
   </cs:axisTitle>
   <cs:categoryAxis>
     <cs:lnRef idx="0"/>
@@ -2660,9 +2668,11 @@
 <cs:chartStyle xmlns:cs="http://schemas.microsoft.com/office/drawing/2012/chartStyle" xmlns:a="http://schemas.openxmlformats.org/drawingml/2006/main" id="419">
   <cs:axisTitle>
     <cs:lnRef idx="0"/>
+    <cs:lineWidthScale>1</cs:lineWidthScale>
     <cs:fillRef idx="0"/>
     <cs:effectRef idx="0"/>
     <cs:fontRef idx="minor"/>
+    <a:defRPr sz="1800" b="0"/>
   </cs:axisTitle>
   <cs:categoryAxis>
     <cs:lnRef idx="0"/>
@@ -2911,68 +2921,157 @@
             <a:noAutofit/>
           </a:bodyPr>
           <a:p>
+            <a:pPr algn="ctr"/>
             <a:r>
-              <a:rPr lang="de-DE" sz="1800" b="0" u="none" strike="noStrike">
-                <a:solidFill>
-                  <a:schemeClr val="dk1"/>
+              <a:rPr lang="de-DE" sz="4400" b="0" u="none" strike="noStrike">
+                <a:solidFill>
+                  <a:srgbClr val="000000"/>
                 </a:solidFill>
                 <a:effectLst/>
                 <a:uFillTx/>
-                <a:latin typeface="Calibri"/>
+                <a:latin typeface="Arial"/>
               </a:rPr>
-              <a:t>Folie </a:t>
+              <a:t>Fol</a:t>
             </a:r>
             <a:r>
-              <a:rPr lang="de-DE" sz="1800" b="0" u="none" strike="noStrike">
-                <a:solidFill>
-                  <a:schemeClr val="dk1"/>
+              <a:rPr lang="de-DE" sz="4400" b="0" u="none" strike="noStrike">
+                <a:solidFill>
+                  <a:srgbClr val="000000"/>
                 </a:solidFill>
                 <a:effectLst/>
                 <a:uFillTx/>
-                <a:latin typeface="Calibri"/>
+                <a:latin typeface="Arial"/>
               </a:rPr>
-              <a:t>mittels </a:t>
+              <a:t>ie </a:t>
             </a:r>
             <a:r>
-              <a:rPr lang="de-DE" sz="1800" b="0" u="none" strike="noStrike">
-                <a:solidFill>
-                  <a:schemeClr val="dk1"/>
+              <a:rPr lang="de-DE" sz="4400" b="0" u="none" strike="noStrike">
+                <a:solidFill>
+                  <a:srgbClr val="000000"/>
                 </a:solidFill>
                 <a:effectLst/>
                 <a:uFillTx/>
-                <a:latin typeface="Calibri"/>
+                <a:latin typeface="Arial"/>
               </a:rPr>
-              <a:t>Klicken </a:t>
+              <a:t>mit</a:t>
             </a:r>
             <a:r>
-              <a:rPr lang="de-DE" sz="1800" b="0" u="none" strike="noStrike">
-                <a:solidFill>
-                  <a:schemeClr val="dk1"/>
+              <a:rPr lang="de-DE" sz="4400" b="0" u="none" strike="noStrike">
+                <a:solidFill>
+                  <a:srgbClr val="000000"/>
                 </a:solidFill>
                 <a:effectLst/>
                 <a:uFillTx/>
-                <a:latin typeface="Calibri"/>
+                <a:latin typeface="Arial"/>
               </a:rPr>
-              <a:t>verschieb</a:t>
+              <a:t>tel</a:t>
             </a:r>
             <a:r>
-              <a:rPr lang="de-DE" sz="1800" b="0" u="none" strike="noStrike">
-                <a:solidFill>
-                  <a:schemeClr val="dk1"/>
+              <a:rPr lang="de-DE" sz="4400" b="0" u="none" strike="noStrike">
+                <a:solidFill>
+                  <a:srgbClr val="000000"/>
                 </a:solidFill>
                 <a:effectLst/>
                 <a:uFillTx/>
-                <a:latin typeface="Calibri"/>
+                <a:latin typeface="Arial"/>
               </a:rPr>
-              <a:t>en</a:t>
+              <a:t>s </a:t>
             </a:r>
-            <a:endParaRPr lang="de-DE" sz="1800" b="0" u="none" strike="noStrike">
-              <a:solidFill>
-                <a:schemeClr val="dk1"/>
-              </a:solidFill>
-              <a:effectLst/>
-              <a:uFillTx/>
-              <a:latin typeface="Calibri"/>
+            <a:r>
+              <a:rPr lang="de-DE" sz="4400" b="0" u="none" strike="noStrike">
+                <a:solidFill>
+                  <a:srgbClr val="000000"/>
+                </a:solidFill>
+                <a:effectLst/>
+                <a:uFillTx/>
+                <a:latin typeface="Arial"/>
+              </a:rPr>
+              <a:t>Kli</a:t>
+            </a:r>
+            <a:r>
+              <a:rPr lang="de-DE" sz="4400" b="0" u="none" strike="noStrike">
+                <a:solidFill>
+                  <a:srgbClr val="000000"/>
+                </a:solidFill>
+                <a:effectLst/>
+                <a:uFillTx/>
+                <a:latin typeface="Arial"/>
+              </a:rPr>
+              <a:t>ck</a:t>
+            </a:r>
+            <a:r>
+              <a:rPr lang="de-DE" sz="4400" b="0" u="none" strike="noStrike">
+                <a:solidFill>
+                  <a:srgbClr val="000000"/>
+                </a:solidFill>
+                <a:effectLst/>
+                <a:uFillTx/>
+                <a:latin typeface="Arial"/>
+              </a:rPr>
+              <a:t>en </a:t>
+            </a:r>
+            <a:r>
+              <a:rPr lang="de-DE" sz="4400" b="0" u="none" strike="noStrike">
+                <a:solidFill>
+                  <a:srgbClr val="000000"/>
+                </a:solidFill>
+                <a:effectLst/>
+                <a:uFillTx/>
+                <a:latin typeface="Arial"/>
+              </a:rPr>
+              <a:t>ver</a:t>
+            </a:r>
+            <a:r>
+              <a:rPr lang="de-DE" sz="4400" b="0" u="none" strike="noStrike">
+                <a:solidFill>
+                  <a:srgbClr val="000000"/>
+                </a:solidFill>
+                <a:effectLst/>
+                <a:uFillTx/>
+                <a:latin typeface="Arial"/>
+              </a:rPr>
+              <a:t>sc</a:t>
+            </a:r>
+            <a:r>
+              <a:rPr lang="de-DE" sz="4400" b="0" u="none" strike="noStrike">
+                <a:solidFill>
+                  <a:srgbClr val="000000"/>
+                </a:solidFill>
+                <a:effectLst/>
+                <a:uFillTx/>
+                <a:latin typeface="Arial"/>
+              </a:rPr>
+              <a:t>hie</a:t>
+            </a:r>
+            <a:r>
+              <a:rPr lang="de-DE" sz="4400" b="0" u="none" strike="noStrike">
+                <a:solidFill>
+                  <a:srgbClr val="000000"/>
+                </a:solidFill>
+                <a:effectLst/>
+                <a:uFillTx/>
+                <a:latin typeface="Arial"/>
+              </a:rPr>
+              <a:t>be</a:t>
+            </a:r>
+            <a:r>
+              <a:rPr lang="de-DE" sz="4400" b="0" u="none" strike="noStrike">
+                <a:solidFill>
+                  <a:srgbClr val="000000"/>
+                </a:solidFill>
+                <a:effectLst/>
+                <a:uFillTx/>
+                <a:latin typeface="Arial"/>
+              </a:rPr>
+              <a:t>n</a:t>
+            </a:r>
+            <a:endParaRPr lang="de-DE" sz="4400" b="0" u="none" strike="noStrike">
+              <a:solidFill>
+                <a:srgbClr val="000000"/>
+              </a:solidFill>
+              <a:effectLst/>
+              <a:uFillTx/>
+              <a:latin typeface="Arial"/>
             </a:endParaRPr>
           </a:p>
         </p:txBody>
@@ -3259,7 +3358,7 @@
             <a:pPr indent="0" algn="r">
               <a:buNone/>
             </a:pPr>
-            <a:fld id="{D925B59E-648A-4A55-AA77-CB485F98F080}" type="slidenum">
+            <a:fld id="{F034E830-6336-4463-8138-F41D4D63AE4B}" type="slidenum">
               <a:rPr lang="de-DE" sz="1400" b="0" u="none" strike="noStrike">
                 <a:solidFill>
                   <a:srgbClr val="000000"/>
@@ -3426,7 +3525,7 @@
                 <a:tab pos="0" algn="l"/>
               </a:tabLst>
             </a:pPr>
-            <a:fld id="{B31F6EDB-8240-42E0-BC88-FBBBA0EF7B23}" type="slidenum">
+            <a:fld id="{43E66147-4C3E-4244-8FF9-AC83F395375A}" type="slidenum">
               <a:rPr lang="en-US" sz="1800" b="0" u="none" strike="noStrike">
                 <a:solidFill>
                   <a:schemeClr val="dk1"/>
@@ -3436,7 +3535,7 @@
                 <a:latin typeface="+mn-lt"/>
                 <a:ea typeface="+mn-ea"/>
               </a:rPr>
-              <a:t>1</a:t>
+              <a:t>&lt;Foliennummer&gt;</a:t>
             </a:fld>
             <a:endParaRPr lang="de-DE" sz="1800" b="0" u="none" strike="noStrike">
               <a:solidFill>
@@ -3593,7 +3692,7 @@
                 <a:tab pos="0" algn="l"/>
               </a:tabLst>
             </a:pPr>
-            <a:fld id="{C97DFEA8-131F-4051-BB90-9714EB8B0821}" type="slidenum">
+            <a:fld id="{E15FB4F6-5EAD-41C2-87D5-EB8E3ED11193}" type="slidenum">
               <a:rPr lang="en-US" sz="1800" b="0" u="none" strike="noStrike">
                 <a:solidFill>
                   <a:schemeClr val="dk1"/>
@@ -3603,7 +3702,7 @@
                 <a:latin typeface="+mn-lt"/>
                 <a:ea typeface="+mn-ea"/>
               </a:rPr>
-              <a:t>1</a:t>
+              <a:t>&lt;Foliennummer&gt;</a:t>
             </a:fld>
             <a:endParaRPr lang="de-DE" sz="1800" b="0" u="none" strike="noStrike">
               <a:solidFill>
@@ -3760,7 +3859,7 @@
                 <a:tab pos="0" algn="l"/>
               </a:tabLst>
             </a:pPr>
-            <a:fld id="{5EF2FF89-E9B6-4E55-8977-DB2347A1FB92}" type="slidenum">
+            <a:fld id="{B7F3A97E-7A7D-423B-875B-EFEC3BE24557}" type="slidenum">
               <a:rPr lang="en-US" sz="1800" b="0" u="none" strike="noStrike">
                 <a:solidFill>
                   <a:schemeClr val="dk1"/>
@@ -3770,7 +3869,7 @@
                 <a:latin typeface="+mn-lt"/>
                 <a:ea typeface="+mn-ea"/>
               </a:rPr>
-              <a:t>1</a:t>
+              <a:t>&lt;Foliennummer&gt;</a:t>
             </a:fld>
             <a:endParaRPr lang="de-DE" sz="1800" b="0" u="none" strike="noStrike">
               <a:solidFill>
@@ -3927,7 +4026,7 @@
                 <a:tab pos="0" algn="l"/>
               </a:tabLst>
             </a:pPr>
-            <a:fld id="{6E6A42E4-13B5-4F14-AB4C-358437EDC3D1}" type="slidenum">
+            <a:fld id="{213ACE02-DE74-4388-B60F-394A539D2C74}" type="slidenum">
               <a:rPr lang="en-US" sz="1800" b="0" u="none" strike="noStrike">
                 <a:solidFill>
                   <a:schemeClr val="dk1"/>
@@ -3937,7 +4036,7 @@
                 <a:latin typeface="+mn-lt"/>
                 <a:ea typeface="+mn-ea"/>
               </a:rPr>
-              <a:t>1</a:t>
+              <a:t>&lt;Foliennummer&gt;</a:t>
             </a:fld>
             <a:endParaRPr lang="de-DE" sz="1800" b="0" u="none" strike="noStrike">
               <a:solidFill>
@@ -4094,7 +4193,7 @@
                 <a:tab pos="0" algn="l"/>
               </a:tabLst>
             </a:pPr>
-            <a:fld id="{DFDB0715-3BAE-431C-B3FD-AF1ADD11CCD1}" type="slidenum">
+            <a:fld id="{37ACDB36-378E-4848-A92B-952AF2867046}" type="slidenum">
               <a:rPr lang="en-US" sz="1800" b="0" u="none" strike="noStrike">
                 <a:solidFill>
                   <a:schemeClr val="dk1"/>
@@ -4104,7 +4203,7 @@
                 <a:latin typeface="+mn-lt"/>
                 <a:ea typeface="+mn-ea"/>
               </a:rPr>
-              <a:t>1</a:t>
+              <a:t>&lt;Foliennummer&gt;</a:t>
             </a:fld>
             <a:endParaRPr lang="de-DE" sz="1800" b="0" u="none" strike="noStrike">
               <a:solidFill>
@@ -4261,7 +4360,7 @@
                 <a:tab pos="0" algn="l"/>
               </a:tabLst>
             </a:pPr>
-            <a:fld id="{E6EEB2CF-FDE0-4A30-A3CA-D67910F55938}" type="slidenum">
+            <a:fld id="{100E3856-F23F-44E1-BC79-C89983742FCD}" type="slidenum">
               <a:rPr lang="en-US" sz="1800" b="0" u="none" strike="noStrike">
                 <a:solidFill>
                   <a:schemeClr val="dk1"/>
@@ -4271,7 +4370,7 @@
                 <a:latin typeface="+mn-lt"/>
                 <a:ea typeface="+mn-ea"/>
               </a:rPr>
-              <a:t>1</a:t>
+              <a:t>&lt;Foliennummer&gt;</a:t>
             </a:fld>
             <a:endParaRPr lang="de-DE" sz="1800" b="0" u="none" strike="noStrike">
               <a:solidFill>
@@ -4428,7 +4527,7 @@
                 <a:tab pos="0" algn="l"/>
               </a:tabLst>
             </a:pPr>
-            <a:fld id="{10508767-6AD1-41BD-98E8-8810F186CC73}" type="slidenum">
+            <a:fld id="{09B28CAB-570B-441B-BCE4-CD33FE51D048}" type="slidenum">
               <a:rPr lang="en-US" sz="1800" b="0" u="none" strike="noStrike">
                 <a:solidFill>
                   <a:schemeClr val="dk1"/>
@@ -4438,7 +4537,7 @@
                 <a:latin typeface="+mn-lt"/>
                 <a:ea typeface="+mn-ea"/>
               </a:rPr>
-              <a:t>1</a:t>
+              <a:t>&lt;Foliennummer&gt;</a:t>
             </a:fld>
             <a:endParaRPr lang="de-DE" sz="1800" b="0" u="none" strike="noStrike">
               <a:solidFill>
@@ -4595,7 +4694,7 @@
                 <a:tab pos="0" algn="l"/>
               </a:tabLst>
             </a:pPr>
-            <a:fld id="{C882C134-0EB2-4ABA-B191-2B69B3D18E2D}" type="slidenum">
+            <a:fld id="{EA0878A2-2853-4B58-A7E5-C9FA511278E9}" type="slidenum">
               <a:rPr lang="en-US" sz="1800" b="0" u="none" strike="noStrike">
                 <a:solidFill>
                   <a:schemeClr val="dk1"/>
@@ -4605,7 +4704,7 @@
                 <a:latin typeface="+mn-lt"/>
                 <a:ea typeface="+mn-ea"/>
               </a:rPr>
-              <a:t>1</a:t>
+              <a:t>&lt;Foliennummer&gt;</a:t>
             </a:fld>
             <a:endParaRPr lang="de-DE" sz="1800" b="0" u="none" strike="noStrike">
               <a:solidFill>
@@ -4762,7 +4861,7 @@
                 <a:tab pos="0" algn="l"/>
               </a:tabLst>
             </a:pPr>
-            <a:fld id="{B581E509-D520-4226-B0BB-D9AE1D8BFE12}" type="slidenum">
+            <a:fld id="{F4BB6BF8-2E8D-4811-9FEE-9A68AE76DB17}" type="slidenum">
               <a:rPr lang="en-US" sz="1800" b="0" u="none" strike="noStrike">
                 <a:solidFill>
                   <a:schemeClr val="dk1"/>
@@ -4772,7 +4871,7 @@
                 <a:latin typeface="+mn-lt"/>
                 <a:ea typeface="+mn-ea"/>
               </a:rPr>
-              <a:t>1</a:t>
+              <a:t>&lt;Foliennummer&gt;</a:t>
             </a:fld>
             <a:endParaRPr lang="de-DE" sz="1800" b="0" u="none" strike="noStrike">
               <a:solidFill>
@@ -4929,7 +5028,7 @@
                 <a:tab pos="0" algn="l"/>
               </a:tabLst>
             </a:pPr>
-            <a:fld id="{F49D9A30-668B-4587-B6CB-754B70A8B85A}" type="slidenum">
+            <a:fld id="{EB19C31F-E27C-4A6B-BF8E-AFD48ED64FC5}" type="slidenum">
               <a:rPr lang="en-US" sz="1800" b="0" u="none" strike="noStrike">
                 <a:solidFill>
                   <a:schemeClr val="dk1"/>
@@ -4939,7 +5038,7 @@
                 <a:latin typeface="+mn-lt"/>
                 <a:ea typeface="+mn-ea"/>
               </a:rPr>
-              <a:t>1</a:t>
+              <a:t>&lt;Foliennummer&gt;</a:t>
             </a:fld>
             <a:endParaRPr lang="de-DE" sz="1800" b="0" u="none" strike="noStrike">
               <a:solidFill>
@@ -5096,7 +5195,7 @@
                 <a:tab pos="0" algn="l"/>
               </a:tabLst>
             </a:pPr>
-            <a:fld id="{8F4FE24C-7EC7-44F2-8DFF-CCAEE0E875D8}" type="slidenum">
+            <a:fld id="{D30F4282-ED24-43BD-9141-810E92A70C69}" type="slidenum">
               <a:rPr lang="en-US" sz="1800" b="0" u="none" strike="noStrike">
                 <a:solidFill>
                   <a:schemeClr val="dk1"/>
@@ -5106,7 +5205,7 @@
                 <a:latin typeface="+mn-lt"/>
                 <a:ea typeface="+mn-ea"/>
               </a:rPr>
-              <a:t>1</a:t>
+              <a:t>&lt;Foliennummer&gt;</a:t>
             </a:fld>
             <a:endParaRPr lang="de-DE" sz="1800" b="0" u="none" strike="noStrike">
               <a:solidFill>
@@ -5263,7 +5362,7 @@
                 <a:tab pos="0" algn="l"/>
               </a:tabLst>
             </a:pPr>
-            <a:fld id="{469520C2-49B0-4125-BD0E-EC871CDB1AF1}" type="slidenum">
+            <a:fld id="{AB9806AD-8EEC-464C-9CF6-F33FB8F04CF6}" type="slidenum">
               <a:rPr lang="en-US" sz="1800" b="0" u="none" strike="noStrike">
                 <a:solidFill>
                   <a:schemeClr val="dk1"/>
@@ -5273,7 +5372,7 @@
                 <a:latin typeface="+mn-lt"/>
                 <a:ea typeface="+mn-ea"/>
               </a:rPr>
-              <a:t>1</a:t>
+              <a:t>&lt;Foliennummer&gt;</a:t>
             </a:fld>
             <a:endParaRPr lang="de-DE" sz="1800" b="0" u="none" strike="noStrike">
               <a:solidFill>
@@ -5430,7 +5529,7 @@
                 <a:tab pos="0" algn="l"/>
               </a:tabLst>
             </a:pPr>
-            <a:fld id="{441A88FF-ABBB-44EA-AFDE-0C3E2FAEBD24}" type="slidenum">
+            <a:fld id="{7A26B165-3319-42E7-9D85-2589B0F1758D}" type="slidenum">
               <a:rPr lang="en-US" sz="1800" b="0" u="none" strike="noStrike">
                 <a:solidFill>
                   <a:schemeClr val="dk1"/>
@@ -5440,7 +5539,7 @@
                 <a:latin typeface="+mn-lt"/>
                 <a:ea typeface="+mn-ea"/>
               </a:rPr>
-              <a:t>1</a:t>
+              <a:t>&lt;Foliennummer&gt;</a:t>
             </a:fld>
             <a:endParaRPr lang="de-DE" sz="1800" b="0" u="none" strike="noStrike">
               <a:solidFill>
@@ -5597,7 +5696,7 @@
                 <a:tab pos="0" algn="l"/>
               </a:tabLst>
             </a:pPr>
-            <a:fld id="{1D1B386F-A19E-4526-BFF7-0F19C53D420D}" type="slidenum">
+            <a:fld id="{F7799C45-A20A-4F64-B654-4F22C5A2C99C}" type="slidenum">
               <a:rPr lang="en-US" sz="1800" b="0" u="none" strike="noStrike">
                 <a:solidFill>
                   <a:schemeClr val="dk1"/>
@@ -5607,7 +5706,7 @@
                 <a:latin typeface="+mn-lt"/>
                 <a:ea typeface="+mn-ea"/>
               </a:rPr>
-              <a:t>1</a:t>
+              <a:t>&lt;Foliennummer&gt;</a:t>
             </a:fld>
             <a:endParaRPr lang="de-DE" sz="1800" b="0" u="none" strike="noStrike">
               <a:solidFill>
@@ -5764,7 +5863,7 @@
                 <a:tab pos="0" algn="l"/>
               </a:tabLst>
             </a:pPr>
-            <a:fld id="{E4E7EAFF-6481-44F2-A26E-3687C97653D8}" type="slidenum">
+            <a:fld id="{18BB17BE-276D-44CB-A8C8-BA394D367B33}" type="slidenum">
               <a:rPr lang="en-US" sz="1800" b="0" u="none" strike="noStrike">
                 <a:solidFill>
                   <a:schemeClr val="dk1"/>
@@ -5774,7 +5873,7 @@
                 <a:latin typeface="+mn-lt"/>
                 <a:ea typeface="+mn-ea"/>
               </a:rPr>
-              <a:t>1</a:t>
+              <a:t>&lt;Foliennummer&gt;</a:t>
             </a:fld>
             <a:endParaRPr lang="de-DE" sz="1800" b="0" u="none" strike="noStrike">
               <a:solidFill>
@@ -5931,7 +6030,7 @@
                 <a:tab pos="0" algn="l"/>
               </a:tabLst>
             </a:pPr>
-            <a:fld id="{30B58E41-E5AA-4D14-90A9-96719870C933}" type="slidenum">
+            <a:fld id="{2186E4B9-718D-4629-A646-5EF70F6A1CD9}" type="slidenum">
               <a:rPr lang="en-US" sz="1800" b="0" u="none" strike="noStrike">
                 <a:solidFill>
                   <a:schemeClr val="dk1"/>
@@ -5941,7 +6040,7 @@
                 <a:latin typeface="+mn-lt"/>
                 <a:ea typeface="+mn-ea"/>
               </a:rPr>
-              <a:t>1</a:t>
+              <a:t>&lt;Foliennummer&gt;</a:t>
             </a:fld>
             <a:endParaRPr lang="de-DE" sz="1800" b="0" u="none" strike="noStrike">
               <a:solidFill>
@@ -6098,7 +6197,7 @@
                 <a:tab pos="0" algn="l"/>
               </a:tabLst>
             </a:pPr>
-            <a:fld id="{9F67BA79-D7F8-4711-AA4D-F7178387A51F}" type="slidenum">
+            <a:fld id="{97D5BB06-BE3F-44DD-B0A4-0BACABC15A4A}" type="slidenum">
               <a:rPr lang="en-US" sz="1800" b="0" u="none" strike="noStrike">
                 <a:solidFill>
                   <a:schemeClr val="dk1"/>
@@ -6108,7 +6207,7 @@
                 <a:latin typeface="+mn-lt"/>
                 <a:ea typeface="+mn-ea"/>
               </a:rPr>
-              <a:t>1</a:t>
+              <a:t>&lt;Foliennummer&gt;</a:t>
             </a:fld>
             <a:endParaRPr lang="de-DE" sz="1800" b="0" u="none" strike="noStrike">
               <a:solidFill>
@@ -6265,7 +6364,7 @@
                 <a:tab pos="0" algn="l"/>
               </a:tabLst>
             </a:pPr>
-            <a:fld id="{53C4EA4D-89E4-41E4-B9B0-79B677D1B188}" type="slidenum">
+            <a:fld id="{94020182-684D-42F8-8262-251087777E41}" type="slidenum">
               <a:rPr lang="en-US" sz="1800" b="0" u="none" strike="noStrike">
                 <a:solidFill>
                   <a:schemeClr val="dk1"/>
@@ -6275,7 +6374,7 @@
                 <a:latin typeface="+mn-lt"/>
                 <a:ea typeface="+mn-ea"/>
               </a:rPr>
-              <a:t>1</a:t>
+              <a:t>&lt;Foliennummer&gt;</a:t>
             </a:fld>
             <a:endParaRPr lang="de-DE" sz="1800" b="0" u="none" strike="noStrike">
               <a:solidFill>
@@ -6432,7 +6531,7 @@
                 <a:tab pos="0" algn="l"/>
               </a:tabLst>
             </a:pPr>
-            <a:fld id="{EF1174D0-D36B-4788-921F-470D849114D9}" type="slidenum">
+            <a:fld id="{E6D7E402-74A4-4780-9B66-53D327DC976D}" type="slidenum">
               <a:rPr lang="en-US" sz="1800" b="0" u="none" strike="noStrike">
                 <a:solidFill>
                   <a:schemeClr val="dk1"/>
@@ -6442,7 +6541,7 @@
                 <a:latin typeface="+mn-lt"/>
                 <a:ea typeface="+mn-ea"/>
               </a:rPr>
-              <a:t>1</a:t>
+              <a:t>&lt;Foliennummer&gt;</a:t>
             </a:fld>
             <a:endParaRPr lang="de-DE" sz="1800" b="0" u="none" strike="noStrike">
               <a:solidFill>
@@ -6490,7 +6589,7 @@
         <p:spPr>
           <a:xfrm>
             <a:off x="685800" y="1143000"/>
-            <a:ext cx="5486040" cy="3085920"/>
+            <a:ext cx="5485680" cy="3085560"/>
           </a:xfrm>
           <a:prstGeom prst="rect">
             <a:avLst/>
@@ -6513,7 +6612,7 @@
         <p:spPr>
           <a:xfrm>
             <a:off x="685800" y="4400640"/>
-            <a:ext cx="5486040" cy="3600000"/>
+            <a:ext cx="5485680" cy="3599640"/>
           </a:xfrm>
           <a:prstGeom prst="rect">
             <a:avLst/>
@@ -6555,7 +6654,7 @@
         <p:spPr>
           <a:xfrm>
             <a:off x="3884760" y="8685360"/>
-            <a:ext cx="2971440" cy="458280"/>
+            <a:ext cx="2971080" cy="457920"/>
           </a:xfrm>
           <a:prstGeom prst="rect">
             <a:avLst/>
@@ -6575,6 +6674,9 @@
                 <a:spcPct val="100000"/>
               </a:lnSpc>
               <a:buNone/>
+              <a:tabLst>
+                <a:tab pos="0" algn="l"/>
+              </a:tabLst>
               <a:defRPr lang="en-US" sz="1200" b="0" u="none" strike="noStrike">
                 <a:solidFill>
                   <a:schemeClr val="dk1"/>
@@ -6592,8 +6694,11 @@
                 <a:spcPct val="100000"/>
               </a:lnSpc>
               <a:buNone/>
+              <a:tabLst>
+                <a:tab pos="0" algn="l"/>
+              </a:tabLst>
             </a:pPr>
-            <a:fld id="{E5BABE4D-017E-4844-8D34-F1754A2A6B28}" type="slidenum">
+            <a:fld id="{A8CBCF16-6C15-4D41-90F1-C229F35812AA}" type="slidenum">
               <a:rPr lang="en-US" sz="1200" b="0" u="none" strike="noStrike">
                 <a:solidFill>
                   <a:schemeClr val="dk1"/>
@@ -6603,7 +6708,7 @@
                 <a:latin typeface="+mn-lt"/>
                 <a:ea typeface="+mn-ea"/>
               </a:rPr>
-              <a:t>1</a:t>
+              <a:t>&lt;Foliennummer&gt;</a:t>
             </a:fld>
             <a:endParaRPr lang="de-DE" sz="1200" b="0" u="none" strike="noStrike">
               <a:solidFill>
@@ -6695,40 +6800,51 @@
             <a:noAutofit/>
           </a:bodyPr>
           <a:lstStyle>
-            <a:lvl1pPr indent="0" algn="l">
+            <a:lvl1pPr indent="0" algn="ctr">
               <a:buNone/>
-              <a:defRPr lang="de-DE" sz="1800" b="0" u="none" strike="noStrike">
-                <a:solidFill>
-                  <a:schemeClr val="dk1"/>
+              <a:defRPr lang="de-DE" sz="4400" b="0" u="none" strike="noStrike">
+                <a:solidFill>
+                  <a:srgbClr val="000000"/>
                 </a:solidFill>
                 <a:effectLst/>
                 <a:uFillTx/>
-                <a:latin typeface="Calibri"/>
+                <a:latin typeface="Arial"/>
               </a:defRPr>
             </a:lvl1pPr>
           </a:lstStyle>
           <a:p>
-            <a:pPr indent="0" algn="l">
+            <a:pPr indent="0" algn="ctr">
               <a:buNone/>
             </a:pPr>
             <a:r>
-              <a:rPr lang="de-DE" sz="1800" b="0" u="none" strike="noStrike">
-                <a:solidFill>
-                  <a:schemeClr val="dk1"/>
+              <a:rPr lang="de-DE" sz="4400" b="0" u="none" strike="noStrike">
+                <a:solidFill>
+                  <a:srgbClr val="000000"/>
                 </a:solidFill>
                 <a:effectLst/>
                 <a:uFillTx/>
-                <a:latin typeface="Calibri"/>
+                <a:latin typeface="Arial"/>
               </a:rPr>
-              <a:t>Format des Titeltextes durch Klicken bearbeiten</a:t>
+              <a:t>Format des Titeltextes </a:t>
             </a:r>
-            <a:endParaRPr lang="de-DE" sz="1800" b="0" u="none" strike="noStrike">
-              <a:solidFill>
-                <a:schemeClr val="dk1"/>
-              </a:solidFill>
-              <a:effectLst/>
-              <a:uFillTx/>
-              <a:latin typeface="Calibri"/>
+            <a:r>
+              <a:rPr lang="de-DE" sz="4400" b="0" u="none" strike="noStrike">
+                <a:solidFill>
+                  <a:srgbClr val="000000"/>
+                </a:solidFill>
+                <a:effectLst/>
+                <a:uFillTx/>
+                <a:latin typeface="Arial"/>
+              </a:rPr>
+              <a:t>durch Klicken bearbeiten</a:t>
+            </a:r>
+            <a:endParaRPr lang="de-DE" sz="4400" b="0" u="none" strike="noStrike">
+              <a:solidFill>
+                <a:srgbClr val="000000"/>
+              </a:solidFill>
+              <a:effectLst/>
+              <a:uFillTx/>
+              <a:latin typeface="Arial"/>
             </a:endParaRPr>
           </a:p>
         </p:txBody>
@@ -6758,13 +6874,10 @@
         </p:spPr>
         <p:txBody>
           <a:bodyPr lIns="0" tIns="0" rIns="0" bIns="0" anchor="t">
-            <a:normAutofit/>
+            <a:normAutofit lnSpcReduction="9999"/>
           </a:bodyPr>
           <a:lstStyle>
             <a:lvl1pPr algn="l">
-              <a:lnSpc>
-                <a:spcPct val="90000"/>
-              </a:lnSpc>
               <a:spcBef>
                 <a:spcPts val="1417"/>
               </a:spcBef>
@@ -6774,19 +6887,16 @@
               <a:buSzPct val="45000"/>
               <a:buFont typeface="Wingdings" charset="2"/>
               <a:buChar char=""/>
-              <a:defRPr lang="de-DE" sz="2800" b="0" u="none" strike="noStrike">
-                <a:solidFill>
-                  <a:schemeClr val="dk1"/>
+              <a:defRPr lang="de-DE" sz="3200" b="0" u="none" strike="noStrike">
+                <a:solidFill>
+                  <a:srgbClr val="000000"/>
                 </a:solidFill>
                 <a:effectLst/>
                 <a:uFillTx/>
-                <a:latin typeface="Calibri"/>
+                <a:latin typeface="Arial"/>
               </a:defRPr>
             </a:lvl1pPr>
             <a:lvl2pPr lvl="1" algn="l">
-              <a:lnSpc>
-                <a:spcPct val="90000"/>
-              </a:lnSpc>
               <a:spcBef>
                 <a:spcPts val="1134"/>
               </a:spcBef>
@@ -6796,19 +6906,16 @@
               <a:buSzPct val="75000"/>
               <a:buFont typeface="Symbol" charset="2"/>
               <a:buChar char=""/>
-              <a:defRPr lang="de-DE" sz="2000" b="0" u="none" strike="noStrike">
-                <a:solidFill>
-                  <a:schemeClr val="dk1"/>
+              <a:defRPr lang="de-DE" sz="2800" b="0" u="none" strike="noStrike">
+                <a:solidFill>
+                  <a:srgbClr val="000000"/>
                 </a:solidFill>
                 <a:effectLst/>
                 <a:uFillTx/>
-                <a:latin typeface="Calibri"/>
+                <a:latin typeface="Arial"/>
               </a:defRPr>
             </a:lvl2pPr>
             <a:lvl3pPr lvl="2" algn="l">
-              <a:lnSpc>
-                <a:spcPct val="90000"/>
-              </a:lnSpc>
               <a:spcBef>
                 <a:spcPts val="850"/>
               </a:spcBef>
@@ -6818,19 +6925,16 @@
               <a:buSzPct val="45000"/>
               <a:buFont typeface="Wingdings" charset="2"/>
               <a:buChar char=""/>
-              <a:defRPr lang="de-DE" sz="1800" b="0" u="none" strike="noStrike">
-                <a:solidFill>
-                  <a:schemeClr val="dk1"/>
+              <a:defRPr lang="de-DE" sz="2400" b="0" u="none" strike="noStrike">
+                <a:solidFill>
+                  <a:srgbClr val="000000"/>
                 </a:solidFill>
                 <a:effectLst/>
                 <a:uFillTx/>
-                <a:latin typeface="Calibri"/>
+                <a:latin typeface="Arial"/>
               </a:defRPr>
             </a:lvl3pPr>
             <a:lvl4pPr lvl="3" algn="l">
-              <a:lnSpc>
-                <a:spcPct val="90000"/>
-              </a:lnSpc>
               <a:spcBef>
                 <a:spcPts val="567"/>
               </a:spcBef>
@@ -6840,19 +6944,16 @@
               <a:buSzPct val="75000"/>
               <a:buFont typeface="Symbol" charset="2"/>
               <a:buChar char=""/>
-              <a:defRPr lang="de-DE" sz="1800" b="0" u="none" strike="noStrike">
-                <a:solidFill>
-                  <a:schemeClr val="dk1"/>
+              <a:defRPr lang="de-DE" sz="2000" b="0" u="none" strike="noStrike">
+                <a:solidFill>
+                  <a:srgbClr val="000000"/>
                 </a:solidFill>
                 <a:effectLst/>
                 <a:uFillTx/>
-                <a:latin typeface="Calibri"/>
+                <a:latin typeface="Arial"/>
               </a:defRPr>
             </a:lvl4pPr>
             <a:lvl5pPr lvl="4" algn="l">
-              <a:lnSpc>
-                <a:spcPct val="90000"/>
-              </a:lnSpc>
               <a:spcBef>
                 <a:spcPts val="283"/>
               </a:spcBef>
@@ -6864,17 +6965,14 @@
               <a:buChar char=""/>
               <a:defRPr lang="de-DE" sz="2000" b="0" u="none" strike="noStrike">
                 <a:solidFill>
-                  <a:schemeClr val="dk1"/>
+                  <a:srgbClr val="000000"/>
                 </a:solidFill>
                 <a:effectLst/>
                 <a:uFillTx/>
-                <a:latin typeface="Calibri"/>
+                <a:latin typeface="Arial"/>
               </a:defRPr>
             </a:lvl5pPr>
             <a:lvl6pPr lvl="5" algn="l">
-              <a:lnSpc>
-                <a:spcPct val="90000"/>
-              </a:lnSpc>
               <a:spcBef>
                 <a:spcPts val="283"/>
               </a:spcBef>
@@ -6886,17 +6984,14 @@
               <a:buChar char=""/>
               <a:defRPr lang="de-DE" sz="2000" b="0" u="none" strike="noStrike">
                 <a:solidFill>
-                  <a:schemeClr val="dk1"/>
+                  <a:srgbClr val="000000"/>
                 </a:solidFill>
                 <a:effectLst/>
                 <a:uFillTx/>
-                <a:latin typeface="Calibri"/>
+                <a:latin typeface="Arial"/>
               </a:defRPr>
             </a:lvl6pPr>
             <a:lvl7pPr lvl="6" algn="l">
-              <a:lnSpc>
-                <a:spcPct val="90000"/>
-              </a:lnSpc>
               <a:spcBef>
                 <a:spcPts val="283"/>
               </a:spcBef>
@@ -6908,19 +7003,16 @@
               <a:buChar char=""/>
               <a:defRPr lang="de-DE" sz="2000" b="0" u="none" strike="noStrike">
                 <a:solidFill>
-                  <a:schemeClr val="dk1"/>
+                  <a:srgbClr val="000000"/>
                 </a:solidFill>
                 <a:effectLst/>
                 <a:uFillTx/>
-                <a:latin typeface="Calibri"/>
+                <a:latin typeface="Arial"/>
               </a:defRPr>
             </a:lvl7pPr>
           </a:lstStyle>
           <a:p>
             <a:pPr marL="432000" indent="-324000" algn="l">
-              <a:lnSpc>
-                <a:spcPct val="90000"/>
-              </a:lnSpc>
               <a:spcBef>
                 <a:spcPts val="1417"/>
               </a:spcBef>
@@ -6932,30 +7024,27 @@
               <a:buChar char=""/>
             </a:pPr>
             <a:r>
-              <a:rPr lang="de-DE" sz="2800" b="0" u="none" strike="noStrike">
-                <a:solidFill>
-                  <a:schemeClr val="dk1"/>
+              <a:rPr lang="de-DE" sz="3200" b="0" u="none" strike="noStrike">
+                <a:solidFill>
+                  <a:srgbClr val="000000"/>
                 </a:solidFill>
                 <a:effectLst/>
                 <a:uFillTx/>
-                <a:latin typeface="Calibri"/>
+                <a:latin typeface="Arial"/>
               </a:rPr>
               <a:t>Format des Gliederungstextes durch Klicken bearbeiten</a:t>
             </a:r>
-            <a:endParaRPr lang="de-DE" sz="2800" b="0" u="none" strike="noStrike">
-              <a:solidFill>
-                <a:schemeClr val="dk1"/>
-              </a:solidFill>
-              <a:effectLst/>
-              <a:uFillTx/>
-              <a:latin typeface="Calibri"/>
+            <a:endParaRPr lang="de-DE" sz="3200" b="0" u="none" strike="noStrike">
+              <a:solidFill>
+                <a:srgbClr val="000000"/>
+              </a:solidFill>
+              <a:effectLst/>
+              <a:uFillTx/>
+              <a:latin typeface="Arial"/>
             </a:endParaRPr>
           </a:p>
           <a:p>
             <a:pPr marL="864000" lvl="1" indent="-324000" algn="l">
-              <a:lnSpc>
-                <a:spcPct val="90000"/>
-              </a:lnSpc>
               <a:spcBef>
                 <a:spcPts val="1134"/>
               </a:spcBef>
@@ -6967,30 +7056,27 @@
               <a:buChar char=""/>
             </a:pPr>
             <a:r>
-              <a:rPr lang="de-DE" sz="2000" b="0" u="none" strike="noStrike">
-                <a:solidFill>
-                  <a:schemeClr val="dk1"/>
+              <a:rPr lang="de-DE" sz="2800" b="0" u="none" strike="noStrike">
+                <a:solidFill>
+                  <a:srgbClr val="000000"/>
                 </a:solidFill>
                 <a:effectLst/>
                 <a:uFillTx/>
-                <a:latin typeface="Calibri"/>
+                <a:latin typeface="Arial"/>
               </a:rPr>
               <a:t>Zweite Gliederungsebene</a:t>
             </a:r>
-            <a:endParaRPr lang="de-DE" sz="2000" b="0" u="none" strike="noStrike">
-              <a:solidFill>
-                <a:schemeClr val="dk1"/>
-              </a:solidFill>
-              <a:effectLst/>
-              <a:uFillTx/>
-              <a:latin typeface="Calibri"/>
+            <a:endParaRPr lang="de-DE" sz="2800" b="0" u="none" strike="noStrike">
+              <a:solidFill>
+                <a:srgbClr val="000000"/>
+              </a:solidFill>
+              <a:effectLst/>
+              <a:uFillTx/>
+              <a:latin typeface="Arial"/>
             </a:endParaRPr>
           </a:p>
           <a:p>
             <a:pPr marL="1296000" lvl="2" indent="-288000" algn="l">
-              <a:lnSpc>
-                <a:spcPct val="90000"/>
-              </a:lnSpc>
               <a:spcBef>
                 <a:spcPts val="850"/>
               </a:spcBef>
@@ -7002,30 +7088,27 @@
               <a:buChar char=""/>
             </a:pPr>
             <a:r>
-              <a:rPr lang="de-DE" sz="1800" b="0" u="none" strike="noStrike">
-                <a:solidFill>
-                  <a:schemeClr val="dk1"/>
+              <a:rPr lang="de-DE" sz="2400" b="0" u="none" strike="noStrike">
+                <a:solidFill>
+                  <a:srgbClr val="000000"/>
                 </a:solidFill>
                 <a:effectLst/>
                 <a:uFillTx/>
-                <a:latin typeface="Calibri"/>
+                <a:latin typeface="Arial"/>
               </a:rPr>
               <a:t>Dritte Gliederungsebene</a:t>
             </a:r>
-            <a:endParaRPr lang="de-DE" sz="1800" b="0" u="none" strike="noStrike">
-              <a:solidFill>
-                <a:schemeClr val="dk1"/>
-              </a:solidFill>
-              <a:effectLst/>
-              <a:uFillTx/>
-              <a:latin typeface="Calibri"/>
+            <a:endParaRPr lang="de-DE" sz="2400" b="0" u="none" strike="noStrike">
+              <a:solidFill>
+                <a:srgbClr val="000000"/>
+              </a:solidFill>
+              <a:effectLst/>
+              <a:uFillTx/>
+              <a:latin typeface="Arial"/>
             </a:endParaRPr>
           </a:p>
           <a:p>
             <a:pPr marL="1728000" lvl="3" indent="-216000" algn="l">
-              <a:lnSpc>
-                <a:spcPct val="90000"/>
-              </a:lnSpc>
               <a:spcBef>
                 <a:spcPts val="567"/>
               </a:spcBef>
@@ -7037,30 +7120,27 @@
               <a:buChar char=""/>
             </a:pPr>
             <a:r>
-              <a:rPr lang="de-DE" sz="1800" b="0" u="none" strike="noStrike">
-                <a:solidFill>
-                  <a:schemeClr val="dk1"/>
+              <a:rPr lang="de-DE" sz="2000" b="0" u="none" strike="noStrike">
+                <a:solidFill>
+                  <a:srgbClr val="000000"/>
                 </a:solidFill>
                 <a:effectLst/>
                 <a:uFillTx/>
-                <a:latin typeface="Calibri"/>
+                <a:latin typeface="Arial"/>
               </a:rPr>
               <a:t>Vierte Gliederungsebene</a:t>
             </a:r>
-            <a:endParaRPr lang="de-DE" sz="1800" b="0" u="none" strike="noStrike">
-              <a:solidFill>
-                <a:schemeClr val="dk1"/>
-              </a:solidFill>
-              <a:effectLst/>
-              <a:uFillTx/>
-              <a:latin typeface="Calibri"/>
+            <a:endParaRPr lang="de-DE" sz="2000" b="0" u="none" strike="noStrike">
+              <a:solidFill>
+                <a:srgbClr val="000000"/>
+              </a:solidFill>
+              <a:effectLst/>
+              <a:uFillTx/>
+              <a:latin typeface="Arial"/>
             </a:endParaRPr>
           </a:p>
           <a:p>
             <a:pPr marL="2160000" lvl="4" indent="-216000" algn="l">
-              <a:lnSpc>
-                <a:spcPct val="90000"/>
-              </a:lnSpc>
               <a:spcBef>
                 <a:spcPts val="283"/>
               </a:spcBef>
@@ -7074,28 +7154,25 @@
             <a:r>
               <a:rPr lang="de-DE" sz="2000" b="0" u="none" strike="noStrike">
                 <a:solidFill>
-                  <a:schemeClr val="dk1"/>
+                  <a:srgbClr val="000000"/>
                 </a:solidFill>
                 <a:effectLst/>
                 <a:uFillTx/>
-                <a:latin typeface="Calibri"/>
+                <a:latin typeface="Arial"/>
               </a:rPr>
               <a:t>Fünfte Gliederungsebene</a:t>
             </a:r>
             <a:endParaRPr lang="de-DE" sz="2000" b="0" u="none" strike="noStrike">
               <a:solidFill>
-                <a:schemeClr val="dk1"/>
-              </a:solidFill>
-              <a:effectLst/>
-              <a:uFillTx/>
-              <a:latin typeface="Calibri"/>
+                <a:srgbClr val="000000"/>
+              </a:solidFill>
+              <a:effectLst/>
+              <a:uFillTx/>
+              <a:latin typeface="Arial"/>
             </a:endParaRPr>
           </a:p>
           <a:p>
             <a:pPr marL="2592000" lvl="5" indent="-216000" algn="l">
-              <a:lnSpc>
-                <a:spcPct val="90000"/>
-              </a:lnSpc>
               <a:spcBef>
                 <a:spcPts val="283"/>
               </a:spcBef>
@@ -7109,28 +7186,25 @@
             <a:r>
               <a:rPr lang="de-DE" sz="2000" b="0" u="none" strike="noStrike">
                 <a:solidFill>
-                  <a:schemeClr val="dk1"/>
+                  <a:srgbClr val="000000"/>
                 </a:solidFill>
                 <a:effectLst/>
                 <a:uFillTx/>
-                <a:latin typeface="Calibri"/>
+                <a:latin typeface="Arial"/>
               </a:rPr>
               <a:t>Sechste Gliederungsebene</a:t>
             </a:r>
             <a:endParaRPr lang="de-DE" sz="2000" b="0" u="none" strike="noStrike">
               <a:solidFill>
-                <a:schemeClr val="dk1"/>
-              </a:solidFill>
-              <a:effectLst/>
-              <a:uFillTx/>
-              <a:latin typeface="Calibri"/>
+                <a:srgbClr val="000000"/>
+              </a:solidFill>
+              <a:effectLst/>
+              <a:uFillTx/>
+              <a:latin typeface="Arial"/>
             </a:endParaRPr>
           </a:p>
           <a:p>
             <a:pPr marL="3024000" lvl="6" indent="-216000" algn="l">
-              <a:lnSpc>
-                <a:spcPct val="90000"/>
-              </a:lnSpc>
               <a:spcBef>
                 <a:spcPts val="283"/>
               </a:spcBef>
@@ -7144,21 +7218,21 @@
             <a:r>
               <a:rPr lang="de-DE" sz="2000" b="0" u="none" strike="noStrike">
                 <a:solidFill>
-                  <a:schemeClr val="dk1"/>
+                  <a:srgbClr val="000000"/>
                 </a:solidFill>
                 <a:effectLst/>
                 <a:uFillTx/>
-                <a:latin typeface="Calibri"/>
+                <a:latin typeface="Arial"/>
               </a:rPr>
               <a:t>Siebte Gliederungsebene</a:t>
             </a:r>
             <a:endParaRPr lang="de-DE" sz="2000" b="0" u="none" strike="noStrike">
               <a:solidFill>
-                <a:schemeClr val="dk1"/>
-              </a:solidFill>
-              <a:effectLst/>
-              <a:uFillTx/>
-              <a:latin typeface="Calibri"/>
+                <a:srgbClr val="000000"/>
+              </a:solidFill>
+              <a:effectLst/>
+              <a:uFillTx/>
+              <a:latin typeface="Arial"/>
             </a:endParaRPr>
           </a:p>
         </p:txBody>
@@ -7205,7 +7279,7 @@
         <p:spPr>
           <a:xfrm>
             <a:off x="6949440" y="2011680"/>
-            <a:ext cx="2376360" cy="364680"/>
+            <a:ext cx="2376000" cy="364320"/>
           </a:xfrm>
           <a:prstGeom prst="parallelogram">
             <a:avLst>
@@ -7253,7 +7327,7 @@
         <p:spPr>
           <a:xfrm>
             <a:off x="6400800" y="2560320"/>
-            <a:ext cx="2925000" cy="410400"/>
+            <a:ext cx="2924640" cy="410040"/>
           </a:xfrm>
           <a:prstGeom prst="parallelogram">
             <a:avLst>
@@ -7303,7 +7377,7 @@
         <p:spPr>
           <a:xfrm>
             <a:off x="457200" y="1371600"/>
-            <a:ext cx="7314120" cy="913320"/>
+            <a:ext cx="7313760" cy="912960"/>
           </a:xfrm>
           <a:prstGeom prst="rect">
             <a:avLst/>
@@ -7342,7 +7416,19 @@
                 <a:latin typeface="DejaVu Serif"/>
                 <a:ea typeface="DejaVu Serif"/>
               </a:rPr>
-              <a:t>AI-Anamnesis of Patients</a:t>
+              <a:t>AI-Anamnesis </a:t>
+            </a:r>
+            <a:r>
+              <a:rPr lang="en-US" sz="4400" b="0" u="none" strike="noStrike">
+                <a:solidFill>
+                  <a:srgbClr val="FFFFFF"/>
+                </a:solidFill>
+                <a:effectLst/>
+                <a:uFillTx/>
+                <a:latin typeface="DejaVu Serif"/>
+                <a:ea typeface="DejaVu Serif"/>
+              </a:rPr>
+              <a:t>of Patients</a:t>
             </a:r>
             <a:endParaRPr lang="de-DE" sz="4400" b="0" u="none" strike="noStrike">
               <a:solidFill>
@@ -7364,7 +7450,7 @@
         <p:spPr>
           <a:xfrm>
             <a:off x="457200" y="2286000"/>
-            <a:ext cx="7314120" cy="639000"/>
+            <a:ext cx="7313760" cy="638640"/>
           </a:xfrm>
           <a:prstGeom prst="rect">
             <a:avLst/>
@@ -7403,7 +7489,31 @@
                 <a:latin typeface="DejaVu Serif"/>
                 <a:ea typeface="DejaVu Serif"/>
               </a:rPr>
-              <a:t>Evaluating End-to-End STT + LLM Pipelines</a:t>
+              <a:t>Evaluating End-to-</a:t>
+            </a:r>
+            <a:r>
+              <a:rPr lang="en-US" sz="1600" b="0" u="none" strike="noStrike">
+                <a:solidFill>
+                  <a:srgbClr val="D04A02"/>
+                </a:solidFill>
+                <a:effectLst/>
+                <a:uFillTx/>
+                <a:latin typeface="DejaVu Serif"/>
+                <a:ea typeface="DejaVu Serif"/>
+              </a:rPr>
+              <a:t>End STT + LLM </a:t>
+            </a:r>
+            <a:r>
+              <a:rPr lang="en-US" sz="1600" b="0" u="none" strike="noStrike">
+                <a:solidFill>
+                  <a:srgbClr val="D04A02"/>
+                </a:solidFill>
+                <a:effectLst/>
+                <a:uFillTx/>
+                <a:latin typeface="DejaVu Serif"/>
+                <a:ea typeface="DejaVu Serif"/>
+              </a:rPr>
+              <a:t>Pipelines</a:t>
             </a:r>
             <a:endParaRPr lang="de-DE" sz="1600" b="0" u="none" strike="noStrike">
               <a:solidFill>
@@ -7433,7 +7543,19 @@
                 <a:latin typeface="DejaVu Serif"/>
                 <a:ea typeface="DejaVu Serif"/>
               </a:rPr>
-              <a:t>for Medical Documentation</a:t>
+              <a:t>for Medical </a:t>
+            </a:r>
+            <a:r>
+              <a:rPr lang="en-US" sz="1600" b="0" u="none" strike="noStrike">
+                <a:solidFill>
+                  <a:srgbClr val="D04A02"/>
+                </a:solidFill>
+                <a:effectLst/>
+                <a:uFillTx/>
+                <a:latin typeface="DejaVu Serif"/>
+                <a:ea typeface="DejaVu Serif"/>
+              </a:rPr>
+              <a:t>Documentation</a:t>
             </a:r>
             <a:endParaRPr lang="de-DE" sz="1600" b="0" u="none" strike="noStrike">
               <a:solidFill>
@@ -7455,7 +7577,7 @@
         <p:spPr>
           <a:xfrm>
             <a:off x="457200" y="3931920"/>
-            <a:ext cx="5485320" cy="273240"/>
+            <a:ext cx="5484960" cy="272880"/>
           </a:xfrm>
           <a:prstGeom prst="rect">
             <a:avLst/>
@@ -7494,7 +7616,19 @@
                 <a:latin typeface="DejaVu Serif"/>
                 <a:ea typeface="DejaVu Serif"/>
               </a:rPr>
-              <a:t>Anton Reinhard  ·  Leonard Niedens</a:t>
+              <a:t>Anton Reinhard  ·  </a:t>
+            </a:r>
+            <a:r>
+              <a:rPr lang="en-US" sz="1300" b="0" u="none" strike="noStrike">
+                <a:solidFill>
+                  <a:srgbClr val="FFFFFF"/>
+                </a:solidFill>
+                <a:effectLst/>
+                <a:uFillTx/>
+                <a:latin typeface="DejaVu Serif"/>
+                <a:ea typeface="DejaVu Serif"/>
+              </a:rPr>
+              <a:t>Leonard Niedens</a:t>
             </a:r>
             <a:endParaRPr lang="de-DE" sz="1300" b="0" u="none" strike="noStrike">
               <a:solidFill>
@@ -7516,7 +7650,7 @@
         <p:spPr>
           <a:xfrm>
             <a:off x="457200" y="4251960"/>
-            <a:ext cx="6399720" cy="273240"/>
+            <a:ext cx="6399360" cy="272880"/>
           </a:xfrm>
           <a:prstGeom prst="rect">
             <a:avLst/>
@@ -7555,7 +7689,7 @@
                 <a:latin typeface="DejaVu Serif"/>
                 <a:ea typeface="DejaVu Serif"/>
               </a:rPr>
-              <a:t>Master Seminar  ·  PwC Cloud &amp; AI  ×  Hochschule Hannover  ·  </a:t>
+              <a:t>Master Seminar  ·  PwC Cloud &amp; AI  </a:t>
             </a:r>
             <a:r>
               <a:rPr lang="en-US" sz="900" b="0" u="none" strike="noStrike">
@@ -7567,7 +7701,7 @@
                 <a:latin typeface="DejaVu Serif"/>
                 <a:ea typeface="DejaVu Serif"/>
               </a:rPr>
-              <a:t>2026</a:t>
+              <a:t>×  Hochschule Hannover  ·  2026</a:t>
             </a:r>
             <a:endParaRPr lang="de-DE" sz="900" b="0" u="none" strike="noStrike">
               <a:solidFill>
@@ -7626,7 +7760,7 @@
         <p:spPr>
           <a:xfrm>
             <a:off x="6949440" y="457200"/>
-            <a:ext cx="2376360" cy="318960"/>
+            <a:ext cx="2376000" cy="318600"/>
           </a:xfrm>
           <a:prstGeom prst="parallelogram">
             <a:avLst>
@@ -7674,7 +7808,7 @@
         <p:spPr>
           <a:xfrm>
             <a:off x="457200" y="1188720"/>
-            <a:ext cx="8228520" cy="1004760"/>
+            <a:ext cx="8228160" cy="1004400"/>
           </a:xfrm>
           <a:prstGeom prst="rect">
             <a:avLst/>
@@ -7735,7 +7869,7 @@
         <p:spPr>
           <a:xfrm>
             <a:off x="4023360" y="2468880"/>
-            <a:ext cx="1096200" cy="1096200"/>
+            <a:ext cx="1095840" cy="1095840"/>
           </a:xfrm>
           <a:prstGeom prst="ellipse">
             <a:avLst/>
@@ -7780,8 +7914,8 @@
         </p:nvSpPr>
         <p:spPr>
           <a:xfrm rot="5400000">
-            <a:off x="4337280" y="2715480"/>
-            <a:ext cx="593280" cy="603360"/>
+            <a:off x="4337640" y="2715480"/>
+            <a:ext cx="592920" cy="603000"/>
           </a:xfrm>
           <a:prstGeom prst="triangle">
             <a:avLst>
@@ -7829,7 +7963,7 @@
         <p:spPr>
           <a:xfrm>
             <a:off x="457200" y="3931920"/>
-            <a:ext cx="8228520" cy="364680"/>
+            <a:ext cx="8228160" cy="364320"/>
           </a:xfrm>
           <a:prstGeom prst="rect">
             <a:avLst/>
@@ -7926,7 +8060,7 @@
         <p:spPr>
           <a:xfrm>
             <a:off x="365760" y="4864680"/>
-            <a:ext cx="6856920" cy="227520"/>
+            <a:ext cx="6856560" cy="227160"/>
           </a:xfrm>
           <a:prstGeom prst="rect">
             <a:avLst/>
@@ -7987,7 +8121,7 @@
         <p:spPr>
           <a:xfrm>
             <a:off x="7772400" y="4864680"/>
-            <a:ext cx="1004760" cy="227520"/>
+            <a:ext cx="1004400" cy="227160"/>
           </a:xfrm>
           <a:prstGeom prst="rect">
             <a:avLst/>
@@ -8085,7 +8219,7 @@
         <p:spPr>
           <a:xfrm>
             <a:off x="457200" y="274320"/>
-            <a:ext cx="8228520" cy="639000"/>
+            <a:ext cx="8228160" cy="638640"/>
           </a:xfrm>
           <a:prstGeom prst="rect">
             <a:avLst/>
@@ -8146,7 +8280,7 @@
         <p:spPr>
           <a:xfrm>
             <a:off x="5852160" y="1097280"/>
-            <a:ext cx="2925000" cy="3016440"/>
+            <a:ext cx="2924640" cy="3016080"/>
           </a:xfrm>
           <a:prstGeom prst="roundRect">
             <a:avLst>
@@ -8199,7 +8333,7 @@
         <p:spPr>
           <a:xfrm>
             <a:off x="5989320" y="1188720"/>
-            <a:ext cx="2650680" cy="273240"/>
+            <a:ext cx="2650320" cy="272880"/>
           </a:xfrm>
           <a:prstGeom prst="rect">
             <a:avLst/>
@@ -8260,7 +8394,7 @@
         <p:spPr>
           <a:xfrm>
             <a:off x="5989320" y="1463040"/>
-            <a:ext cx="2650680" cy="364680"/>
+            <a:ext cx="2650320" cy="364320"/>
           </a:xfrm>
           <a:prstGeom prst="rect">
             <a:avLst/>
@@ -8321,7 +8455,7 @@
         <p:spPr>
           <a:xfrm>
             <a:off x="5989320" y="2011680"/>
-            <a:ext cx="2650680" cy="1096200"/>
+            <a:ext cx="2650320" cy="1095840"/>
           </a:xfrm>
           <a:prstGeom prst="rect">
             <a:avLst/>
@@ -8535,7 +8669,7 @@
         <p:spPr>
           <a:xfrm>
             <a:off x="5989320" y="3291840"/>
-            <a:ext cx="2650680" cy="639000"/>
+            <a:ext cx="2650320" cy="638640"/>
           </a:xfrm>
           <a:prstGeom prst="rect">
             <a:avLst/>
@@ -8596,7 +8730,7 @@
         <p:spPr>
           <a:xfrm>
             <a:off x="365760" y="4864680"/>
-            <a:ext cx="6856920" cy="227520"/>
+            <a:ext cx="6856560" cy="227160"/>
           </a:xfrm>
           <a:prstGeom prst="rect">
             <a:avLst/>
@@ -8635,43 +8769,7 @@
                 <a:latin typeface="DejaVu Serif"/>
                 <a:ea typeface="DejaVu Serif"/>
               </a:rPr>
-              <a:t>AI-Anamnesis · Master </a:t>
-            </a:r>
-            <a:r>
-              <a:rPr lang="en-US" sz="800" b="0" u="none" strike="noStrike">
-                <a:solidFill>
-                  <a:srgbClr val="5A6570"/>
-                </a:solidFill>
-                <a:effectLst/>
-                <a:uFillTx/>
-                <a:latin typeface="DejaVu Serif"/>
-                <a:ea typeface="DejaVu Serif"/>
-              </a:rPr>
-              <a:t>Seminar · PwC × </a:t>
-            </a:r>
-            <a:r>
-              <a:rPr lang="en-US" sz="800" b="0" u="none" strike="noStrike">
-                <a:solidFill>
-                  <a:srgbClr val="5A6570"/>
-                </a:solidFill>
-                <a:effectLst/>
-                <a:uFillTx/>
-                <a:latin typeface="DejaVu Serif"/>
-                <a:ea typeface="DejaVu Serif"/>
-              </a:rPr>
-              <a:t>Hochschule Hannover · </a:t>
-            </a:r>
-            <a:r>
-              <a:rPr lang="en-US" sz="800" b="0" u="none" strike="noStrike">
-                <a:solidFill>
-                  <a:srgbClr val="5A6570"/>
-                </a:solidFill>
-                <a:effectLst/>
-                <a:uFillTx/>
-                <a:latin typeface="DejaVu Serif"/>
-                <a:ea typeface="DejaVu Serif"/>
-              </a:rPr>
-              <a:t>2026</a:t>
+              <a:t>AI-Anamnesis · Master Seminar · PwC × Hochschule Hannover · 2026</a:t>
             </a:r>
             <a:endParaRPr lang="de-DE" sz="800" b="0" u="none" strike="noStrike">
               <a:solidFill>
@@ -8693,7 +8791,7 @@
         <p:spPr>
           <a:xfrm>
             <a:off x="7772400" y="4864680"/>
-            <a:ext cx="1004760" cy="227520"/>
+            <a:ext cx="1004400" cy="227160"/>
           </a:xfrm>
           <a:prstGeom prst="rect">
             <a:avLst/>
@@ -8754,7 +8852,7 @@
         <p:spPr>
           <a:xfrm>
             <a:off x="412920" y="2410560"/>
-            <a:ext cx="359280" cy="359280"/>
+            <a:ext cx="358920" cy="358920"/>
           </a:xfrm>
           <a:prstGeom prst="rect">
             <a:avLst/>
@@ -8803,7 +8901,7 @@
         <p:spPr>
           <a:xfrm>
             <a:off x="573480" y="2516400"/>
-            <a:ext cx="179280" cy="99720"/>
+            <a:ext cx="178920" cy="99360"/>
           </a:xfrm>
           <a:prstGeom prst="rect">
             <a:avLst/>
@@ -8823,7 +8921,7 @@
         <p:spPr>
           <a:xfrm>
             <a:off x="1001520" y="3230280"/>
-            <a:ext cx="359280" cy="359280"/>
+            <a:ext cx="358920" cy="358920"/>
           </a:xfrm>
           <a:prstGeom prst="rect">
             <a:avLst/>
@@ -8872,7 +8970,7 @@
         <p:spPr>
           <a:xfrm>
             <a:off x="1162080" y="3336120"/>
-            <a:ext cx="179280" cy="99720"/>
+            <a:ext cx="178920" cy="99360"/>
           </a:xfrm>
           <a:prstGeom prst="rect">
             <a:avLst/>
@@ -8891,7 +8989,7 @@
         </p:nvGraphicFramePr>
         <p:xfrm>
           <a:off x="457560" y="1177200"/>
-          <a:ext cx="5302800" cy="3016800"/>
+          <a:ext cx="5302440" cy="3016440"/>
         </p:xfrm>
         <a:graphic>
           <a:graphicData uri="http://schemas.openxmlformats.org/drawingml/2006/chart">
@@ -8908,7 +9006,7 @@
         <p:spPr>
           <a:xfrm>
             <a:off x="784440" y="3310920"/>
-            <a:ext cx="359280" cy="359280"/>
+            <a:ext cx="358920" cy="358920"/>
           </a:xfrm>
           <a:prstGeom prst="rect">
             <a:avLst/>
@@ -8957,7 +9055,7 @@
         <p:spPr>
           <a:xfrm>
             <a:off x="945000" y="3416760"/>
-            <a:ext cx="179280" cy="99720"/>
+            <a:ext cx="178920" cy="99360"/>
           </a:xfrm>
           <a:prstGeom prst="rect">
             <a:avLst/>
@@ -8977,7 +9075,7 @@
         <p:spPr>
           <a:xfrm>
             <a:off x="412920" y="2410560"/>
-            <a:ext cx="359280" cy="359280"/>
+            <a:ext cx="358920" cy="358920"/>
           </a:xfrm>
           <a:prstGeom prst="rect">
             <a:avLst/>
@@ -9026,7 +9124,7 @@
         <p:spPr>
           <a:xfrm>
             <a:off x="573480" y="2516400"/>
-            <a:ext cx="179280" cy="99720"/>
+            <a:ext cx="178920" cy="99360"/>
           </a:xfrm>
           <a:prstGeom prst="rect">
             <a:avLst/>
@@ -9293,7 +9391,7 @@
         <p:spPr>
           <a:xfrm>
             <a:off x="457200" y="274320"/>
-            <a:ext cx="8228520" cy="639000"/>
+            <a:ext cx="8228160" cy="638640"/>
           </a:xfrm>
           <a:prstGeom prst="rect">
             <a:avLst/>
@@ -9359,7 +9457,7 @@
         </p:nvGraphicFramePr>
         <p:xfrm>
           <a:off x="457200" y="1097280"/>
-          <a:ext cx="7771320" cy="3199320"/>
+          <a:ext cx="7770960" cy="3198960"/>
         </p:xfrm>
         <a:graphic>
           <a:graphicData uri="http://schemas.openxmlformats.org/drawingml/2006/chart">
@@ -9376,7 +9474,7 @@
         <p:spPr>
           <a:xfrm>
             <a:off x="365760" y="4864680"/>
-            <a:ext cx="6856920" cy="227520"/>
+            <a:ext cx="6856560" cy="227160"/>
           </a:xfrm>
           <a:prstGeom prst="rect">
             <a:avLst/>
@@ -9437,7 +9535,7 @@
         <p:spPr>
           <a:xfrm>
             <a:off x="7772400" y="4864680"/>
-            <a:ext cx="1004760" cy="227520"/>
+            <a:ext cx="1004400" cy="227160"/>
           </a:xfrm>
           <a:prstGeom prst="rect">
             <a:avLst/>
@@ -9498,7 +9596,7 @@
         <p:spPr>
           <a:xfrm>
             <a:off x="468720" y="3497400"/>
-            <a:ext cx="1647360" cy="359280"/>
+            <a:ext cx="1647000" cy="358920"/>
           </a:xfrm>
           <a:prstGeom prst="rect">
             <a:avLst/>
@@ -9563,7 +9661,7 @@
         <p:spPr>
           <a:xfrm>
             <a:off x="914760" y="3627360"/>
-            <a:ext cx="179280" cy="99720"/>
+            <a:ext cx="178920" cy="99360"/>
           </a:xfrm>
           <a:prstGeom prst="rect">
             <a:avLst/>
@@ -9582,7 +9680,7 @@
         </p:nvGraphicFramePr>
         <p:xfrm>
           <a:off x="685800" y="1096920"/>
-          <a:ext cx="7771680" cy="3199680"/>
+          <a:ext cx="7771320" cy="3199320"/>
         </p:xfrm>
         <a:graphic>
           <a:graphicData uri="http://schemas.openxmlformats.org/drawingml/2006/chart">
@@ -9599,7 +9697,7 @@
         <p:spPr>
           <a:xfrm>
             <a:off x="691920" y="3499200"/>
-            <a:ext cx="359280" cy="359280"/>
+            <a:ext cx="358920" cy="358920"/>
           </a:xfrm>
           <a:prstGeom prst="rect">
             <a:avLst/>
@@ -9648,7 +9746,7 @@
         <p:spPr>
           <a:xfrm>
             <a:off x="852480" y="3605040"/>
-            <a:ext cx="179280" cy="99720"/>
+            <a:ext cx="178920" cy="99360"/>
           </a:xfrm>
           <a:prstGeom prst="rect">
             <a:avLst/>
@@ -9705,7 +9803,7 @@
         <p:spPr>
           <a:xfrm>
             <a:off x="457200" y="274320"/>
-            <a:ext cx="8228520" cy="639000"/>
+            <a:ext cx="8228160" cy="638640"/>
           </a:xfrm>
           <a:prstGeom prst="rect">
             <a:avLst/>
@@ -9744,19 +9842,7 @@
                 <a:latin typeface="DejaVu Serif"/>
                 <a:ea typeface="DejaVu Serif"/>
               </a:rPr>
-              <a:t>The Anamnese </a:t>
-            </a:r>
-            <a:r>
-              <a:rPr lang="en-US" sz="2400" b="1" u="none" strike="noStrike">
-                <a:solidFill>
-                  <a:srgbClr val="E8E8E8"/>
-                </a:solidFill>
-                <a:effectLst/>
-                <a:uFillTx/>
-                <a:latin typeface="DejaVu Serif"/>
-                <a:ea typeface="DejaVu Serif"/>
-              </a:rPr>
-              <a:t>Catastrophe</a:t>
+              <a:t>The Anamnese Catastrophe</a:t>
             </a:r>
             <a:endParaRPr lang="de-DE" sz="2400" b="0" u="none" strike="noStrike">
               <a:solidFill>
@@ -9777,7 +9863,7 @@
         </p:nvGraphicFramePr>
         <p:xfrm>
           <a:off x="457200" y="1188720"/>
-          <a:ext cx="5485320" cy="2559240"/>
+          <a:ext cx="5484960" cy="2558880"/>
         </p:xfrm>
         <a:graphic>
           <a:graphicData uri="http://schemas.openxmlformats.org/drawingml/2006/chart">
@@ -9794,7 +9880,7 @@
         <p:spPr>
           <a:xfrm>
             <a:off x="6217920" y="1620000"/>
-            <a:ext cx="2559240" cy="1096200"/>
+            <a:ext cx="2558880" cy="1095840"/>
           </a:xfrm>
           <a:prstGeom prst="rect">
             <a:avLst/>
@@ -9855,7 +9941,7 @@
         <p:spPr>
           <a:xfrm>
             <a:off x="6217920" y="2717280"/>
-            <a:ext cx="2559240" cy="364680"/>
+            <a:ext cx="2558880" cy="364320"/>
           </a:xfrm>
           <a:prstGeom prst="rect">
             <a:avLst/>
@@ -9916,7 +10002,7 @@
         <p:spPr>
           <a:xfrm>
             <a:off x="2205720" y="3955320"/>
-            <a:ext cx="3639240" cy="456120"/>
+            <a:ext cx="3638880" cy="455760"/>
           </a:xfrm>
           <a:prstGeom prst="rect">
             <a:avLst/>
@@ -9977,7 +10063,7 @@
         <p:spPr>
           <a:xfrm>
             <a:off x="365760" y="4864680"/>
-            <a:ext cx="6856920" cy="227520"/>
+            <a:ext cx="6856560" cy="227160"/>
           </a:xfrm>
           <a:prstGeom prst="rect">
             <a:avLst/>
@@ -10038,7 +10124,7 @@
         <p:spPr>
           <a:xfrm>
             <a:off x="7772400" y="4864680"/>
-            <a:ext cx="1004760" cy="227520"/>
+            <a:ext cx="1004400" cy="227160"/>
           </a:xfrm>
           <a:prstGeom prst="rect">
             <a:avLst/>
@@ -10238,7 +10324,7 @@
         <p:spPr>
           <a:xfrm>
             <a:off x="457200" y="274320"/>
-            <a:ext cx="8228520" cy="639000"/>
+            <a:ext cx="8228160" cy="638640"/>
           </a:xfrm>
           <a:prstGeom prst="rect">
             <a:avLst/>
@@ -10277,355 +10363,7 @@
                 <a:latin typeface="DejaVu Serif"/>
                 <a:ea typeface="DejaVu Serif"/>
               </a:rPr>
-              <a:t>N</a:t>
-            </a:r>
-            <a:r>
-              <a:rPr lang="en-US" sz="2400" b="1" u="none" strike="noStrike">
-                <a:solidFill>
-                  <a:srgbClr val="E8E8E8"/>
-                </a:solidFill>
-                <a:effectLst/>
-                <a:uFillTx/>
-                <a:latin typeface="DejaVu Serif"/>
-                <a:ea typeface="DejaVu Serif"/>
-              </a:rPr>
-              <a:t>o </a:t>
-            </a:r>
-            <a:r>
-              <a:rPr lang="en-US" sz="2400" b="1" u="none" strike="noStrike">
-                <a:solidFill>
-                  <a:srgbClr val="E8E8E8"/>
-                </a:solidFill>
-                <a:effectLst/>
-                <a:uFillTx/>
-                <a:latin typeface="DejaVu Serif"/>
-                <a:ea typeface="DejaVu Serif"/>
-              </a:rPr>
-              <a:t>m</a:t>
-            </a:r>
-            <a:r>
-              <a:rPr lang="en-US" sz="2400" b="1" u="none" strike="noStrike">
-                <a:solidFill>
-                  <a:srgbClr val="E8E8E8"/>
-                </a:solidFill>
-                <a:effectLst/>
-                <a:uFillTx/>
-                <a:latin typeface="DejaVu Serif"/>
-                <a:ea typeface="DejaVu Serif"/>
-              </a:rPr>
-              <a:t>o</a:t>
-            </a:r>
-            <a:r>
-              <a:rPr lang="en-US" sz="2400" b="1" u="none" strike="noStrike">
-                <a:solidFill>
-                  <a:srgbClr val="E8E8E8"/>
-                </a:solidFill>
-                <a:effectLst/>
-                <a:uFillTx/>
-                <a:latin typeface="DejaVu Serif"/>
-                <a:ea typeface="DejaVu Serif"/>
-              </a:rPr>
-              <a:t>d</a:t>
-            </a:r>
-            <a:r>
-              <a:rPr lang="en-US" sz="2400" b="1" u="none" strike="noStrike">
-                <a:solidFill>
-                  <a:srgbClr val="E8E8E8"/>
-                </a:solidFill>
-                <a:effectLst/>
-                <a:uFillTx/>
-                <a:latin typeface="DejaVu Serif"/>
-                <a:ea typeface="DejaVu Serif"/>
-              </a:rPr>
-              <a:t>el </a:t>
-            </a:r>
-            <a:r>
-              <a:rPr lang="en-US" sz="2400" b="1" u="none" strike="noStrike">
-                <a:solidFill>
-                  <a:srgbClr val="E8E8E8"/>
-                </a:solidFill>
-                <a:effectLst/>
-                <a:uFillTx/>
-                <a:latin typeface="DejaVu Serif"/>
-                <a:ea typeface="DejaVu Serif"/>
-              </a:rPr>
-              <a:t>re</a:t>
-            </a:r>
-            <a:r>
-              <a:rPr lang="en-US" sz="2400" b="1" u="none" strike="noStrike">
-                <a:solidFill>
-                  <a:srgbClr val="E8E8E8"/>
-                </a:solidFill>
-                <a:effectLst/>
-                <a:uFillTx/>
-                <a:latin typeface="DejaVu Serif"/>
-                <a:ea typeface="DejaVu Serif"/>
-              </a:rPr>
-              <a:t>a</a:t>
-            </a:r>
-            <a:r>
-              <a:rPr lang="en-US" sz="2400" b="1" u="none" strike="noStrike">
-                <a:solidFill>
-                  <a:srgbClr val="E8E8E8"/>
-                </a:solidFill>
-                <a:effectLst/>
-                <a:uFillTx/>
-                <a:latin typeface="DejaVu Serif"/>
-                <a:ea typeface="DejaVu Serif"/>
-              </a:rPr>
-              <a:t>c</a:t>
-            </a:r>
-            <a:r>
-              <a:rPr lang="en-US" sz="2400" b="1" u="none" strike="noStrike">
-                <a:solidFill>
-                  <a:srgbClr val="E8E8E8"/>
-                </a:solidFill>
-                <a:effectLst/>
-                <a:uFillTx/>
-                <a:latin typeface="DejaVu Serif"/>
-                <a:ea typeface="DejaVu Serif"/>
-              </a:rPr>
-              <a:t>h</a:t>
-            </a:r>
-            <a:r>
-              <a:rPr lang="en-US" sz="2400" b="1" u="none" strike="noStrike">
-                <a:solidFill>
-                  <a:srgbClr val="E8E8E8"/>
-                </a:solidFill>
-                <a:effectLst/>
-                <a:uFillTx/>
-                <a:latin typeface="DejaVu Serif"/>
-                <a:ea typeface="DejaVu Serif"/>
-              </a:rPr>
-              <a:t>e</a:t>
-            </a:r>
-            <a:r>
-              <a:rPr lang="en-US" sz="2400" b="1" u="none" strike="noStrike">
-                <a:solidFill>
-                  <a:srgbClr val="E8E8E8"/>
-                </a:solidFill>
-                <a:effectLst/>
-                <a:uFillTx/>
-                <a:latin typeface="DejaVu Serif"/>
-                <a:ea typeface="DejaVu Serif"/>
-              </a:rPr>
-              <a:t>d </a:t>
-            </a:r>
-            <a:r>
-              <a:rPr lang="en-US" sz="2400" b="1" u="none" strike="noStrike">
-                <a:solidFill>
-                  <a:srgbClr val="E8E8E8"/>
-                </a:solidFill>
-                <a:effectLst/>
-                <a:uFillTx/>
-                <a:latin typeface="DejaVu Serif"/>
-                <a:ea typeface="DejaVu Serif"/>
-              </a:rPr>
-              <a:t>cl</a:t>
-            </a:r>
-            <a:r>
-              <a:rPr lang="en-US" sz="2400" b="1" u="none" strike="noStrike">
-                <a:solidFill>
-                  <a:srgbClr val="E8E8E8"/>
-                </a:solidFill>
-                <a:effectLst/>
-                <a:uFillTx/>
-                <a:latin typeface="DejaVu Serif"/>
-                <a:ea typeface="DejaVu Serif"/>
-              </a:rPr>
-              <a:t>in</a:t>
-            </a:r>
-            <a:r>
-              <a:rPr lang="en-US" sz="2400" b="1" u="none" strike="noStrike">
-                <a:solidFill>
-                  <a:srgbClr val="E8E8E8"/>
-                </a:solidFill>
-                <a:effectLst/>
-                <a:uFillTx/>
-                <a:latin typeface="DejaVu Serif"/>
-                <a:ea typeface="DejaVu Serif"/>
-              </a:rPr>
-              <a:t>ic</a:t>
-            </a:r>
-            <a:r>
-              <a:rPr lang="en-US" sz="2400" b="1" u="none" strike="noStrike">
-                <a:solidFill>
-                  <a:srgbClr val="E8E8E8"/>
-                </a:solidFill>
-                <a:effectLst/>
-                <a:uFillTx/>
-                <a:latin typeface="DejaVu Serif"/>
-                <a:ea typeface="DejaVu Serif"/>
-              </a:rPr>
-              <a:t>al</a:t>
-            </a:r>
-            <a:r>
-              <a:rPr lang="en-US" sz="2400" b="1" u="none" strike="noStrike">
-                <a:solidFill>
-                  <a:srgbClr val="E8E8E8"/>
-                </a:solidFill>
-                <a:effectLst/>
-                <a:uFillTx/>
-                <a:latin typeface="DejaVu Serif"/>
-                <a:ea typeface="DejaVu Serif"/>
-              </a:rPr>
-              <a:t>ly </a:t>
-            </a:r>
-            <a:r>
-              <a:rPr lang="en-US" sz="2400" b="1" u="none" strike="noStrike">
-                <a:solidFill>
-                  <a:srgbClr val="E8E8E8"/>
-                </a:solidFill>
-                <a:effectLst/>
-                <a:uFillTx/>
-                <a:latin typeface="DejaVu Serif"/>
-                <a:ea typeface="DejaVu Serif"/>
-              </a:rPr>
-              <a:t>a</a:t>
-            </a:r>
-            <a:r>
-              <a:rPr lang="en-US" sz="2400" b="1" u="none" strike="noStrike">
-                <a:solidFill>
-                  <a:srgbClr val="E8E8E8"/>
-                </a:solidFill>
-                <a:effectLst/>
-                <a:uFillTx/>
-                <a:latin typeface="DejaVu Serif"/>
-                <a:ea typeface="DejaVu Serif"/>
-              </a:rPr>
-              <a:t>c</a:t>
-            </a:r>
-            <a:r>
-              <a:rPr lang="en-US" sz="2400" b="1" u="none" strike="noStrike">
-                <a:solidFill>
-                  <a:srgbClr val="E8E8E8"/>
-                </a:solidFill>
-                <a:effectLst/>
-                <a:uFillTx/>
-                <a:latin typeface="DejaVu Serif"/>
-                <a:ea typeface="DejaVu Serif"/>
-              </a:rPr>
-              <a:t>c</a:t>
-            </a:r>
-            <a:r>
-              <a:rPr lang="en-US" sz="2400" b="1" u="none" strike="noStrike">
-                <a:solidFill>
-                  <a:srgbClr val="E8E8E8"/>
-                </a:solidFill>
-                <a:effectLst/>
-                <a:uFillTx/>
-                <a:latin typeface="DejaVu Serif"/>
-                <a:ea typeface="DejaVu Serif"/>
-              </a:rPr>
-              <a:t>e</a:t>
-            </a:r>
-            <a:r>
-              <a:rPr lang="en-US" sz="2400" b="1" u="none" strike="noStrike">
-                <a:solidFill>
-                  <a:srgbClr val="E8E8E8"/>
-                </a:solidFill>
-                <a:effectLst/>
-                <a:uFillTx/>
-                <a:latin typeface="DejaVu Serif"/>
-                <a:ea typeface="DejaVu Serif"/>
-              </a:rPr>
-              <a:t>pt</a:t>
-            </a:r>
-            <a:r>
-              <a:rPr lang="en-US" sz="2400" b="1" u="none" strike="noStrike">
-                <a:solidFill>
-                  <a:srgbClr val="E8E8E8"/>
-                </a:solidFill>
-                <a:effectLst/>
-                <a:uFillTx/>
-                <a:latin typeface="DejaVu Serif"/>
-                <a:ea typeface="DejaVu Serif"/>
-              </a:rPr>
-              <a:t>a</a:t>
-            </a:r>
-            <a:r>
-              <a:rPr lang="en-US" sz="2400" b="1" u="none" strike="noStrike">
-                <a:solidFill>
-                  <a:srgbClr val="E8E8E8"/>
-                </a:solidFill>
-                <a:effectLst/>
-                <a:uFillTx/>
-                <a:latin typeface="DejaVu Serif"/>
-                <a:ea typeface="DejaVu Serif"/>
-              </a:rPr>
-              <a:t>bl</a:t>
-            </a:r>
-            <a:r>
-              <a:rPr lang="en-US" sz="2400" b="1" u="none" strike="noStrike">
-                <a:solidFill>
-                  <a:srgbClr val="E8E8E8"/>
-                </a:solidFill>
-                <a:effectLst/>
-                <a:uFillTx/>
-                <a:latin typeface="DejaVu Serif"/>
-                <a:ea typeface="DejaVu Serif"/>
-              </a:rPr>
-              <a:t>e </a:t>
-            </a:r>
-            <a:r>
-              <a:rPr lang="en-US" sz="2400" b="1" u="none" strike="noStrike">
-                <a:solidFill>
-                  <a:srgbClr val="E8E8E8"/>
-                </a:solidFill>
-                <a:effectLst/>
-                <a:uFillTx/>
-                <a:latin typeface="DejaVu Serif"/>
-                <a:ea typeface="DejaVu Serif"/>
-              </a:rPr>
-              <a:t>q</a:t>
-            </a:r>
-            <a:r>
-              <a:rPr lang="en-US" sz="2400" b="1" u="none" strike="noStrike">
-                <a:solidFill>
-                  <a:srgbClr val="E8E8E8"/>
-                </a:solidFill>
-                <a:effectLst/>
-                <a:uFillTx/>
-                <a:latin typeface="DejaVu Serif"/>
-                <a:ea typeface="DejaVu Serif"/>
-              </a:rPr>
-              <a:t>u</a:t>
-            </a:r>
-            <a:r>
-              <a:rPr lang="en-US" sz="2400" b="1" u="none" strike="noStrike">
-                <a:solidFill>
-                  <a:srgbClr val="E8E8E8"/>
-                </a:solidFill>
-                <a:effectLst/>
-                <a:uFillTx/>
-                <a:latin typeface="DejaVu Serif"/>
-                <a:ea typeface="DejaVu Serif"/>
-              </a:rPr>
-              <a:t>al</a:t>
-            </a:r>
-            <a:r>
-              <a:rPr lang="en-US" sz="2400" b="1" u="none" strike="noStrike">
-                <a:solidFill>
-                  <a:srgbClr val="E8E8E8"/>
-                </a:solidFill>
-                <a:effectLst/>
-                <a:uFillTx/>
-                <a:latin typeface="DejaVu Serif"/>
-                <a:ea typeface="DejaVu Serif"/>
-              </a:rPr>
-              <a:t>it</a:t>
-            </a:r>
-            <a:r>
-              <a:rPr lang="en-US" sz="2400" b="1" u="none" strike="noStrike">
-                <a:solidFill>
-                  <a:srgbClr val="E8E8E8"/>
-                </a:solidFill>
-                <a:effectLst/>
-                <a:uFillTx/>
-                <a:latin typeface="DejaVu Serif"/>
-                <a:ea typeface="DejaVu Serif"/>
-              </a:rPr>
-              <a:t>y</a:t>
+              <a:t>No model reached clinically acceptable quality</a:t>
             </a:r>
             <a:endParaRPr lang="de-DE" sz="2400" b="0" u="none" strike="noStrike">
               <a:solidFill>
@@ -10647,7 +10385,7 @@
         <p:spPr>
           <a:xfrm>
             <a:off x="5577840" y="1321560"/>
-            <a:ext cx="3199320" cy="2284920"/>
+            <a:ext cx="3198960" cy="2284560"/>
           </a:xfrm>
           <a:prstGeom prst="roundRect">
             <a:avLst>
@@ -10700,7 +10438,7 @@
         <p:spPr>
           <a:xfrm>
             <a:off x="5715000" y="1394640"/>
-            <a:ext cx="2925000" cy="273240"/>
+            <a:ext cx="2924640" cy="272880"/>
           </a:xfrm>
           <a:prstGeom prst="rect">
             <a:avLst/>
@@ -12080,7 +11818,7 @@
         <p:spPr>
           <a:xfrm>
             <a:off x="365760" y="4864680"/>
-            <a:ext cx="6856920" cy="227520"/>
+            <a:ext cx="6856560" cy="227160"/>
           </a:xfrm>
           <a:prstGeom prst="rect">
             <a:avLst/>
@@ -12119,163 +11857,7 @@
                 <a:latin typeface="DejaVu Serif"/>
                 <a:ea typeface="DejaVu Serif"/>
               </a:rPr>
-              <a:t>AI-</a:t>
-            </a:r>
-            <a:r>
-              <a:rPr lang="en-US" sz="800" b="0" u="none" strike="noStrike">
-                <a:solidFill>
-                  <a:srgbClr val="5A6570"/>
-                </a:solidFill>
-                <a:effectLst/>
-                <a:uFillTx/>
-                <a:latin typeface="DejaVu Serif"/>
-                <a:ea typeface="DejaVu Serif"/>
-              </a:rPr>
-              <a:t>Anam</a:t>
-            </a:r>
-            <a:r>
-              <a:rPr lang="en-US" sz="800" b="0" u="none" strike="noStrike">
-                <a:solidFill>
-                  <a:srgbClr val="5A6570"/>
-                </a:solidFill>
-                <a:effectLst/>
-                <a:uFillTx/>
-                <a:latin typeface="DejaVu Serif"/>
-                <a:ea typeface="DejaVu Serif"/>
-              </a:rPr>
-              <a:t>nesis · </a:t>
-            </a:r>
-            <a:r>
-              <a:rPr lang="en-US" sz="800" b="0" u="none" strike="noStrike">
-                <a:solidFill>
-                  <a:srgbClr val="5A6570"/>
-                </a:solidFill>
-                <a:effectLst/>
-                <a:uFillTx/>
-                <a:latin typeface="DejaVu Serif"/>
-                <a:ea typeface="DejaVu Serif"/>
-              </a:rPr>
-              <a:t>Maste</a:t>
-            </a:r>
-            <a:r>
-              <a:rPr lang="en-US" sz="800" b="0" u="none" strike="noStrike">
-                <a:solidFill>
-                  <a:srgbClr val="5A6570"/>
-                </a:solidFill>
-                <a:effectLst/>
-                <a:uFillTx/>
-                <a:latin typeface="DejaVu Serif"/>
-                <a:ea typeface="DejaVu Serif"/>
-              </a:rPr>
-              <a:t>r </a:t>
-            </a:r>
-            <a:r>
-              <a:rPr lang="en-US" sz="800" b="0" u="none" strike="noStrike">
-                <a:solidFill>
-                  <a:srgbClr val="5A6570"/>
-                </a:solidFill>
-                <a:effectLst/>
-                <a:uFillTx/>
-                <a:latin typeface="DejaVu Serif"/>
-                <a:ea typeface="DejaVu Serif"/>
-              </a:rPr>
-              <a:t>Semin</a:t>
-            </a:r>
-            <a:r>
-              <a:rPr lang="en-US" sz="800" b="0" u="none" strike="noStrike">
-                <a:solidFill>
-                  <a:srgbClr val="5A6570"/>
-                </a:solidFill>
-                <a:effectLst/>
-                <a:uFillTx/>
-                <a:latin typeface="DejaVu Serif"/>
-                <a:ea typeface="DejaVu Serif"/>
-              </a:rPr>
-              <a:t>ar · </a:t>
-            </a:r>
-            <a:r>
-              <a:rPr lang="en-US" sz="800" b="0" u="none" strike="noStrike">
-                <a:solidFill>
-                  <a:srgbClr val="5A6570"/>
-                </a:solidFill>
-                <a:effectLst/>
-                <a:uFillTx/>
-                <a:latin typeface="DejaVu Serif"/>
-                <a:ea typeface="DejaVu Serif"/>
-              </a:rPr>
-              <a:t>PwC </a:t>
-            </a:r>
-            <a:r>
-              <a:rPr lang="en-US" sz="800" b="0" u="none" strike="noStrike">
-                <a:solidFill>
-                  <a:srgbClr val="5A6570"/>
-                </a:solidFill>
-                <a:effectLst/>
-                <a:uFillTx/>
-                <a:latin typeface="DejaVu Serif"/>
-                <a:ea typeface="DejaVu Serif"/>
-              </a:rPr>
-              <a:t>× </a:t>
-            </a:r>
-            <a:r>
-              <a:rPr lang="en-US" sz="800" b="0" u="none" strike="noStrike">
-                <a:solidFill>
-                  <a:srgbClr val="5A6570"/>
-                </a:solidFill>
-                <a:effectLst/>
-                <a:uFillTx/>
-                <a:latin typeface="DejaVu Serif"/>
-                <a:ea typeface="DejaVu Serif"/>
-              </a:rPr>
-              <a:t>Hochs</a:t>
-            </a:r>
-            <a:r>
-              <a:rPr lang="en-US" sz="800" b="0" u="none" strike="noStrike">
-                <a:solidFill>
-                  <a:srgbClr val="5A6570"/>
-                </a:solidFill>
-                <a:effectLst/>
-                <a:uFillTx/>
-                <a:latin typeface="DejaVu Serif"/>
-                <a:ea typeface="DejaVu Serif"/>
-              </a:rPr>
-              <a:t>chule </a:t>
-            </a:r>
-            <a:r>
-              <a:rPr lang="en-US" sz="800" b="0" u="none" strike="noStrike">
-                <a:solidFill>
-                  <a:srgbClr val="5A6570"/>
-                </a:solidFill>
-                <a:effectLst/>
-                <a:uFillTx/>
-                <a:latin typeface="DejaVu Serif"/>
-                <a:ea typeface="DejaVu Serif"/>
-              </a:rPr>
-              <a:t>Hanno</a:t>
-            </a:r>
-            <a:r>
-              <a:rPr lang="en-US" sz="800" b="0" u="none" strike="noStrike">
-                <a:solidFill>
-                  <a:srgbClr val="5A6570"/>
-                </a:solidFill>
-                <a:effectLst/>
-                <a:uFillTx/>
-                <a:latin typeface="DejaVu Serif"/>
-                <a:ea typeface="DejaVu Serif"/>
-              </a:rPr>
-              <a:t>ver · </a:t>
-            </a:r>
-            <a:r>
-              <a:rPr lang="en-US" sz="800" b="0" u="none" strike="noStrike">
-                <a:solidFill>
-                  <a:srgbClr val="5A6570"/>
-                </a:solidFill>
-                <a:effectLst/>
-                <a:uFillTx/>
-                <a:latin typeface="DejaVu Serif"/>
-                <a:ea typeface="DejaVu Serif"/>
-              </a:rPr>
-              <a:t>2026</a:t>
+              <a:t>AI-Anamnesis · Master Seminar · PwC × Hochschule Hannover · 2026</a:t>
             </a:r>
             <a:endParaRPr lang="de-DE" sz="800" b="0" u="none" strike="noStrike">
               <a:solidFill>
@@ -12297,7 +11879,7 @@
         <p:spPr>
           <a:xfrm>
             <a:off x="7772400" y="4864680"/>
-            <a:ext cx="1004760" cy="227520"/>
+            <a:ext cx="1004400" cy="227160"/>
           </a:xfrm>
           <a:prstGeom prst="rect">
             <a:avLst/>
@@ -12358,7 +11940,7 @@
         <p:spPr>
           <a:xfrm>
             <a:off x="510840" y="1450080"/>
-            <a:ext cx="359280" cy="359280"/>
+            <a:ext cx="358920" cy="358920"/>
           </a:xfrm>
           <a:prstGeom prst="rect">
             <a:avLst/>
@@ -12402,7 +11984,7 @@
         </p:nvGraphicFramePr>
         <p:xfrm>
           <a:off x="360000" y="1229760"/>
-          <a:ext cx="5079960" cy="2925360"/>
+          <a:ext cx="5079600" cy="2925000"/>
         </p:xfrm>
         <a:graphic>
           <a:graphicData uri="http://schemas.openxmlformats.org/drawingml/2006/chart">
@@ -12419,7 +12001,7 @@
         <p:spPr>
           <a:xfrm>
             <a:off x="1078920" y="4288320"/>
-            <a:ext cx="163800" cy="127440"/>
+            <a:ext cx="163440" cy="127080"/>
           </a:xfrm>
           <a:prstGeom prst="roundRect">
             <a:avLst>
@@ -12467,7 +12049,7 @@
         <p:spPr>
           <a:xfrm>
             <a:off x="1280160" y="4260960"/>
-            <a:ext cx="1188000" cy="182160"/>
+            <a:ext cx="1187640" cy="181800"/>
           </a:xfrm>
           <a:prstGeom prst="rect">
             <a:avLst/>
@@ -12528,7 +12110,7 @@
         <p:spPr>
           <a:xfrm>
             <a:off x="2541960" y="4288320"/>
-            <a:ext cx="163800" cy="127440"/>
+            <a:ext cx="163440" cy="127080"/>
           </a:xfrm>
           <a:prstGeom prst="roundRect">
             <a:avLst>
@@ -12576,7 +12158,7 @@
         <p:spPr>
           <a:xfrm>
             <a:off x="2743200" y="4260960"/>
-            <a:ext cx="1370880" cy="182160"/>
+            <a:ext cx="1370520" cy="181800"/>
           </a:xfrm>
           <a:prstGeom prst="rect">
             <a:avLst/>
@@ -12637,7 +12219,7 @@
         <p:spPr>
           <a:xfrm>
             <a:off x="4187880" y="4288320"/>
-            <a:ext cx="163800" cy="127440"/>
+            <a:ext cx="163440" cy="127080"/>
           </a:xfrm>
           <a:prstGeom prst="roundRect">
             <a:avLst>
@@ -12685,7 +12267,7 @@
         <p:spPr>
           <a:xfrm>
             <a:off x="4389120" y="4260960"/>
-            <a:ext cx="1188000" cy="182160"/>
+            <a:ext cx="1187640" cy="181800"/>
           </a:xfrm>
           <a:prstGeom prst="rect">
             <a:avLst/>
@@ -12746,7 +12328,7 @@
         <p:spPr>
           <a:xfrm>
             <a:off x="4446720" y="1258200"/>
-            <a:ext cx="0" cy="2671560"/>
+            <a:ext cx="360" cy="2671560"/>
           </a:xfrm>
           <a:prstGeom prst="line">
             <a:avLst/>
@@ -12794,7 +12376,7 @@
         <p:spPr>
           <a:xfrm>
             <a:off x="317880" y="1451880"/>
-            <a:ext cx="359280" cy="359280"/>
+            <a:ext cx="358920" cy="358920"/>
           </a:xfrm>
           <a:prstGeom prst="rect">
             <a:avLst/>
@@ -12843,7 +12425,7 @@
         <p:spPr>
           <a:xfrm>
             <a:off x="478440" y="1557720"/>
-            <a:ext cx="179280" cy="99720"/>
+            <a:ext cx="178920" cy="99360"/>
           </a:xfrm>
           <a:prstGeom prst="rect">
             <a:avLst/>
@@ -13074,7 +12656,7 @@
         <p:spPr>
           <a:xfrm>
             <a:off x="457200" y="274320"/>
-            <a:ext cx="8228520" cy="639000"/>
+            <a:ext cx="8228160" cy="638640"/>
           </a:xfrm>
           <a:prstGeom prst="rect">
             <a:avLst/>
@@ -13147,7 +12729,7 @@
         <p:spPr>
           <a:xfrm>
             <a:off x="457200" y="1188720"/>
-            <a:ext cx="3930840" cy="2650680"/>
+            <a:ext cx="3930480" cy="2650320"/>
           </a:xfrm>
           <a:prstGeom prst="roundRect">
             <a:avLst>
@@ -13195,7 +12777,7 @@
         <p:spPr>
           <a:xfrm>
             <a:off x="640080" y="1325880"/>
-            <a:ext cx="2742120" cy="273240"/>
+            <a:ext cx="2741760" cy="272880"/>
           </a:xfrm>
           <a:prstGeom prst="rect">
             <a:avLst/>
@@ -13256,7 +12838,7 @@
         <p:spPr>
           <a:xfrm>
             <a:off x="640080" y="1645920"/>
-            <a:ext cx="3565080" cy="410400"/>
+            <a:ext cx="3564720" cy="410040"/>
           </a:xfrm>
           <a:prstGeom prst="rect">
             <a:avLst/>
@@ -13317,7 +12899,7 @@
         <p:spPr>
           <a:xfrm>
             <a:off x="640080" y="2240280"/>
-            <a:ext cx="3565080" cy="318960"/>
+            <a:ext cx="3564720" cy="318600"/>
           </a:xfrm>
           <a:prstGeom prst="rect">
             <a:avLst/>
@@ -13368,79 +12950,7 @@
                 <a:latin typeface="DejaVu Serif"/>
                 <a:ea typeface="DejaVu Serif"/>
               </a:rPr>
-              <a:t>  </a:t>
-            </a:r>
-            <a:r>
-              <a:rPr lang="en-US" sz="1300" b="0" u="none" strike="noStrike">
-                <a:solidFill>
-                  <a:srgbClr val="E8E8E8"/>
-                </a:solidFill>
-                <a:effectLst/>
-                <a:uFillTx/>
-                <a:latin typeface="DejaVu Serif"/>
-                <a:ea typeface="DejaVu Serif"/>
-              </a:rPr>
-              <a:t>Low</a:t>
-            </a:r>
-            <a:r>
-              <a:rPr lang="en-US" sz="1300" b="0" u="none" strike="noStrike">
-                <a:solidFill>
-                  <a:srgbClr val="E8E8E8"/>
-                </a:solidFill>
-                <a:effectLst/>
-                <a:uFillTx/>
-                <a:latin typeface="DejaVu Serif"/>
-                <a:ea typeface="DejaVu Serif"/>
-              </a:rPr>
-              <a:t>est </a:t>
-            </a:r>
-            <a:r>
-              <a:rPr lang="en-US" sz="1300" b="0" u="none" strike="noStrike">
-                <a:solidFill>
-                  <a:srgbClr val="E8E8E8"/>
-                </a:solidFill>
-                <a:effectLst/>
-                <a:uFillTx/>
-                <a:latin typeface="DejaVu Serif"/>
-                <a:ea typeface="DejaVu Serif"/>
-              </a:rPr>
-              <a:t>WE</a:t>
-            </a:r>
-            <a:r>
-              <a:rPr lang="en-US" sz="1300" b="0" u="none" strike="noStrike">
-                <a:solidFill>
-                  <a:srgbClr val="E8E8E8"/>
-                </a:solidFill>
-                <a:effectLst/>
-                <a:uFillTx/>
-                <a:latin typeface="DejaVu Serif"/>
-                <a:ea typeface="DejaVu Serif"/>
-              </a:rPr>
-              <a:t>R </a:t>
-            </a:r>
-            <a:r>
-              <a:rPr lang="en-US" sz="1300" b="0" u="none" strike="noStrike">
-                <a:solidFill>
-                  <a:srgbClr val="E8E8E8"/>
-                </a:solidFill>
-                <a:effectLst/>
-                <a:uFillTx/>
-                <a:latin typeface="DejaVu Serif"/>
-                <a:ea typeface="DejaVu Serif"/>
-              </a:rPr>
-              <a:t>(8.9 </a:t>
-            </a:r>
-            <a:r>
-              <a:rPr lang="en-US" sz="1300" b="0" u="none" strike="noStrike">
-                <a:solidFill>
-                  <a:srgbClr val="E8E8E8"/>
-                </a:solidFill>
-                <a:effectLst/>
-                <a:uFillTx/>
-                <a:latin typeface="DejaVu Serif"/>
-                <a:ea typeface="DejaVu Serif"/>
-              </a:rPr>
-              <a:t>%)</a:t>
+              <a:t>  Lowest WER (8.9 %)</a:t>
             </a:r>
             <a:endParaRPr lang="de-DE" sz="1300" b="0" u="none" strike="noStrike">
               <a:solidFill>
@@ -13462,7 +12972,7 @@
         <p:spPr>
           <a:xfrm>
             <a:off x="640080" y="2606040"/>
-            <a:ext cx="3565080" cy="318960"/>
+            <a:ext cx="3564720" cy="318600"/>
           </a:xfrm>
           <a:prstGeom prst="rect">
             <a:avLst/>
@@ -13513,19 +13023,7 @@
                 <a:latin typeface="DejaVu Serif"/>
                 <a:ea typeface="DejaVu Serif"/>
               </a:rPr>
-              <a:t>  </a:t>
-            </a:r>
-            <a:r>
-              <a:rPr lang="en-US" sz="1300" b="0" u="none" strike="noStrike">
-                <a:solidFill>
-                  <a:srgbClr val="E8E8E8"/>
-                </a:solidFill>
-                <a:effectLst/>
-                <a:uFillTx/>
-                <a:latin typeface="DejaVu Serif"/>
-                <a:ea typeface="DejaVu Serif"/>
-              </a:rPr>
-              <a:t>Lowest hallucination rate (0.0 %)</a:t>
+              <a:t>  Lowest hallucination rate (0.0 %)</a:t>
             </a:r>
             <a:endParaRPr lang="de-DE" sz="1300" b="0" u="none" strike="noStrike">
               <a:solidFill>
@@ -13547,7 +13045,7 @@
         <p:spPr>
           <a:xfrm>
             <a:off x="640080" y="2971800"/>
-            <a:ext cx="3565080" cy="318960"/>
+            <a:ext cx="3564720" cy="318600"/>
           </a:xfrm>
           <a:prstGeom prst="rect">
             <a:avLst/>
@@ -13598,19 +13096,7 @@
                 <a:latin typeface="DejaVu Serif"/>
                 <a:ea typeface="DejaVu Serif"/>
               </a:rPr>
-              <a:t>  </a:t>
-            </a:r>
-            <a:r>
-              <a:rPr lang="en-US" sz="1300" b="0" u="none" strike="noStrike">
-                <a:solidFill>
-                  <a:srgbClr val="E8E8E8"/>
-                </a:solidFill>
-                <a:effectLst/>
-                <a:uFillTx/>
-                <a:latin typeface="DejaVu Serif"/>
-                <a:ea typeface="DejaVu Serif"/>
-              </a:rPr>
-              <a:t>Best SOAP score (4.5 / 8)</a:t>
+              <a:t>  Best SOAP score (4.5 / 8)</a:t>
             </a:r>
             <a:endParaRPr lang="de-DE" sz="1300" b="0" u="none" strike="noStrike">
               <a:solidFill>
@@ -13632,7 +13118,7 @@
         <p:spPr>
           <a:xfrm>
             <a:off x="4754880" y="1188720"/>
-            <a:ext cx="3930840" cy="2650680"/>
+            <a:ext cx="3930480" cy="2650320"/>
           </a:xfrm>
           <a:prstGeom prst="roundRect">
             <a:avLst>
@@ -13660,6 +13146,11 @@
             <a:noAutofit/>
           </a:bodyPr>
           <a:p>
+            <a:pPr>
+              <a:lnSpc>
+                <a:spcPct val="100000"/>
+              </a:lnSpc>
+            </a:pPr>
             <a:endParaRPr lang="de-DE" sz="1800" b="0" u="none" strike="noStrike">
               <a:solidFill>
                 <a:schemeClr val="dk1"/>
@@ -13680,7 +13171,7 @@
         <p:spPr>
           <a:xfrm>
             <a:off x="4937760" y="1325880"/>
-            <a:ext cx="2742120" cy="273240"/>
+            <a:ext cx="2741760" cy="272880"/>
           </a:xfrm>
           <a:prstGeom prst="rect">
             <a:avLst/>
@@ -13741,7 +13232,7 @@
         <p:spPr>
           <a:xfrm>
             <a:off x="4937760" y="1645920"/>
-            <a:ext cx="3565080" cy="410400"/>
+            <a:ext cx="3564720" cy="410040"/>
           </a:xfrm>
           <a:prstGeom prst="rect">
             <a:avLst/>
@@ -13780,127 +13271,7 @@
                 <a:latin typeface="DejaVu Serif"/>
                 <a:ea typeface="DejaVu Serif"/>
               </a:rPr>
-              <a:t>Sti</a:t>
-            </a:r>
-            <a:r>
-              <a:rPr lang="en-US" sz="1600" b="1" u="none" strike="noStrike">
-                <a:solidFill>
-                  <a:srgbClr val="E8E8E8"/>
-                </a:solidFill>
-                <a:effectLst/>
-                <a:uFillTx/>
-                <a:latin typeface="DejaVu Serif"/>
-                <a:ea typeface="DejaVu Serif"/>
-              </a:rPr>
-              <a:t>ll </a:t>
-            </a:r>
-            <a:r>
-              <a:rPr lang="en-US" sz="1600" b="1" u="none" strike="noStrike">
-                <a:solidFill>
-                  <a:srgbClr val="E8E8E8"/>
-                </a:solidFill>
-                <a:effectLst/>
-                <a:uFillTx/>
-                <a:latin typeface="DejaVu Serif"/>
-                <a:ea typeface="DejaVu Serif"/>
-              </a:rPr>
-              <a:t>no</a:t>
-            </a:r>
-            <a:r>
-              <a:rPr lang="en-US" sz="1600" b="1" u="none" strike="noStrike">
-                <a:solidFill>
-                  <a:srgbClr val="E8E8E8"/>
-                </a:solidFill>
-                <a:effectLst/>
-                <a:uFillTx/>
-                <a:latin typeface="DejaVu Serif"/>
-                <a:ea typeface="DejaVu Serif"/>
-              </a:rPr>
-              <a:t>t </a:t>
-            </a:r>
-            <a:r>
-              <a:rPr lang="en-US" sz="1600" b="1" u="none" strike="noStrike">
-                <a:solidFill>
-                  <a:srgbClr val="E8E8E8"/>
-                </a:solidFill>
-                <a:effectLst/>
-                <a:uFillTx/>
-                <a:latin typeface="DejaVu Serif"/>
-                <a:ea typeface="DejaVu Serif"/>
-              </a:rPr>
-              <a:t>cli</a:t>
-            </a:r>
-            <a:r>
-              <a:rPr lang="en-US" sz="1600" b="1" u="none" strike="noStrike">
-                <a:solidFill>
-                  <a:srgbClr val="E8E8E8"/>
-                </a:solidFill>
-                <a:effectLst/>
-                <a:uFillTx/>
-                <a:latin typeface="DejaVu Serif"/>
-                <a:ea typeface="DejaVu Serif"/>
-              </a:rPr>
-              <a:t>nic</a:t>
-            </a:r>
-            <a:r>
-              <a:rPr lang="en-US" sz="1600" b="1" u="none" strike="noStrike">
-                <a:solidFill>
-                  <a:srgbClr val="E8E8E8"/>
-                </a:solidFill>
-                <a:effectLst/>
-                <a:uFillTx/>
-                <a:latin typeface="DejaVu Serif"/>
-                <a:ea typeface="DejaVu Serif"/>
-              </a:rPr>
-              <a:t>all</a:t>
-            </a:r>
-            <a:r>
-              <a:rPr lang="en-US" sz="1600" b="1" u="none" strike="noStrike">
-                <a:solidFill>
-                  <a:srgbClr val="E8E8E8"/>
-                </a:solidFill>
-                <a:effectLst/>
-                <a:uFillTx/>
-                <a:latin typeface="DejaVu Serif"/>
-                <a:ea typeface="DejaVu Serif"/>
-              </a:rPr>
-              <a:t>y </a:t>
-            </a:r>
-            <a:r>
-              <a:rPr lang="en-US" sz="1600" b="1" u="none" strike="noStrike">
-                <a:solidFill>
-                  <a:srgbClr val="E8E8E8"/>
-                </a:solidFill>
-                <a:effectLst/>
-                <a:uFillTx/>
-                <a:latin typeface="DejaVu Serif"/>
-                <a:ea typeface="DejaVu Serif"/>
-              </a:rPr>
-              <a:t>us</a:t>
-            </a:r>
-            <a:r>
-              <a:rPr lang="en-US" sz="1600" b="1" u="none" strike="noStrike">
-                <a:solidFill>
-                  <a:srgbClr val="E8E8E8"/>
-                </a:solidFill>
-                <a:effectLst/>
-                <a:uFillTx/>
-                <a:latin typeface="DejaVu Serif"/>
-                <a:ea typeface="DejaVu Serif"/>
-              </a:rPr>
-              <a:t>abl</a:t>
-            </a:r>
-            <a:r>
-              <a:rPr lang="en-US" sz="1600" b="1" u="none" strike="noStrike">
-                <a:solidFill>
-                  <a:srgbClr val="E8E8E8"/>
-                </a:solidFill>
-                <a:effectLst/>
-                <a:uFillTx/>
-                <a:latin typeface="DejaVu Serif"/>
-                <a:ea typeface="DejaVu Serif"/>
-              </a:rPr>
-              <a:t>e</a:t>
+              <a:t>Still not clinically usable</a:t>
             </a:r>
             <a:endParaRPr lang="de-DE" sz="1600" b="0" u="none" strike="noStrike">
               <a:solidFill>
@@ -13922,7 +13293,7 @@
         <p:spPr>
           <a:xfrm>
             <a:off x="4937760" y="2240280"/>
-            <a:ext cx="3565080" cy="318960"/>
+            <a:ext cx="3564720" cy="318600"/>
           </a:xfrm>
           <a:prstGeom prst="rect">
             <a:avLst/>
@@ -13973,139 +13344,7 @@
                 <a:latin typeface="DejaVu Serif"/>
                 <a:ea typeface="DejaVu Serif"/>
               </a:rPr>
-              <a:t>  </a:t>
-            </a:r>
-            <a:r>
-              <a:rPr lang="en-US" sz="1300" b="0" u="none" strike="noStrike">
-                <a:solidFill>
-                  <a:srgbClr val="E8E8E8"/>
-                </a:solidFill>
-                <a:effectLst/>
-                <a:uFillTx/>
-                <a:latin typeface="DejaVu Serif"/>
-                <a:ea typeface="DejaVu Serif"/>
-              </a:rPr>
-              <a:t>Zer</a:t>
-            </a:r>
-            <a:r>
-              <a:rPr lang="en-US" sz="1300" b="0" u="none" strike="noStrike">
-                <a:solidFill>
-                  <a:srgbClr val="E8E8E8"/>
-                </a:solidFill>
-                <a:effectLst/>
-                <a:uFillTx/>
-                <a:latin typeface="DejaVu Serif"/>
-                <a:ea typeface="DejaVu Serif"/>
-              </a:rPr>
-              <a:t>o </a:t>
-            </a:r>
-            <a:r>
-              <a:rPr lang="en-US" sz="1300" b="0" u="none" strike="noStrike">
-                <a:solidFill>
-                  <a:srgbClr val="E8E8E8"/>
-                </a:solidFill>
-                <a:effectLst/>
-                <a:uFillTx/>
-                <a:latin typeface="DejaVu Serif"/>
-                <a:ea typeface="DejaVu Serif"/>
-              </a:rPr>
-              <a:t>run</a:t>
-            </a:r>
-            <a:r>
-              <a:rPr lang="en-US" sz="1300" b="0" u="none" strike="noStrike">
-                <a:solidFill>
-                  <a:srgbClr val="E8E8E8"/>
-                </a:solidFill>
-                <a:effectLst/>
-                <a:uFillTx/>
-                <a:latin typeface="DejaVu Serif"/>
-                <a:ea typeface="DejaVu Serif"/>
-              </a:rPr>
-              <a:t>s </a:t>
-            </a:r>
-            <a:r>
-              <a:rPr lang="en-US" sz="1300" b="0" u="none" strike="noStrike">
-                <a:solidFill>
-                  <a:srgbClr val="E8E8E8"/>
-                </a:solidFill>
-                <a:effectLst/>
-                <a:uFillTx/>
-                <a:latin typeface="DejaVu Serif"/>
-                <a:ea typeface="DejaVu Serif"/>
-              </a:rPr>
-              <a:t>rea</a:t>
-            </a:r>
-            <a:r>
-              <a:rPr lang="en-US" sz="1300" b="0" u="none" strike="noStrike">
-                <a:solidFill>
-                  <a:srgbClr val="E8E8E8"/>
-                </a:solidFill>
-                <a:effectLst/>
-                <a:uFillTx/>
-                <a:latin typeface="DejaVu Serif"/>
-                <a:ea typeface="DejaVu Serif"/>
-              </a:rPr>
-              <a:t>che</a:t>
-            </a:r>
-            <a:r>
-              <a:rPr lang="en-US" sz="1300" b="0" u="none" strike="noStrike">
-                <a:solidFill>
-                  <a:srgbClr val="E8E8E8"/>
-                </a:solidFill>
-                <a:effectLst/>
-                <a:uFillTx/>
-                <a:latin typeface="DejaVu Serif"/>
-                <a:ea typeface="DejaVu Serif"/>
-              </a:rPr>
-              <a:t>d </a:t>
-            </a:r>
-            <a:r>
-              <a:rPr lang="en-US" sz="1300" b="0" u="none" strike="noStrike">
-                <a:solidFill>
-                  <a:srgbClr val="E8E8E8"/>
-                </a:solidFill>
-                <a:effectLst/>
-                <a:uFillTx/>
-                <a:latin typeface="DejaVu Serif"/>
-                <a:ea typeface="DejaVu Serif"/>
-              </a:rPr>
-              <a:t>'acc</a:t>
-            </a:r>
-            <a:r>
-              <a:rPr lang="en-US" sz="1300" b="0" u="none" strike="noStrike">
-                <a:solidFill>
-                  <a:srgbClr val="E8E8E8"/>
-                </a:solidFill>
-                <a:effectLst/>
-                <a:uFillTx/>
-                <a:latin typeface="DejaVu Serif"/>
-                <a:ea typeface="DejaVu Serif"/>
-              </a:rPr>
-              <a:t>ept</a:t>
-            </a:r>
-            <a:r>
-              <a:rPr lang="en-US" sz="1300" b="0" u="none" strike="noStrike">
-                <a:solidFill>
-                  <a:srgbClr val="E8E8E8"/>
-                </a:solidFill>
-                <a:effectLst/>
-                <a:uFillTx/>
-                <a:latin typeface="DejaVu Serif"/>
-                <a:ea typeface="DejaVu Serif"/>
-              </a:rPr>
-              <a:t>able</a:t>
-            </a:r>
-            <a:r>
-              <a:rPr lang="en-US" sz="1300" b="0" u="none" strike="noStrike">
-                <a:solidFill>
-                  <a:srgbClr val="E8E8E8"/>
-                </a:solidFill>
-                <a:effectLst/>
-                <a:uFillTx/>
-                <a:latin typeface="DejaVu Serif"/>
-                <a:ea typeface="DejaVu Serif"/>
-              </a:rPr>
-              <a:t>'</a:t>
+              <a:t>  Zero runs reached 'acceptable'</a:t>
             </a:r>
             <a:endParaRPr lang="de-DE" sz="1300" b="0" u="none" strike="noStrike">
               <a:solidFill>
@@ -14127,7 +13366,7 @@
         <p:spPr>
           <a:xfrm>
             <a:off x="4937760" y="2606040"/>
-            <a:ext cx="3565080" cy="318960"/>
+            <a:ext cx="3564720" cy="318600"/>
           </a:xfrm>
           <a:prstGeom prst="rect">
             <a:avLst/>
@@ -14178,115 +13417,7 @@
                 <a:latin typeface="DejaVu Serif"/>
                 <a:ea typeface="DejaVu Serif"/>
               </a:rPr>
-              <a:t>  </a:t>
-            </a:r>
-            <a:r>
-              <a:rPr lang="en-US" sz="1300" b="0" u="none" strike="noStrike">
-                <a:solidFill>
-                  <a:srgbClr val="E8E8E8"/>
-                </a:solidFill>
-                <a:effectLst/>
-                <a:uFillTx/>
-                <a:latin typeface="DejaVu Serif"/>
-                <a:ea typeface="DejaVu Serif"/>
-              </a:rPr>
-              <a:t>Pla</a:t>
-            </a:r>
-            <a:r>
-              <a:rPr lang="en-US" sz="1300" b="0" u="none" strike="noStrike">
-                <a:solidFill>
-                  <a:srgbClr val="E8E8E8"/>
-                </a:solidFill>
-                <a:effectLst/>
-                <a:uFillTx/>
-                <a:latin typeface="DejaVu Serif"/>
-                <a:ea typeface="DejaVu Serif"/>
-              </a:rPr>
-              <a:t>n </a:t>
-            </a:r>
-            <a:r>
-              <a:rPr lang="en-US" sz="1300" b="0" u="none" strike="noStrike">
-                <a:solidFill>
-                  <a:srgbClr val="E8E8E8"/>
-                </a:solidFill>
-                <a:effectLst/>
-                <a:uFillTx/>
-                <a:latin typeface="DejaVu Serif"/>
-                <a:ea typeface="DejaVu Serif"/>
-              </a:rPr>
-              <a:t>sect</a:t>
-            </a:r>
-            <a:r>
-              <a:rPr lang="en-US" sz="1300" b="0" u="none" strike="noStrike">
-                <a:solidFill>
-                  <a:srgbClr val="E8E8E8"/>
-                </a:solidFill>
-                <a:effectLst/>
-                <a:uFillTx/>
-                <a:latin typeface="DejaVu Serif"/>
-                <a:ea typeface="DejaVu Serif"/>
-              </a:rPr>
-              <a:t>ion </a:t>
-            </a:r>
-            <a:r>
-              <a:rPr lang="en-US" sz="1300" b="0" u="none" strike="noStrike">
-                <a:solidFill>
-                  <a:srgbClr val="E8E8E8"/>
-                </a:solidFill>
-                <a:effectLst/>
-                <a:uFillTx/>
-                <a:latin typeface="DejaVu Serif"/>
-                <a:ea typeface="DejaVu Serif"/>
-              </a:rPr>
-              <a:t>ave</a:t>
-            </a:r>
-            <a:r>
-              <a:rPr lang="en-US" sz="1300" b="0" u="none" strike="noStrike">
-                <a:solidFill>
-                  <a:srgbClr val="E8E8E8"/>
-                </a:solidFill>
-                <a:effectLst/>
-                <a:uFillTx/>
-                <a:latin typeface="DejaVu Serif"/>
-                <a:ea typeface="DejaVu Serif"/>
-              </a:rPr>
-              <a:t>rag</a:t>
-            </a:r>
-            <a:r>
-              <a:rPr lang="en-US" sz="1300" b="0" u="none" strike="noStrike">
-                <a:solidFill>
-                  <a:srgbClr val="E8E8E8"/>
-                </a:solidFill>
-                <a:effectLst/>
-                <a:uFillTx/>
-                <a:latin typeface="DejaVu Serif"/>
-                <a:ea typeface="DejaVu Serif"/>
-              </a:rPr>
-              <a:t>ed </a:t>
-            </a:r>
-            <a:r>
-              <a:rPr lang="en-US" sz="1300" b="0" u="none" strike="noStrike">
-                <a:solidFill>
-                  <a:srgbClr val="E8E8E8"/>
-                </a:solidFill>
-                <a:effectLst/>
-                <a:uFillTx/>
-                <a:latin typeface="DejaVu Serif"/>
-                <a:ea typeface="DejaVu Serif"/>
-              </a:rPr>
-              <a:t>0.1 </a:t>
-            </a:r>
-            <a:r>
-              <a:rPr lang="en-US" sz="1300" b="0" u="none" strike="noStrike">
-                <a:solidFill>
-                  <a:srgbClr val="E8E8E8"/>
-                </a:solidFill>
-                <a:effectLst/>
-                <a:uFillTx/>
-                <a:latin typeface="DejaVu Serif"/>
-                <a:ea typeface="DejaVu Serif"/>
-              </a:rPr>
-              <a:t>/ 2</a:t>
+              <a:t>  Plan section averaged 0.1 / 2</a:t>
             </a:r>
             <a:endParaRPr lang="de-DE" sz="1300" b="0" u="none" strike="noStrike">
               <a:solidFill>
@@ -14308,7 +13439,7 @@
         <p:spPr>
           <a:xfrm>
             <a:off x="4937760" y="2971800"/>
-            <a:ext cx="3565080" cy="318960"/>
+            <a:ext cx="3564720" cy="318600"/>
           </a:xfrm>
           <a:prstGeom prst="rect">
             <a:avLst/>
@@ -14359,151 +13490,7 @@
                 <a:latin typeface="DejaVu Serif"/>
                 <a:ea typeface="DejaVu Serif"/>
               </a:rPr>
-              <a:t>  </a:t>
-            </a:r>
-            <a:r>
-              <a:rPr lang="en-US" sz="1300" b="0" u="none" strike="noStrike">
-                <a:solidFill>
-                  <a:srgbClr val="E8E8E8"/>
-                </a:solidFill>
-                <a:effectLst/>
-                <a:uFillTx/>
-                <a:latin typeface="DejaVu Serif"/>
-                <a:ea typeface="DejaVu Serif"/>
-              </a:rPr>
-              <a:t>Perf</a:t>
-            </a:r>
-            <a:r>
-              <a:rPr lang="en-US" sz="1300" b="0" u="none" strike="noStrike">
-                <a:solidFill>
-                  <a:srgbClr val="E8E8E8"/>
-                </a:solidFill>
-                <a:effectLst/>
-                <a:uFillTx/>
-                <a:latin typeface="DejaVu Serif"/>
-                <a:ea typeface="DejaVu Serif"/>
-              </a:rPr>
-              <a:t>orm</a:t>
-            </a:r>
-            <a:r>
-              <a:rPr lang="en-US" sz="1300" b="0" u="none" strike="noStrike">
-                <a:solidFill>
-                  <a:srgbClr val="E8E8E8"/>
-                </a:solidFill>
-                <a:effectLst/>
-                <a:uFillTx/>
-                <a:latin typeface="DejaVu Serif"/>
-                <a:ea typeface="DejaVu Serif"/>
-              </a:rPr>
-              <a:t>anc</a:t>
-            </a:r>
-            <a:r>
-              <a:rPr lang="en-US" sz="1300" b="0" u="none" strike="noStrike">
-                <a:solidFill>
-                  <a:srgbClr val="E8E8E8"/>
-                </a:solidFill>
-                <a:effectLst/>
-                <a:uFillTx/>
-                <a:latin typeface="DejaVu Serif"/>
-                <a:ea typeface="DejaVu Serif"/>
-              </a:rPr>
-              <a:t>e </a:t>
-            </a:r>
-            <a:r>
-              <a:rPr lang="en-US" sz="1300" b="0" u="none" strike="noStrike">
-                <a:solidFill>
-                  <a:srgbClr val="E8E8E8"/>
-                </a:solidFill>
-                <a:effectLst/>
-                <a:uFillTx/>
-                <a:latin typeface="DejaVu Serif"/>
-                <a:ea typeface="DejaVu Serif"/>
-              </a:rPr>
-              <a:t>coll</a:t>
-            </a:r>
-            <a:r>
-              <a:rPr lang="en-US" sz="1300" b="0" u="none" strike="noStrike">
-                <a:solidFill>
-                  <a:srgbClr val="E8E8E8"/>
-                </a:solidFill>
-                <a:effectLst/>
-                <a:uFillTx/>
-                <a:latin typeface="DejaVu Serif"/>
-                <a:ea typeface="DejaVu Serif"/>
-              </a:rPr>
-              <a:t>aps</a:t>
-            </a:r>
-            <a:r>
-              <a:rPr lang="en-US" sz="1300" b="0" u="none" strike="noStrike">
-                <a:solidFill>
-                  <a:srgbClr val="E8E8E8"/>
-                </a:solidFill>
-                <a:effectLst/>
-                <a:uFillTx/>
-                <a:latin typeface="DejaVu Serif"/>
-                <a:ea typeface="DejaVu Serif"/>
-              </a:rPr>
-              <a:t>es </a:t>
-            </a:r>
-            <a:r>
-              <a:rPr lang="en-US" sz="1300" b="0" u="none" strike="noStrike">
-                <a:solidFill>
-                  <a:srgbClr val="E8E8E8"/>
-                </a:solidFill>
-                <a:effectLst/>
-                <a:uFillTx/>
-                <a:latin typeface="DejaVu Serif"/>
-                <a:ea typeface="DejaVu Serif"/>
-              </a:rPr>
-              <a:t>wit</a:t>
-            </a:r>
-            <a:r>
-              <a:rPr lang="en-US" sz="1300" b="0" u="none" strike="noStrike">
-                <a:solidFill>
-                  <a:srgbClr val="E8E8E8"/>
-                </a:solidFill>
-                <a:effectLst/>
-                <a:uFillTx/>
-                <a:latin typeface="DejaVu Serif"/>
-                <a:ea typeface="DejaVu Serif"/>
-              </a:rPr>
-              <a:t>h </a:t>
-            </a:r>
-            <a:r>
-              <a:rPr lang="en-US" sz="1300" b="0" u="none" strike="noStrike">
-                <a:solidFill>
-                  <a:srgbClr val="E8E8E8"/>
-                </a:solidFill>
-                <a:effectLst/>
-                <a:uFillTx/>
-                <a:latin typeface="DejaVu Serif"/>
-                <a:ea typeface="DejaVu Serif"/>
-              </a:rPr>
-              <a:t>bad </a:t>
-            </a:r>
-            <a:r>
-              <a:rPr lang="en-US" sz="1300" b="0" u="none" strike="noStrike">
-                <a:solidFill>
-                  <a:srgbClr val="E8E8E8"/>
-                </a:solidFill>
-                <a:effectLst/>
-                <a:uFillTx/>
-                <a:latin typeface="DejaVu Serif"/>
-                <a:ea typeface="DejaVu Serif"/>
-              </a:rPr>
-              <a:t>aud</a:t>
-            </a:r>
-            <a:r>
-              <a:rPr lang="en-US" sz="1300" b="0" u="none" strike="noStrike">
-                <a:solidFill>
-                  <a:srgbClr val="E8E8E8"/>
-                </a:solidFill>
-                <a:effectLst/>
-                <a:uFillTx/>
-                <a:latin typeface="DejaVu Serif"/>
-                <a:ea typeface="DejaVu Serif"/>
-              </a:rPr>
-              <a:t>io</a:t>
+              <a:t>  Performance collapses with bad audio</a:t>
             </a:r>
             <a:endParaRPr lang="de-DE" sz="1300" b="0" u="none" strike="noStrike">
               <a:solidFill>
@@ -14525,7 +13512,7 @@
         <p:spPr>
           <a:xfrm>
             <a:off x="365760" y="4864680"/>
-            <a:ext cx="6856920" cy="227520"/>
+            <a:ext cx="6856560" cy="227160"/>
           </a:xfrm>
           <a:prstGeom prst="rect">
             <a:avLst/>
@@ -14586,7 +13573,7 @@
         <p:spPr>
           <a:xfrm>
             <a:off x="7772400" y="4864680"/>
-            <a:ext cx="1004760" cy="227520"/>
+            <a:ext cx="1004400" cy="227160"/>
           </a:xfrm>
           <a:prstGeom prst="rect">
             <a:avLst/>
@@ -14894,7 +13881,7 @@
         <p:spPr>
           <a:xfrm>
             <a:off x="457200" y="274320"/>
-            <a:ext cx="8228520" cy="639000"/>
+            <a:ext cx="8228160" cy="638640"/>
           </a:xfrm>
           <a:prstGeom prst="rect">
             <a:avLst/>
@@ -14933,31 +13920,7 @@
                 <a:latin typeface="DejaVu Serif"/>
                 <a:ea typeface="DejaVu Serif"/>
               </a:rPr>
-              <a:t>What we </a:t>
-            </a:r>
-            <a:r>
-              <a:rPr lang="en-US" sz="2400" b="1" u="none" strike="noStrike">
-                <a:solidFill>
-                  <a:srgbClr val="E8E8E8"/>
-                </a:solidFill>
-                <a:effectLst/>
-                <a:uFillTx/>
-                <a:latin typeface="DejaVu Serif"/>
-                <a:ea typeface="DejaVu Serif"/>
-              </a:rPr>
-              <a:t>deliberately </a:t>
-            </a:r>
-            <a:r>
-              <a:rPr lang="en-US" sz="2400" b="1" u="none" strike="noStrike">
-                <a:solidFill>
-                  <a:srgbClr val="E8E8E8"/>
-                </a:solidFill>
-                <a:effectLst/>
-                <a:uFillTx/>
-                <a:latin typeface="DejaVu Serif"/>
-                <a:ea typeface="DejaVu Serif"/>
-              </a:rPr>
-              <a:t>left out</a:t>
+              <a:t>What we deliberately left out</a:t>
             </a:r>
             <a:endParaRPr lang="de-DE" sz="2400" b="0" u="none" strike="noStrike">
               <a:solidFill>
@@ -14979,7 +13942,7 @@
         <p:spPr>
           <a:xfrm>
             <a:off x="411480" y="1280160"/>
-            <a:ext cx="2650680" cy="2559240"/>
+            <a:ext cx="2650320" cy="2558880"/>
           </a:xfrm>
           <a:prstGeom prst="roundRect">
             <a:avLst>
@@ -15032,7 +13995,7 @@
         <p:spPr>
           <a:xfrm>
             <a:off x="411480" y="1280160"/>
-            <a:ext cx="72000" cy="2559240"/>
+            <a:ext cx="71640" cy="2558880"/>
           </a:xfrm>
           <a:prstGeom prst="roundRect">
             <a:avLst>
@@ -15085,7 +14048,7 @@
         <p:spPr>
           <a:xfrm>
             <a:off x="640080" y="1463040"/>
-            <a:ext cx="547560" cy="456120"/>
+            <a:ext cx="547200" cy="455760"/>
           </a:xfrm>
           <a:prstGeom prst="rect">
             <a:avLst/>
@@ -15145,7 +14108,7 @@
         <p:spPr>
           <a:xfrm>
             <a:off x="640080" y="2011680"/>
-            <a:ext cx="2284920" cy="364680"/>
+            <a:ext cx="2284560" cy="364320"/>
           </a:xfrm>
           <a:prstGeom prst="rect">
             <a:avLst/>
@@ -15206,7 +14169,7 @@
         <p:spPr>
           <a:xfrm>
             <a:off x="640080" y="2514600"/>
-            <a:ext cx="2284920" cy="1096200"/>
+            <a:ext cx="2284560" cy="1095840"/>
           </a:xfrm>
           <a:prstGeom prst="rect">
             <a:avLst/>
@@ -15267,7 +14230,7 @@
         <p:spPr>
           <a:xfrm>
             <a:off x="3246120" y="1280160"/>
-            <a:ext cx="2650680" cy="2559240"/>
+            <a:ext cx="2650320" cy="2558880"/>
           </a:xfrm>
           <a:prstGeom prst="roundRect">
             <a:avLst>
@@ -15320,7 +14283,7 @@
         <p:spPr>
           <a:xfrm>
             <a:off x="3246120" y="1280160"/>
-            <a:ext cx="72000" cy="2559240"/>
+            <a:ext cx="71640" cy="2558880"/>
           </a:xfrm>
           <a:prstGeom prst="roundRect">
             <a:avLst>
@@ -15373,7 +14336,7 @@
         <p:spPr>
           <a:xfrm>
             <a:off x="3474720" y="1463040"/>
-            <a:ext cx="547560" cy="456120"/>
+            <a:ext cx="547200" cy="455760"/>
           </a:xfrm>
           <a:prstGeom prst="rect">
             <a:avLst/>
@@ -15433,7 +14396,7 @@
         <p:spPr>
           <a:xfrm>
             <a:off x="3474720" y="2011680"/>
-            <a:ext cx="2284920" cy="364680"/>
+            <a:ext cx="2284560" cy="364320"/>
           </a:xfrm>
           <a:prstGeom prst="rect">
             <a:avLst/>
@@ -15494,7 +14457,7 @@
         <p:spPr>
           <a:xfrm>
             <a:off x="3474720" y="2514600"/>
-            <a:ext cx="2284920" cy="1096200"/>
+            <a:ext cx="2284560" cy="1095840"/>
           </a:xfrm>
           <a:prstGeom prst="rect">
             <a:avLst/>
@@ -15555,7 +14518,7 @@
         <p:spPr>
           <a:xfrm>
             <a:off x="6080760" y="1280160"/>
-            <a:ext cx="2650680" cy="2559240"/>
+            <a:ext cx="2650320" cy="2558880"/>
           </a:xfrm>
           <a:prstGeom prst="roundRect">
             <a:avLst>
@@ -15608,7 +14571,7 @@
         <p:spPr>
           <a:xfrm>
             <a:off x="6080760" y="1280160"/>
-            <a:ext cx="72000" cy="2559240"/>
+            <a:ext cx="71640" cy="2558880"/>
           </a:xfrm>
           <a:prstGeom prst="roundRect">
             <a:avLst>
@@ -15661,7 +14624,7 @@
         <p:spPr>
           <a:xfrm>
             <a:off x="6309360" y="1463040"/>
-            <a:ext cx="547560" cy="456120"/>
+            <a:ext cx="547200" cy="455760"/>
           </a:xfrm>
           <a:prstGeom prst="rect">
             <a:avLst/>
@@ -15721,7 +14684,7 @@
         <p:spPr>
           <a:xfrm>
             <a:off x="6309360" y="2011680"/>
-            <a:ext cx="2284920" cy="364680"/>
+            <a:ext cx="2284560" cy="364320"/>
           </a:xfrm>
           <a:prstGeom prst="rect">
             <a:avLst/>
@@ -15782,7 +14745,7 @@
         <p:spPr>
           <a:xfrm>
             <a:off x="6309360" y="2514600"/>
-            <a:ext cx="2284920" cy="1096200"/>
+            <a:ext cx="2284560" cy="1095840"/>
           </a:xfrm>
           <a:prstGeom prst="rect">
             <a:avLst/>
@@ -15843,7 +14806,7 @@
         <p:spPr>
           <a:xfrm>
             <a:off x="365760" y="4864680"/>
-            <a:ext cx="6856920" cy="227520"/>
+            <a:ext cx="6856560" cy="227160"/>
           </a:xfrm>
           <a:prstGeom prst="rect">
             <a:avLst/>
@@ -15904,7 +14867,7 @@
         <p:spPr>
           <a:xfrm>
             <a:off x="7772400" y="4864680"/>
-            <a:ext cx="1004760" cy="227520"/>
+            <a:ext cx="1004400" cy="227160"/>
           </a:xfrm>
           <a:prstGeom prst="rect">
             <a:avLst/>
@@ -15943,19 +14906,7 @@
                 <a:latin typeface="DejaVu Serif"/>
                 <a:ea typeface="DejaVu Serif"/>
               </a:rPr>
-              <a:t>15 / </a:t>
-            </a:r>
-            <a:r>
-              <a:rPr lang="en-US" sz="800" b="0" u="none" strike="noStrike">
-                <a:solidFill>
-                  <a:srgbClr val="5A6570"/>
-                </a:solidFill>
-                <a:effectLst/>
-                <a:uFillTx/>
-                <a:latin typeface="DejaVu Serif"/>
-                <a:ea typeface="DejaVu Serif"/>
-              </a:rPr>
-              <a:t>19</a:t>
+              <a:t>15 / 19</a:t>
             </a:r>
             <a:endParaRPr lang="de-DE" sz="800" b="0" u="none" strike="noStrike">
               <a:solidFill>
@@ -16503,7 +15454,7 @@
         <p:spPr>
           <a:xfrm>
             <a:off x="457200" y="274320"/>
-            <a:ext cx="8228520" cy="639000"/>
+            <a:ext cx="8228160" cy="638640"/>
           </a:xfrm>
           <a:prstGeom prst="rect">
             <a:avLst/>
@@ -16738,7 +15689,7 @@
         <p:spPr>
           <a:xfrm>
             <a:off x="1097280" y="4530960"/>
-            <a:ext cx="4570920" cy="227520"/>
+            <a:ext cx="4570560" cy="227160"/>
           </a:xfrm>
           <a:prstGeom prst="rect">
             <a:avLst/>
@@ -16798,8 +15749,8 @@
         </p:nvSpPr>
         <p:spPr>
           <a:xfrm rot="16200000">
-            <a:off x="423720" y="2355120"/>
-            <a:ext cx="913320" cy="913320"/>
+            <a:off x="423720" y="2355480"/>
+            <a:ext cx="912960" cy="912960"/>
           </a:xfrm>
           <a:prstGeom prst="rect">
             <a:avLst/>
@@ -16860,7 +15811,7 @@
         <p:spPr>
           <a:xfrm>
             <a:off x="960120" y="4407480"/>
-            <a:ext cx="273240" cy="181800"/>
+            <a:ext cx="272880" cy="181440"/>
           </a:xfrm>
           <a:prstGeom prst="rect">
             <a:avLst/>
@@ -16921,7 +15872,7 @@
         <p:spPr>
           <a:xfrm>
             <a:off x="3246120" y="4407480"/>
-            <a:ext cx="273240" cy="181800"/>
+            <a:ext cx="272880" cy="181440"/>
           </a:xfrm>
           <a:prstGeom prst="rect">
             <a:avLst/>
@@ -16982,7 +15933,7 @@
         <p:spPr>
           <a:xfrm>
             <a:off x="5532120" y="4407480"/>
-            <a:ext cx="273240" cy="181800"/>
+            <a:ext cx="272880" cy="181440"/>
           </a:xfrm>
           <a:prstGeom prst="rect">
             <a:avLst/>
@@ -17043,7 +15994,7 @@
         <p:spPr>
           <a:xfrm>
             <a:off x="2160360" y="1097640"/>
-            <a:ext cx="273240" cy="273240"/>
+            <a:ext cx="272880" cy="272880"/>
           </a:xfrm>
           <a:prstGeom prst="ellipse">
             <a:avLst/>
@@ -17069,6 +16020,11 @@
             <a:noAutofit/>
           </a:bodyPr>
           <a:p>
+            <a:pPr>
+              <a:lnSpc>
+                <a:spcPct val="100000"/>
+              </a:lnSpc>
+            </a:pPr>
             <a:endParaRPr lang="de-DE" sz="1800" b="0" u="none" strike="noStrike">
               <a:solidFill>
                 <a:schemeClr val="dk1"/>
@@ -17089,7 +16045,7 @@
         <p:spPr>
           <a:xfrm>
             <a:off x="1320120" y="1344240"/>
-            <a:ext cx="1370520" cy="200160"/>
+            <a:ext cx="1370160" cy="199800"/>
           </a:xfrm>
           <a:prstGeom prst="rect">
             <a:avLst/>
@@ -17150,7 +16106,7 @@
         <p:spPr>
           <a:xfrm>
             <a:off x="2783160" y="1097640"/>
-            <a:ext cx="273240" cy="273240"/>
+            <a:ext cx="272880" cy="272880"/>
           </a:xfrm>
           <a:prstGeom prst="ellipse">
             <a:avLst/>
@@ -17176,6 +16132,11 @@
             <a:noAutofit/>
           </a:bodyPr>
           <a:p>
+            <a:pPr>
+              <a:lnSpc>
+                <a:spcPct val="100000"/>
+              </a:lnSpc>
+            </a:pPr>
             <a:endParaRPr lang="de-DE" sz="1800" b="0" u="none" strike="noStrike">
               <a:solidFill>
                 <a:schemeClr val="dk1"/>
@@ -17196,7 +16157,7 @@
         <p:spPr>
           <a:xfrm>
             <a:off x="2046240" y="891720"/>
-            <a:ext cx="1370520" cy="200160"/>
+            <a:ext cx="1370160" cy="199800"/>
           </a:xfrm>
           <a:prstGeom prst="rect">
             <a:avLst/>
@@ -17257,7 +16218,7 @@
         <p:spPr>
           <a:xfrm>
             <a:off x="2886840" y="1097640"/>
-            <a:ext cx="273240" cy="273240"/>
+            <a:ext cx="272880" cy="272880"/>
           </a:xfrm>
           <a:prstGeom prst="ellipse">
             <a:avLst/>
@@ -17283,6 +16244,11 @@
             <a:noAutofit/>
           </a:bodyPr>
           <a:p>
+            <a:pPr>
+              <a:lnSpc>
+                <a:spcPct val="100000"/>
+              </a:lnSpc>
+            </a:pPr>
             <a:endParaRPr lang="de-DE" sz="1800" b="0" u="none" strike="noStrike">
               <a:solidFill>
                 <a:schemeClr val="dk1"/>
@@ -17303,7 +16269,7 @@
         <p:spPr>
           <a:xfrm>
             <a:off x="2560680" y="1363680"/>
-            <a:ext cx="1370520" cy="200160"/>
+            <a:ext cx="1370160" cy="199800"/>
           </a:xfrm>
           <a:prstGeom prst="rect">
             <a:avLst/>
@@ -17364,7 +16330,7 @@
         <p:spPr>
           <a:xfrm>
             <a:off x="3531960" y="2651760"/>
-            <a:ext cx="273240" cy="273240"/>
+            <a:ext cx="272880" cy="272880"/>
           </a:xfrm>
           <a:prstGeom prst="ellipse">
             <a:avLst/>
@@ -17390,6 +16356,11 @@
             <a:noAutofit/>
           </a:bodyPr>
           <a:p>
+            <a:pPr>
+              <a:lnSpc>
+                <a:spcPct val="100000"/>
+              </a:lnSpc>
+            </a:pPr>
             <a:endParaRPr lang="de-DE" sz="1800" b="0" u="none" strike="noStrike">
               <a:solidFill>
                 <a:schemeClr val="dk1"/>
@@ -17410,7 +16381,7 @@
         <p:spPr>
           <a:xfrm>
             <a:off x="3257640" y="2468880"/>
-            <a:ext cx="1370520" cy="200160"/>
+            <a:ext cx="1370160" cy="199800"/>
           </a:xfrm>
           <a:prstGeom prst="rect">
             <a:avLst/>
@@ -17471,7 +16442,7 @@
         <p:spPr>
           <a:xfrm>
             <a:off x="3417480" y="3996000"/>
-            <a:ext cx="273240" cy="273240"/>
+            <a:ext cx="272880" cy="272880"/>
           </a:xfrm>
           <a:prstGeom prst="ellipse">
             <a:avLst/>
@@ -17497,6 +16468,11 @@
             <a:noAutofit/>
           </a:bodyPr>
           <a:p>
+            <a:pPr>
+              <a:lnSpc>
+                <a:spcPct val="100000"/>
+              </a:lnSpc>
+            </a:pPr>
             <a:endParaRPr lang="de-DE" sz="1800" b="0" u="none" strike="noStrike">
               <a:solidFill>
                 <a:schemeClr val="dk1"/>
@@ -17517,7 +16493,7 @@
         <p:spPr>
           <a:xfrm>
             <a:off x="3143160" y="3813120"/>
-            <a:ext cx="1370520" cy="200160"/>
+            <a:ext cx="1370160" cy="199800"/>
           </a:xfrm>
           <a:prstGeom prst="rect">
             <a:avLst/>
@@ -17578,7 +16554,7 @@
         <p:spPr>
           <a:xfrm>
             <a:off x="4628880" y="1271520"/>
-            <a:ext cx="1279080" cy="456120"/>
+            <a:ext cx="1278720" cy="455760"/>
           </a:xfrm>
           <a:prstGeom prst="rect">
             <a:avLst/>
@@ -17669,7 +16645,7 @@
         <p:spPr>
           <a:xfrm>
             <a:off x="6492600" y="2171880"/>
-            <a:ext cx="181800" cy="181800"/>
+            <a:ext cx="181440" cy="181440"/>
           </a:xfrm>
           <a:prstGeom prst="ellipse">
             <a:avLst/>
@@ -17695,6 +16671,11 @@
             <a:noAutofit/>
           </a:bodyPr>
           <a:p>
+            <a:pPr>
+              <a:lnSpc>
+                <a:spcPct val="100000"/>
+              </a:lnSpc>
+            </a:pPr>
             <a:endParaRPr lang="de-DE" sz="1800" b="0" u="none" strike="noStrike">
               <a:solidFill>
                 <a:schemeClr val="dk1"/>
@@ -17715,7 +16696,7 @@
         <p:spPr>
           <a:xfrm>
             <a:off x="6766920" y="2126160"/>
-            <a:ext cx="2559240" cy="227520"/>
+            <a:ext cx="2558880" cy="227160"/>
           </a:xfrm>
           <a:prstGeom prst="rect">
             <a:avLst/>
@@ -17776,7 +16757,7 @@
         <p:spPr>
           <a:xfrm>
             <a:off x="6766920" y="2354760"/>
-            <a:ext cx="2559240" cy="227520"/>
+            <a:ext cx="2558880" cy="227160"/>
           </a:xfrm>
           <a:prstGeom prst="rect">
             <a:avLst/>
@@ -17837,7 +16818,7 @@
         <p:spPr>
           <a:xfrm>
             <a:off x="6492600" y="2674800"/>
-            <a:ext cx="181800" cy="181800"/>
+            <a:ext cx="181440" cy="181440"/>
           </a:xfrm>
           <a:prstGeom prst="ellipse">
             <a:avLst/>
@@ -17863,6 +16844,11 @@
             <a:noAutofit/>
           </a:bodyPr>
           <a:p>
+            <a:pPr>
+              <a:lnSpc>
+                <a:spcPct val="100000"/>
+              </a:lnSpc>
+            </a:pPr>
             <a:endParaRPr lang="de-DE" sz="1800" b="0" u="none" strike="noStrike">
               <a:solidFill>
                 <a:schemeClr val="dk1"/>
@@ -17883,7 +16869,7 @@
         <p:spPr>
           <a:xfrm>
             <a:off x="6766920" y="2629080"/>
-            <a:ext cx="2559240" cy="227520"/>
+            <a:ext cx="2558880" cy="227160"/>
           </a:xfrm>
           <a:prstGeom prst="rect">
             <a:avLst/>
@@ -17922,67 +16908,7 @@
                 <a:latin typeface="DejaVu Serif"/>
                 <a:ea typeface="DejaVu Serif"/>
               </a:rPr>
-              <a:t>Sp</a:t>
-            </a:r>
-            <a:r>
-              <a:rPr lang="en-US" sz="1300" b="1" u="none" strike="noStrike">
-                <a:solidFill>
-                  <a:srgbClr val="E8E8E8"/>
-                </a:solidFill>
-                <a:effectLst/>
-                <a:uFillTx/>
-                <a:latin typeface="DejaVu Serif"/>
-                <a:ea typeface="DejaVu Serif"/>
-              </a:rPr>
-              <a:t>ee</a:t>
-            </a:r>
-            <a:r>
-              <a:rPr lang="en-US" sz="1300" b="1" u="none" strike="noStrike">
-                <a:solidFill>
-                  <a:srgbClr val="E8E8E8"/>
-                </a:solidFill>
-                <a:effectLst/>
-                <a:uFillTx/>
-                <a:latin typeface="DejaVu Serif"/>
-                <a:ea typeface="DejaVu Serif"/>
-              </a:rPr>
-              <a:t>ch</a:t>
-            </a:r>
-            <a:r>
-              <a:rPr lang="en-US" sz="1300" b="1" u="none" strike="noStrike">
-                <a:solidFill>
-                  <a:srgbClr val="E8E8E8"/>
-                </a:solidFill>
-                <a:effectLst/>
-                <a:uFillTx/>
-                <a:latin typeface="DejaVu Serif"/>
-                <a:ea typeface="DejaVu Serif"/>
-              </a:rPr>
-              <a:t>m</a:t>
-            </a:r>
-            <a:r>
-              <a:rPr lang="en-US" sz="1300" b="1" u="none" strike="noStrike">
-                <a:solidFill>
-                  <a:srgbClr val="E8E8E8"/>
-                </a:solidFill>
-                <a:effectLst/>
-                <a:uFillTx/>
-                <a:latin typeface="DejaVu Serif"/>
-                <a:ea typeface="DejaVu Serif"/>
-              </a:rPr>
-              <a:t>ati</a:t>
-            </a:r>
-            <a:r>
-              <a:rPr lang="en-US" sz="1300" b="1" u="none" strike="noStrike">
-                <a:solidFill>
-                  <a:srgbClr val="E8E8E8"/>
-                </a:solidFill>
-                <a:effectLst/>
-                <a:uFillTx/>
-                <a:latin typeface="DejaVu Serif"/>
-                <a:ea typeface="DejaVu Serif"/>
-              </a:rPr>
-              <a:t>cs</a:t>
+              <a:t>Speechmatics</a:t>
             </a:r>
             <a:endParaRPr lang="de-DE" sz="1300" b="0" u="none" strike="noStrike">
               <a:solidFill>
@@ -18004,7 +16930,7 @@
         <p:spPr>
           <a:xfrm>
             <a:off x="6766920" y="2857680"/>
-            <a:ext cx="2559240" cy="227520"/>
+            <a:ext cx="2558880" cy="227160"/>
           </a:xfrm>
           <a:prstGeom prst="rect">
             <a:avLst/>
@@ -18065,7 +16991,7 @@
         <p:spPr>
           <a:xfrm>
             <a:off x="6492600" y="3177720"/>
-            <a:ext cx="181800" cy="181800"/>
+            <a:ext cx="181440" cy="181440"/>
           </a:xfrm>
           <a:prstGeom prst="ellipse">
             <a:avLst/>
@@ -18091,6 +17017,11 @@
             <a:noAutofit/>
           </a:bodyPr>
           <a:p>
+            <a:pPr>
+              <a:lnSpc>
+                <a:spcPct val="100000"/>
+              </a:lnSpc>
+            </a:pPr>
             <a:endParaRPr lang="de-DE" sz="1800" b="0" u="none" strike="noStrike">
               <a:solidFill>
                 <a:schemeClr val="dk1"/>
@@ -18111,7 +17042,7 @@
         <p:spPr>
           <a:xfrm>
             <a:off x="6766920" y="3132000"/>
-            <a:ext cx="2559240" cy="227520"/>
+            <a:ext cx="2558880" cy="227160"/>
           </a:xfrm>
           <a:prstGeom prst="rect">
             <a:avLst/>
@@ -18172,7 +17103,7 @@
         <p:spPr>
           <a:xfrm>
             <a:off x="6766920" y="3360600"/>
-            <a:ext cx="2559240" cy="227520"/>
+            <a:ext cx="2558880" cy="227160"/>
           </a:xfrm>
           <a:prstGeom prst="rect">
             <a:avLst/>
@@ -18233,7 +17164,7 @@
         <p:spPr>
           <a:xfrm>
             <a:off x="365760" y="4864680"/>
-            <a:ext cx="6856920" cy="227520"/>
+            <a:ext cx="6856560" cy="227160"/>
           </a:xfrm>
           <a:prstGeom prst="rect">
             <a:avLst/>
@@ -18294,7 +17225,7 @@
         <p:spPr>
           <a:xfrm>
             <a:off x="7772400" y="4864680"/>
-            <a:ext cx="1004760" cy="227520"/>
+            <a:ext cx="1004400" cy="227160"/>
           </a:xfrm>
           <a:prstGeom prst="rect">
             <a:avLst/>
@@ -18333,19 +17264,7 @@
                 <a:latin typeface="DejaVu Serif"/>
                 <a:ea typeface="DejaVu Serif"/>
               </a:rPr>
-              <a:t>16 / </a:t>
-            </a:r>
-            <a:r>
-              <a:rPr lang="en-US" sz="800" b="0" u="none" strike="noStrike">
-                <a:solidFill>
-                  <a:srgbClr val="5A6570"/>
-                </a:solidFill>
-                <a:effectLst/>
-                <a:uFillTx/>
-                <a:latin typeface="DejaVu Serif"/>
-                <a:ea typeface="DejaVu Serif"/>
-              </a:rPr>
-              <a:t>19</a:t>
+              <a:t>16 / 19</a:t>
             </a:r>
             <a:endParaRPr lang="de-DE" sz="800" b="0" u="none" strike="noStrike">
               <a:solidFill>
@@ -19005,7 +17924,7 @@
         <p:spPr>
           <a:xfrm>
             <a:off x="457200" y="274320"/>
-            <a:ext cx="8228520" cy="639000"/>
+            <a:ext cx="8228160" cy="638640"/>
           </a:xfrm>
           <a:prstGeom prst="rect">
             <a:avLst/>
@@ -19066,7 +17985,7 @@
         <p:spPr>
           <a:xfrm>
             <a:off x="457200" y="1188720"/>
-            <a:ext cx="821880" cy="913320"/>
+            <a:ext cx="821520" cy="912960"/>
           </a:xfrm>
           <a:prstGeom prst="roundRect">
             <a:avLst>
@@ -19119,7 +18038,7 @@
         <p:spPr>
           <a:xfrm>
             <a:off x="457200" y="1188720"/>
-            <a:ext cx="821880" cy="913320"/>
+            <a:ext cx="821520" cy="912960"/>
           </a:xfrm>
           <a:prstGeom prst="rect">
             <a:avLst/>
@@ -19180,7 +18099,7 @@
         <p:spPr>
           <a:xfrm>
             <a:off x="1371600" y="1188720"/>
-            <a:ext cx="7314120" cy="913320"/>
+            <a:ext cx="7313760" cy="912960"/>
           </a:xfrm>
           <a:prstGeom prst="roundRect">
             <a:avLst>
@@ -19233,7 +18152,7 @@
         <p:spPr>
           <a:xfrm>
             <a:off x="1554480" y="1280160"/>
-            <a:ext cx="6948360" cy="364680"/>
+            <a:ext cx="6948000" cy="364320"/>
           </a:xfrm>
           <a:prstGeom prst="rect">
             <a:avLst/>
@@ -19294,7 +18213,7 @@
         <p:spPr>
           <a:xfrm>
             <a:off x="1554480" y="1691640"/>
-            <a:ext cx="6948360" cy="318960"/>
+            <a:ext cx="6948000" cy="318600"/>
           </a:xfrm>
           <a:prstGeom prst="rect">
             <a:avLst/>
@@ -19355,7 +18274,7 @@
         <p:spPr>
           <a:xfrm>
             <a:off x="457200" y="2331720"/>
-            <a:ext cx="821880" cy="913320"/>
+            <a:ext cx="821520" cy="912960"/>
           </a:xfrm>
           <a:prstGeom prst="roundRect">
             <a:avLst>
@@ -19408,7 +18327,7 @@
         <p:spPr>
           <a:xfrm>
             <a:off x="457200" y="2331720"/>
-            <a:ext cx="821880" cy="913320"/>
+            <a:ext cx="821520" cy="912960"/>
           </a:xfrm>
           <a:prstGeom prst="rect">
             <a:avLst/>
@@ -19469,7 +18388,7 @@
         <p:spPr>
           <a:xfrm>
             <a:off x="1371600" y="2331720"/>
-            <a:ext cx="7314120" cy="913320"/>
+            <a:ext cx="7313760" cy="912960"/>
           </a:xfrm>
           <a:prstGeom prst="roundRect">
             <a:avLst>
@@ -19522,7 +18441,7 @@
         <p:spPr>
           <a:xfrm>
             <a:off x="1554480" y="2423160"/>
-            <a:ext cx="6948360" cy="364680"/>
+            <a:ext cx="6948000" cy="364320"/>
           </a:xfrm>
           <a:prstGeom prst="rect">
             <a:avLst/>
@@ -19583,7 +18502,7 @@
         <p:spPr>
           <a:xfrm>
             <a:off x="1554480" y="2834640"/>
-            <a:ext cx="6948360" cy="318960"/>
+            <a:ext cx="6948000" cy="318600"/>
           </a:xfrm>
           <a:prstGeom prst="rect">
             <a:avLst/>
@@ -19644,7 +18563,7 @@
         <p:spPr>
           <a:xfrm>
             <a:off x="457200" y="3474720"/>
-            <a:ext cx="821880" cy="913320"/>
+            <a:ext cx="821520" cy="912960"/>
           </a:xfrm>
           <a:prstGeom prst="roundRect">
             <a:avLst>
@@ -19697,7 +18616,7 @@
         <p:spPr>
           <a:xfrm>
             <a:off x="457200" y="3474720"/>
-            <a:ext cx="821880" cy="913320"/>
+            <a:ext cx="821520" cy="912960"/>
           </a:xfrm>
           <a:prstGeom prst="rect">
             <a:avLst/>
@@ -19758,7 +18677,7 @@
         <p:spPr>
           <a:xfrm>
             <a:off x="1371600" y="3474720"/>
-            <a:ext cx="7314120" cy="913320"/>
+            <a:ext cx="7313760" cy="912960"/>
           </a:xfrm>
           <a:prstGeom prst="roundRect">
             <a:avLst>
@@ -19811,7 +18730,7 @@
         <p:spPr>
           <a:xfrm>
             <a:off x="1554480" y="3566160"/>
-            <a:ext cx="6948360" cy="364680"/>
+            <a:ext cx="6948000" cy="364320"/>
           </a:xfrm>
           <a:prstGeom prst="rect">
             <a:avLst/>
@@ -19872,7 +18791,7 @@
         <p:spPr>
           <a:xfrm>
             <a:off x="1554480" y="3977640"/>
-            <a:ext cx="6948360" cy="318960"/>
+            <a:ext cx="6948000" cy="318600"/>
           </a:xfrm>
           <a:prstGeom prst="rect">
             <a:avLst/>
@@ -19933,7 +18852,7 @@
         <p:spPr>
           <a:xfrm>
             <a:off x="365760" y="4864680"/>
-            <a:ext cx="6856920" cy="227520"/>
+            <a:ext cx="6856560" cy="227160"/>
           </a:xfrm>
           <a:prstGeom prst="rect">
             <a:avLst/>
@@ -19994,7 +18913,7 @@
         <p:spPr>
           <a:xfrm>
             <a:off x="7772400" y="4864680"/>
-            <a:ext cx="1004760" cy="227520"/>
+            <a:ext cx="1004400" cy="227160"/>
           </a:xfrm>
           <a:prstGeom prst="rect">
             <a:avLst/>
@@ -20581,7 +19500,7 @@
         <p:spPr>
           <a:xfrm>
             <a:off x="457200" y="274320"/>
-            <a:ext cx="8228520" cy="639000"/>
+            <a:ext cx="8228160" cy="638640"/>
           </a:xfrm>
           <a:prstGeom prst="rect">
             <a:avLst/>
@@ -20620,43 +19539,7 @@
                 <a:latin typeface="DejaVu Serif"/>
                 <a:ea typeface="DejaVu Serif"/>
               </a:rPr>
-              <a:t>If you </a:t>
-            </a:r>
-            <a:r>
-              <a:rPr lang="en-US" sz="2400" b="1" u="none" strike="noStrike">
-                <a:solidFill>
-                  <a:srgbClr val="E8E8E8"/>
-                </a:solidFill>
-                <a:effectLst/>
-                <a:uFillTx/>
-                <a:latin typeface="DejaVu Serif"/>
-                <a:ea typeface="DejaVu Serif"/>
-              </a:rPr>
-              <a:t>remember </a:t>
-            </a:r>
-            <a:r>
-              <a:rPr lang="en-US" sz="2400" b="1" u="none" strike="noStrike">
-                <a:solidFill>
-                  <a:srgbClr val="E8E8E8"/>
-                </a:solidFill>
-                <a:effectLst/>
-                <a:uFillTx/>
-                <a:latin typeface="DejaVu Serif"/>
-                <a:ea typeface="DejaVu Serif"/>
-              </a:rPr>
-              <a:t>only three </a:t>
-            </a:r>
-            <a:r>
-              <a:rPr lang="en-US" sz="2400" b="1" u="none" strike="noStrike">
-                <a:solidFill>
-                  <a:srgbClr val="E8E8E8"/>
-                </a:solidFill>
-                <a:effectLst/>
-                <a:uFillTx/>
-                <a:latin typeface="DejaVu Serif"/>
-                <a:ea typeface="DejaVu Serif"/>
-              </a:rPr>
-              <a:t>things...</a:t>
+              <a:t>If you remember only three things...</a:t>
             </a:r>
             <a:endParaRPr lang="de-DE" sz="2400" b="0" u="none" strike="noStrike">
               <a:solidFill>
@@ -20678,7 +19561,7 @@
         <p:spPr>
           <a:xfrm>
             <a:off x="365760" y="1188720"/>
-            <a:ext cx="913320" cy="913320"/>
+            <a:ext cx="912960" cy="912960"/>
           </a:xfrm>
           <a:prstGeom prst="rect">
             <a:avLst/>
@@ -20739,7 +19622,7 @@
         <p:spPr>
           <a:xfrm>
             <a:off x="1371600" y="1188720"/>
-            <a:ext cx="7314120" cy="913320"/>
+            <a:ext cx="7313760" cy="912960"/>
           </a:xfrm>
           <a:prstGeom prst="rect">
             <a:avLst/>
@@ -20764,6 +19647,12 @@
               <a:lnSpc>
                 <a:spcPct val="100000"/>
               </a:lnSpc>
+              <a:spcBef>
+                <a:spcPts val="1191"/>
+              </a:spcBef>
+              <a:spcAft>
+                <a:spcPts val="992"/>
+              </a:spcAft>
               <a:tabLst>
                 <a:tab pos="0" algn="l"/>
               </a:tabLst>
@@ -20778,7 +19667,7 @@
                 <a:latin typeface="DejaVu Serif"/>
                 <a:ea typeface="DejaVu Serif"/>
               </a:rPr>
-              <a:t>The pipeline works — but the Plan section is where every model still hallucinates.</a:t>
+              <a:t>The pipeline works — the Plan section doesn't.</a:t>
             </a:r>
             <a:endParaRPr lang="de-DE" sz="1600" b="0" u="none" strike="noStrike">
               <a:solidFill>
@@ -20800,7 +19689,7 @@
         <p:spPr>
           <a:xfrm>
             <a:off x="365760" y="2286000"/>
-            <a:ext cx="913320" cy="913320"/>
+            <a:ext cx="912960" cy="912960"/>
           </a:xfrm>
           <a:prstGeom prst="rect">
             <a:avLst/>
@@ -20861,7 +19750,7 @@
         <p:spPr>
           <a:xfrm>
             <a:off x="1371600" y="2286000"/>
-            <a:ext cx="7314120" cy="913320"/>
+            <a:ext cx="7313760" cy="912960"/>
           </a:xfrm>
           <a:prstGeom prst="rect">
             <a:avLst/>
@@ -20886,6 +19775,12 @@
               <a:lnSpc>
                 <a:spcPct val="100000"/>
               </a:lnSpc>
+              <a:spcBef>
+                <a:spcPts val="1191"/>
+              </a:spcBef>
+              <a:spcAft>
+                <a:spcPts val="992"/>
+              </a:spcAft>
               <a:tabLst>
                 <a:tab pos="0" algn="l"/>
               </a:tabLst>
@@ -20900,7 +19795,7 @@
                 <a:latin typeface="DejaVu Serif"/>
                 <a:ea typeface="DejaVu Serif"/>
               </a:rPr>
-              <a:t>Hardware and model size dominate — the cloud gap will close as local models grow.</a:t>
+              <a:t>Hardware and model size are the bottleneck.</a:t>
             </a:r>
             <a:endParaRPr lang="de-DE" sz="1600" b="0" u="none" strike="noStrike">
               <a:solidFill>
@@ -20922,7 +19817,7 @@
         <p:spPr>
           <a:xfrm>
             <a:off x="365760" y="3383280"/>
-            <a:ext cx="913320" cy="913320"/>
+            <a:ext cx="912960" cy="912960"/>
           </a:xfrm>
           <a:prstGeom prst="rect">
             <a:avLst/>
@@ -20983,7 +19878,7 @@
         <p:spPr>
           <a:xfrm>
             <a:off x="1371600" y="3383280"/>
-            <a:ext cx="7314120" cy="913320"/>
+            <a:ext cx="7313760" cy="912960"/>
           </a:xfrm>
           <a:prstGeom prst="rect">
             <a:avLst/>
@@ -21008,6 +19903,12 @@
               <a:lnSpc>
                 <a:spcPct val="100000"/>
               </a:lnSpc>
+              <a:spcBef>
+                <a:spcPts val="1191"/>
+              </a:spcBef>
+              <a:spcAft>
+                <a:spcPts val="992"/>
+              </a:spcAft>
               <a:tabLst>
                 <a:tab pos="0" algn="l"/>
               </a:tabLst>
@@ -21022,7 +19923,7 @@
                 <a:latin typeface="DejaVu Serif"/>
                 <a:ea typeface="DejaVu Serif"/>
               </a:rPr>
-              <a:t>AI today assists medical documentation. It does not yet replace it.</a:t>
+              <a:t>Assistive today. Autonomous tomorrow?</a:t>
             </a:r>
             <a:endParaRPr lang="de-DE" sz="1600" b="0" u="none" strike="noStrike">
               <a:solidFill>
@@ -21044,7 +19945,7 @@
         <p:spPr>
           <a:xfrm>
             <a:off x="365760" y="4864680"/>
-            <a:ext cx="6856920" cy="227520"/>
+            <a:ext cx="6856560" cy="227160"/>
           </a:xfrm>
           <a:prstGeom prst="rect">
             <a:avLst/>
@@ -21083,163 +19984,7 @@
                 <a:latin typeface="DejaVu Serif"/>
                 <a:ea typeface="DejaVu Serif"/>
               </a:rPr>
-              <a:t>AI-</a:t>
-            </a:r>
-            <a:r>
-              <a:rPr lang="en-US" sz="800" b="0" u="none" strike="noStrike">
-                <a:solidFill>
-                  <a:srgbClr val="5A6570"/>
-                </a:solidFill>
-                <a:effectLst/>
-                <a:uFillTx/>
-                <a:latin typeface="DejaVu Serif"/>
-                <a:ea typeface="DejaVu Serif"/>
-              </a:rPr>
-              <a:t>Anam</a:t>
-            </a:r>
-            <a:r>
-              <a:rPr lang="en-US" sz="800" b="0" u="none" strike="noStrike">
-                <a:solidFill>
-                  <a:srgbClr val="5A6570"/>
-                </a:solidFill>
-                <a:effectLst/>
-                <a:uFillTx/>
-                <a:latin typeface="DejaVu Serif"/>
-                <a:ea typeface="DejaVu Serif"/>
-              </a:rPr>
-              <a:t>nesis · </a:t>
-            </a:r>
-            <a:r>
-              <a:rPr lang="en-US" sz="800" b="0" u="none" strike="noStrike">
-                <a:solidFill>
-                  <a:srgbClr val="5A6570"/>
-                </a:solidFill>
-                <a:effectLst/>
-                <a:uFillTx/>
-                <a:latin typeface="DejaVu Serif"/>
-                <a:ea typeface="DejaVu Serif"/>
-              </a:rPr>
-              <a:t>Maste</a:t>
-            </a:r>
-            <a:r>
-              <a:rPr lang="en-US" sz="800" b="0" u="none" strike="noStrike">
-                <a:solidFill>
-                  <a:srgbClr val="5A6570"/>
-                </a:solidFill>
-                <a:effectLst/>
-                <a:uFillTx/>
-                <a:latin typeface="DejaVu Serif"/>
-                <a:ea typeface="DejaVu Serif"/>
-              </a:rPr>
-              <a:t>r </a:t>
-            </a:r>
-            <a:r>
-              <a:rPr lang="en-US" sz="800" b="0" u="none" strike="noStrike">
-                <a:solidFill>
-                  <a:srgbClr val="5A6570"/>
-                </a:solidFill>
-                <a:effectLst/>
-                <a:uFillTx/>
-                <a:latin typeface="DejaVu Serif"/>
-                <a:ea typeface="DejaVu Serif"/>
-              </a:rPr>
-              <a:t>Semin</a:t>
-            </a:r>
-            <a:r>
-              <a:rPr lang="en-US" sz="800" b="0" u="none" strike="noStrike">
-                <a:solidFill>
-                  <a:srgbClr val="5A6570"/>
-                </a:solidFill>
-                <a:effectLst/>
-                <a:uFillTx/>
-                <a:latin typeface="DejaVu Serif"/>
-                <a:ea typeface="DejaVu Serif"/>
-              </a:rPr>
-              <a:t>ar · </a:t>
-            </a:r>
-            <a:r>
-              <a:rPr lang="en-US" sz="800" b="0" u="none" strike="noStrike">
-                <a:solidFill>
-                  <a:srgbClr val="5A6570"/>
-                </a:solidFill>
-                <a:effectLst/>
-                <a:uFillTx/>
-                <a:latin typeface="DejaVu Serif"/>
-                <a:ea typeface="DejaVu Serif"/>
-              </a:rPr>
-              <a:t>PwC </a:t>
-            </a:r>
-            <a:r>
-              <a:rPr lang="en-US" sz="800" b="0" u="none" strike="noStrike">
-                <a:solidFill>
-                  <a:srgbClr val="5A6570"/>
-                </a:solidFill>
-                <a:effectLst/>
-                <a:uFillTx/>
-                <a:latin typeface="DejaVu Serif"/>
-                <a:ea typeface="DejaVu Serif"/>
-              </a:rPr>
-              <a:t>× </a:t>
-            </a:r>
-            <a:r>
-              <a:rPr lang="en-US" sz="800" b="0" u="none" strike="noStrike">
-                <a:solidFill>
-                  <a:srgbClr val="5A6570"/>
-                </a:solidFill>
-                <a:effectLst/>
-                <a:uFillTx/>
-                <a:latin typeface="DejaVu Serif"/>
-                <a:ea typeface="DejaVu Serif"/>
-              </a:rPr>
-              <a:t>Hochs</a:t>
-            </a:r>
-            <a:r>
-              <a:rPr lang="en-US" sz="800" b="0" u="none" strike="noStrike">
-                <a:solidFill>
-                  <a:srgbClr val="5A6570"/>
-                </a:solidFill>
-                <a:effectLst/>
-                <a:uFillTx/>
-                <a:latin typeface="DejaVu Serif"/>
-                <a:ea typeface="DejaVu Serif"/>
-              </a:rPr>
-              <a:t>chule </a:t>
-            </a:r>
-            <a:r>
-              <a:rPr lang="en-US" sz="800" b="0" u="none" strike="noStrike">
-                <a:solidFill>
-                  <a:srgbClr val="5A6570"/>
-                </a:solidFill>
-                <a:effectLst/>
-                <a:uFillTx/>
-                <a:latin typeface="DejaVu Serif"/>
-                <a:ea typeface="DejaVu Serif"/>
-              </a:rPr>
-              <a:t>Hanno</a:t>
-            </a:r>
-            <a:r>
-              <a:rPr lang="en-US" sz="800" b="0" u="none" strike="noStrike">
-                <a:solidFill>
-                  <a:srgbClr val="5A6570"/>
-                </a:solidFill>
-                <a:effectLst/>
-                <a:uFillTx/>
-                <a:latin typeface="DejaVu Serif"/>
-                <a:ea typeface="DejaVu Serif"/>
-              </a:rPr>
-              <a:t>ver · </a:t>
-            </a:r>
-            <a:r>
-              <a:rPr lang="en-US" sz="800" b="0" u="none" strike="noStrike">
-                <a:solidFill>
-                  <a:srgbClr val="5A6570"/>
-                </a:solidFill>
-                <a:effectLst/>
-                <a:uFillTx/>
-                <a:latin typeface="DejaVu Serif"/>
-                <a:ea typeface="DejaVu Serif"/>
-              </a:rPr>
-              <a:t>2026</a:t>
+              <a:t>AI-Anamnesis · Master Seminar · PwC × Hochschule Hannover · 2026</a:t>
             </a:r>
             <a:endParaRPr lang="de-DE" sz="800" b="0" u="none" strike="noStrike">
               <a:solidFill>
@@ -21261,7 +20006,7 @@
         <p:spPr>
           <a:xfrm>
             <a:off x="7772400" y="4864680"/>
-            <a:ext cx="1004760" cy="227520"/>
+            <a:ext cx="1004400" cy="227160"/>
           </a:xfrm>
           <a:prstGeom prst="rect">
             <a:avLst/>
@@ -21605,7 +20350,7 @@
         <p:spPr>
           <a:xfrm>
             <a:off x="457200" y="925920"/>
-            <a:ext cx="6856920" cy="1644840"/>
+            <a:ext cx="6856560" cy="1644480"/>
           </a:xfrm>
           <a:prstGeom prst="rect">
             <a:avLst/>
@@ -21656,7 +20401,7 @@
                 <a:latin typeface="DejaVu Serif"/>
                 <a:ea typeface="DejaVu Serif"/>
               </a:rPr>
-              <a:t>h</a:t>
+              <a:t>ho</a:t>
             </a:r>
             <a:r>
               <a:rPr lang="en-US" sz="12000" b="1" u="none" strike="noStrike">
@@ -21668,31 +20413,7 @@
                 <a:latin typeface="DejaVu Serif"/>
                 <a:ea typeface="DejaVu Serif"/>
               </a:rPr>
-              <a:t>o</a:t>
-            </a:r>
-            <a:r>
-              <a:rPr lang="en-US" sz="12000" b="1" u="none" strike="noStrike">
-                <a:solidFill>
-                  <a:srgbClr val="D04A02"/>
-                </a:solidFill>
-                <a:effectLst/>
-                <a:uFillTx/>
-                <a:latin typeface="DejaVu Serif"/>
-                <a:ea typeface="DejaVu Serif"/>
-              </a:rPr>
-              <a:t>u</a:t>
-            </a:r>
-            <a:r>
-              <a:rPr lang="en-US" sz="12000" b="1" u="none" strike="noStrike">
-                <a:solidFill>
-                  <a:srgbClr val="D04A02"/>
-                </a:solidFill>
-                <a:effectLst/>
-                <a:uFillTx/>
-                <a:latin typeface="DejaVu Serif"/>
-                <a:ea typeface="DejaVu Serif"/>
-              </a:rPr>
-              <a:t>r</a:t>
+              <a:t>ur</a:t>
             </a:r>
             <a:r>
               <a:rPr lang="en-US" sz="12000" b="1" u="none" strike="noStrike">
@@ -21726,7 +20447,7 @@
         <p:spPr>
           <a:xfrm>
             <a:off x="457200" y="2571840"/>
-            <a:ext cx="6856920" cy="364680"/>
+            <a:ext cx="6856560" cy="364320"/>
           </a:xfrm>
           <a:prstGeom prst="rect">
             <a:avLst/>
@@ -21765,7 +20486,7 @@
                 <a:latin typeface="DejaVu Serif"/>
                 <a:ea typeface="DejaVu Serif"/>
               </a:rPr>
-              <a:t>per </a:t>
+              <a:t>per day spent by </a:t>
             </a:r>
             <a:r>
               <a:rPr lang="en-US" sz="1600" b="0" u="none" strike="noStrike">
@@ -21777,7 +20498,7 @@
                 <a:latin typeface="DejaVu Serif"/>
                 <a:ea typeface="DejaVu Serif"/>
               </a:rPr>
-              <a:t>da</a:t>
+              <a:t>physicians on </a:t>
             </a:r>
             <a:r>
               <a:rPr lang="en-US" sz="1600" b="0" u="none" strike="noStrike">
@@ -21789,7 +20510,7 @@
                 <a:latin typeface="DejaVu Serif"/>
                 <a:ea typeface="DejaVu Serif"/>
               </a:rPr>
-              <a:t>y </a:t>
+              <a:t>documentation — not </a:t>
             </a:r>
             <a:r>
               <a:rPr lang="en-US" sz="1600" b="0" u="none" strike="noStrike">
@@ -21801,247 +20522,7 @@
                 <a:latin typeface="DejaVu Serif"/>
                 <a:ea typeface="DejaVu Serif"/>
               </a:rPr>
-              <a:t>spe</a:t>
-            </a:r>
-            <a:r>
-              <a:rPr lang="en-US" sz="1600" b="0" u="none" strike="noStrike">
-                <a:solidFill>
-                  <a:srgbClr val="E8E8E8"/>
-                </a:solidFill>
-                <a:effectLst/>
-                <a:uFillTx/>
-                <a:latin typeface="DejaVu Serif"/>
-                <a:ea typeface="DejaVu Serif"/>
-              </a:rPr>
-              <a:t>nt </a:t>
-            </a:r>
-            <a:r>
-              <a:rPr lang="en-US" sz="1600" b="0" u="none" strike="noStrike">
-                <a:solidFill>
-                  <a:srgbClr val="E8E8E8"/>
-                </a:solidFill>
-                <a:effectLst/>
-                <a:uFillTx/>
-                <a:latin typeface="DejaVu Serif"/>
-                <a:ea typeface="DejaVu Serif"/>
-              </a:rPr>
-              <a:t>by </a:t>
-            </a:r>
-            <a:r>
-              <a:rPr lang="en-US" sz="1600" b="0" u="none" strike="noStrike">
-                <a:solidFill>
-                  <a:srgbClr val="E8E8E8"/>
-                </a:solidFill>
-                <a:effectLst/>
-                <a:uFillTx/>
-                <a:latin typeface="DejaVu Serif"/>
-                <a:ea typeface="DejaVu Serif"/>
-              </a:rPr>
-              <a:t>ph</a:t>
-            </a:r>
-            <a:r>
-              <a:rPr lang="en-US" sz="1600" b="0" u="none" strike="noStrike">
-                <a:solidFill>
-                  <a:srgbClr val="E8E8E8"/>
-                </a:solidFill>
-                <a:effectLst/>
-                <a:uFillTx/>
-                <a:latin typeface="DejaVu Serif"/>
-                <a:ea typeface="DejaVu Serif"/>
-              </a:rPr>
-              <a:t>ysi</a:t>
-            </a:r>
-            <a:r>
-              <a:rPr lang="en-US" sz="1600" b="0" u="none" strike="noStrike">
-                <a:solidFill>
-                  <a:srgbClr val="E8E8E8"/>
-                </a:solidFill>
-                <a:effectLst/>
-                <a:uFillTx/>
-                <a:latin typeface="DejaVu Serif"/>
-                <a:ea typeface="DejaVu Serif"/>
-              </a:rPr>
-              <a:t>cia</a:t>
-            </a:r>
-            <a:r>
-              <a:rPr lang="en-US" sz="1600" b="0" u="none" strike="noStrike">
-                <a:solidFill>
-                  <a:srgbClr val="E8E8E8"/>
-                </a:solidFill>
-                <a:effectLst/>
-                <a:uFillTx/>
-                <a:latin typeface="DejaVu Serif"/>
-                <a:ea typeface="DejaVu Serif"/>
-              </a:rPr>
-              <a:t>ns </a:t>
-            </a:r>
-            <a:r>
-              <a:rPr lang="en-US" sz="1600" b="0" u="none" strike="noStrike">
-                <a:solidFill>
-                  <a:srgbClr val="E8E8E8"/>
-                </a:solidFill>
-                <a:effectLst/>
-                <a:uFillTx/>
-                <a:latin typeface="DejaVu Serif"/>
-                <a:ea typeface="DejaVu Serif"/>
-              </a:rPr>
-              <a:t>on </a:t>
-            </a:r>
-            <a:r>
-              <a:rPr lang="en-US" sz="1600" b="0" u="none" strike="noStrike">
-                <a:solidFill>
-                  <a:srgbClr val="E8E8E8"/>
-                </a:solidFill>
-                <a:effectLst/>
-                <a:uFillTx/>
-                <a:latin typeface="DejaVu Serif"/>
-                <a:ea typeface="DejaVu Serif"/>
-              </a:rPr>
-              <a:t>do</a:t>
-            </a:r>
-            <a:r>
-              <a:rPr lang="en-US" sz="1600" b="0" u="none" strike="noStrike">
-                <a:solidFill>
-                  <a:srgbClr val="E8E8E8"/>
-                </a:solidFill>
-                <a:effectLst/>
-                <a:uFillTx/>
-                <a:latin typeface="DejaVu Serif"/>
-                <a:ea typeface="DejaVu Serif"/>
-              </a:rPr>
-              <a:t>cu</a:t>
-            </a:r>
-            <a:r>
-              <a:rPr lang="en-US" sz="1600" b="0" u="none" strike="noStrike">
-                <a:solidFill>
-                  <a:srgbClr val="E8E8E8"/>
-                </a:solidFill>
-                <a:effectLst/>
-                <a:uFillTx/>
-                <a:latin typeface="DejaVu Serif"/>
-                <a:ea typeface="DejaVu Serif"/>
-              </a:rPr>
-              <a:t>me</a:t>
-            </a:r>
-            <a:r>
-              <a:rPr lang="en-US" sz="1600" b="0" u="none" strike="noStrike">
-                <a:solidFill>
-                  <a:srgbClr val="E8E8E8"/>
-                </a:solidFill>
-                <a:effectLst/>
-                <a:uFillTx/>
-                <a:latin typeface="DejaVu Serif"/>
-                <a:ea typeface="DejaVu Serif"/>
-              </a:rPr>
-              <a:t>nta</a:t>
-            </a:r>
-            <a:r>
-              <a:rPr lang="en-US" sz="1600" b="0" u="none" strike="noStrike">
-                <a:solidFill>
-                  <a:srgbClr val="E8E8E8"/>
-                </a:solidFill>
-                <a:effectLst/>
-                <a:uFillTx/>
-                <a:latin typeface="DejaVu Serif"/>
-                <a:ea typeface="DejaVu Serif"/>
-              </a:rPr>
-              <a:t>tio</a:t>
-            </a:r>
-            <a:r>
-              <a:rPr lang="en-US" sz="1600" b="0" u="none" strike="noStrike">
-                <a:solidFill>
-                  <a:srgbClr val="E8E8E8"/>
-                </a:solidFill>
-                <a:effectLst/>
-                <a:uFillTx/>
-                <a:latin typeface="DejaVu Serif"/>
-                <a:ea typeface="DejaVu Serif"/>
-              </a:rPr>
-              <a:t>n </a:t>
-            </a:r>
-            <a:r>
-              <a:rPr lang="en-US" sz="1600" b="0" u="none" strike="noStrike">
-                <a:solidFill>
-                  <a:srgbClr val="E8E8E8"/>
-                </a:solidFill>
-                <a:effectLst/>
-                <a:uFillTx/>
-                <a:latin typeface="DejaVu Serif"/>
-                <a:ea typeface="DejaVu Serif"/>
-              </a:rPr>
-              <a:t>— </a:t>
-            </a:r>
-            <a:r>
-              <a:rPr lang="en-US" sz="1600" b="0" u="none" strike="noStrike">
-                <a:solidFill>
-                  <a:srgbClr val="E8E8E8"/>
-                </a:solidFill>
-                <a:effectLst/>
-                <a:uFillTx/>
-                <a:latin typeface="DejaVu Serif"/>
-                <a:ea typeface="DejaVu Serif"/>
-              </a:rPr>
-              <a:t>not </a:t>
-            </a:r>
-            <a:r>
-              <a:rPr lang="en-US" sz="1600" b="0" u="none" strike="noStrike">
-                <a:solidFill>
-                  <a:srgbClr val="E8E8E8"/>
-                </a:solidFill>
-                <a:effectLst/>
-                <a:uFillTx/>
-                <a:latin typeface="DejaVu Serif"/>
-                <a:ea typeface="DejaVu Serif"/>
-              </a:rPr>
-              <a:t>pat</a:t>
-            </a:r>
-            <a:r>
-              <a:rPr lang="en-US" sz="1600" b="0" u="none" strike="noStrike">
-                <a:solidFill>
-                  <a:srgbClr val="E8E8E8"/>
-                </a:solidFill>
-                <a:effectLst/>
-                <a:uFillTx/>
-                <a:latin typeface="DejaVu Serif"/>
-                <a:ea typeface="DejaVu Serif"/>
-              </a:rPr>
-              <a:t>ien</a:t>
-            </a:r>
-            <a:r>
-              <a:rPr lang="en-US" sz="1600" b="0" u="none" strike="noStrike">
-                <a:solidFill>
-                  <a:srgbClr val="E8E8E8"/>
-                </a:solidFill>
-                <a:effectLst/>
-                <a:uFillTx/>
-                <a:latin typeface="DejaVu Serif"/>
-                <a:ea typeface="DejaVu Serif"/>
-              </a:rPr>
-              <a:t>t </a:t>
-            </a:r>
-            <a:r>
-              <a:rPr lang="en-US" sz="1600" b="0" u="none" strike="noStrike">
-                <a:solidFill>
-                  <a:srgbClr val="E8E8E8"/>
-                </a:solidFill>
-                <a:effectLst/>
-                <a:uFillTx/>
-                <a:latin typeface="DejaVu Serif"/>
-                <a:ea typeface="DejaVu Serif"/>
-              </a:rPr>
-              <a:t>car</a:t>
-            </a:r>
-            <a:r>
-              <a:rPr lang="en-US" sz="1600" b="0" u="none" strike="noStrike">
-                <a:solidFill>
-                  <a:srgbClr val="E8E8E8"/>
-                </a:solidFill>
-                <a:effectLst/>
-                <a:uFillTx/>
-                <a:latin typeface="DejaVu Serif"/>
-                <a:ea typeface="DejaVu Serif"/>
-              </a:rPr>
-              <a:t>e</a:t>
+              <a:t>patient care</a:t>
             </a:r>
             <a:endParaRPr lang="de-DE" sz="1600" b="0" u="none" strike="noStrike">
               <a:solidFill>
@@ -22063,7 +20544,7 @@
         <p:spPr>
           <a:xfrm>
             <a:off x="457200" y="3303360"/>
-            <a:ext cx="8228520" cy="456120"/>
+            <a:ext cx="8228160" cy="455760"/>
           </a:xfrm>
           <a:prstGeom prst="rect">
             <a:avLst/>
@@ -22114,7 +20595,43 @@
                 <a:latin typeface="DejaVu Serif"/>
                 <a:ea typeface="DejaVu Serif"/>
               </a:rPr>
-              <a:t>of physicians report burnout — administrative load is the #1 cited driver</a:t>
+              <a:t>of physicians </a:t>
+            </a:r>
+            <a:r>
+              <a:rPr lang="en-US" sz="1600" b="0" u="none" strike="noStrike">
+                <a:solidFill>
+                  <a:srgbClr val="E8E8E8"/>
+                </a:solidFill>
+                <a:effectLst/>
+                <a:uFillTx/>
+                <a:latin typeface="DejaVu Serif"/>
+                <a:ea typeface="DejaVu Serif"/>
+              </a:rPr>
+              <a:t>report burnout — </a:t>
+            </a:r>
+            <a:r>
+              <a:rPr lang="en-US" sz="1600" b="0" u="none" strike="noStrike">
+                <a:solidFill>
+                  <a:srgbClr val="E8E8E8"/>
+                </a:solidFill>
+                <a:effectLst/>
+                <a:uFillTx/>
+                <a:latin typeface="DejaVu Serif"/>
+                <a:ea typeface="DejaVu Serif"/>
+              </a:rPr>
+              <a:t>administrative load is </a:t>
+            </a:r>
+            <a:r>
+              <a:rPr lang="en-US" sz="1600" b="0" u="none" strike="noStrike">
+                <a:solidFill>
+                  <a:srgbClr val="E8E8E8"/>
+                </a:solidFill>
+                <a:effectLst/>
+                <a:uFillTx/>
+                <a:latin typeface="DejaVu Serif"/>
+                <a:ea typeface="DejaVu Serif"/>
+              </a:rPr>
+              <a:t>the #1 cited driver</a:t>
             </a:r>
             <a:endParaRPr lang="de-DE" sz="1600" b="0" u="none" strike="noStrike">
               <a:solidFill>
@@ -22136,7 +20653,7 @@
         <p:spPr>
           <a:xfrm>
             <a:off x="457200" y="4526280"/>
-            <a:ext cx="8228520" cy="227520"/>
+            <a:ext cx="8228160" cy="227160"/>
           </a:xfrm>
           <a:prstGeom prst="rect">
             <a:avLst/>
@@ -22175,7 +20692,7 @@
                 <a:latin typeface="DejaVu Serif"/>
                 <a:ea typeface="DejaVu Serif"/>
               </a:rPr>
-              <a:t>Sourc</a:t>
+              <a:t>Sources: Annals of Internal Medicine, </a:t>
             </a:r>
             <a:r>
               <a:rPr lang="en-US" sz="900" b="0" i="1" u="none" strike="noStrike">
@@ -22187,7 +20704,7 @@
                 <a:latin typeface="DejaVu Serif"/>
                 <a:ea typeface="DejaVu Serif"/>
               </a:rPr>
-              <a:t>es: </a:t>
+              <a:t>2016 · Medscape Physician Burnout </a:t>
             </a:r>
             <a:r>
               <a:rPr lang="en-US" sz="900" b="0" i="1" u="none" strike="noStrike">
@@ -22199,199 +20716,7 @@
                 <a:latin typeface="DejaVu Serif"/>
                 <a:ea typeface="DejaVu Serif"/>
               </a:rPr>
-              <a:t>Annal</a:t>
-            </a:r>
-            <a:r>
-              <a:rPr lang="en-US" sz="900" b="0" i="1" u="none" strike="noStrike">
-                <a:solidFill>
-                  <a:srgbClr val="5A6570"/>
-                </a:solidFill>
-                <a:effectLst/>
-                <a:uFillTx/>
-                <a:latin typeface="DejaVu Serif"/>
-                <a:ea typeface="DejaVu Serif"/>
-              </a:rPr>
-              <a:t>s of </a:t>
-            </a:r>
-            <a:r>
-              <a:rPr lang="en-US" sz="900" b="0" i="1" u="none" strike="noStrike">
-                <a:solidFill>
-                  <a:srgbClr val="5A6570"/>
-                </a:solidFill>
-                <a:effectLst/>
-                <a:uFillTx/>
-                <a:latin typeface="DejaVu Serif"/>
-                <a:ea typeface="DejaVu Serif"/>
-              </a:rPr>
-              <a:t>Inter</a:t>
-            </a:r>
-            <a:r>
-              <a:rPr lang="en-US" sz="900" b="0" i="1" u="none" strike="noStrike">
-                <a:solidFill>
-                  <a:srgbClr val="5A6570"/>
-                </a:solidFill>
-                <a:effectLst/>
-                <a:uFillTx/>
-                <a:latin typeface="DejaVu Serif"/>
-                <a:ea typeface="DejaVu Serif"/>
-              </a:rPr>
-              <a:t>nal </a:t>
-            </a:r>
-            <a:r>
-              <a:rPr lang="en-US" sz="900" b="0" i="1" u="none" strike="noStrike">
-                <a:solidFill>
-                  <a:srgbClr val="5A6570"/>
-                </a:solidFill>
-                <a:effectLst/>
-                <a:uFillTx/>
-                <a:latin typeface="DejaVu Serif"/>
-                <a:ea typeface="DejaVu Serif"/>
-              </a:rPr>
-              <a:t>Medi</a:t>
-            </a:r>
-            <a:r>
-              <a:rPr lang="en-US" sz="900" b="0" i="1" u="none" strike="noStrike">
-                <a:solidFill>
-                  <a:srgbClr val="5A6570"/>
-                </a:solidFill>
-                <a:effectLst/>
-                <a:uFillTx/>
-                <a:latin typeface="DejaVu Serif"/>
-                <a:ea typeface="DejaVu Serif"/>
-              </a:rPr>
-              <a:t>cine, </a:t>
-            </a:r>
-            <a:r>
-              <a:rPr lang="en-US" sz="900" b="0" i="1" u="none" strike="noStrike">
-                <a:solidFill>
-                  <a:srgbClr val="5A6570"/>
-                </a:solidFill>
-                <a:effectLst/>
-                <a:uFillTx/>
-                <a:latin typeface="DejaVu Serif"/>
-                <a:ea typeface="DejaVu Serif"/>
-              </a:rPr>
-              <a:t>2016 </a:t>
-            </a:r>
-            <a:r>
-              <a:rPr lang="en-US" sz="900" b="0" i="1" u="none" strike="noStrike">
-                <a:solidFill>
-                  <a:srgbClr val="5A6570"/>
-                </a:solidFill>
-                <a:effectLst/>
-                <a:uFillTx/>
-                <a:latin typeface="DejaVu Serif"/>
-                <a:ea typeface="DejaVu Serif"/>
-              </a:rPr>
-              <a:t>· </a:t>
-            </a:r>
-            <a:r>
-              <a:rPr lang="en-US" sz="900" b="0" i="1" u="none" strike="noStrike">
-                <a:solidFill>
-                  <a:srgbClr val="5A6570"/>
-                </a:solidFill>
-                <a:effectLst/>
-                <a:uFillTx/>
-                <a:latin typeface="DejaVu Serif"/>
-                <a:ea typeface="DejaVu Serif"/>
-              </a:rPr>
-              <a:t>Meds</a:t>
-            </a:r>
-            <a:r>
-              <a:rPr lang="en-US" sz="900" b="0" i="1" u="none" strike="noStrike">
-                <a:solidFill>
-                  <a:srgbClr val="5A6570"/>
-                </a:solidFill>
-                <a:effectLst/>
-                <a:uFillTx/>
-                <a:latin typeface="DejaVu Serif"/>
-                <a:ea typeface="DejaVu Serif"/>
-              </a:rPr>
-              <a:t>cape </a:t>
-            </a:r>
-            <a:r>
-              <a:rPr lang="en-US" sz="900" b="0" i="1" u="none" strike="noStrike">
-                <a:solidFill>
-                  <a:srgbClr val="5A6570"/>
-                </a:solidFill>
-                <a:effectLst/>
-                <a:uFillTx/>
-                <a:latin typeface="DejaVu Serif"/>
-                <a:ea typeface="DejaVu Serif"/>
-              </a:rPr>
-              <a:t>Physi</a:t>
-            </a:r>
-            <a:r>
-              <a:rPr lang="en-US" sz="900" b="0" i="1" u="none" strike="noStrike">
-                <a:solidFill>
-                  <a:srgbClr val="5A6570"/>
-                </a:solidFill>
-                <a:effectLst/>
-                <a:uFillTx/>
-                <a:latin typeface="DejaVu Serif"/>
-                <a:ea typeface="DejaVu Serif"/>
-              </a:rPr>
-              <a:t>cian </a:t>
-            </a:r>
-            <a:r>
-              <a:rPr lang="en-US" sz="900" b="0" i="1" u="none" strike="noStrike">
-                <a:solidFill>
-                  <a:srgbClr val="5A6570"/>
-                </a:solidFill>
-                <a:effectLst/>
-                <a:uFillTx/>
-                <a:latin typeface="DejaVu Serif"/>
-                <a:ea typeface="DejaVu Serif"/>
-              </a:rPr>
-              <a:t>Burno</a:t>
-            </a:r>
-            <a:r>
-              <a:rPr lang="en-US" sz="900" b="0" i="1" u="none" strike="noStrike">
-                <a:solidFill>
-                  <a:srgbClr val="5A6570"/>
-                </a:solidFill>
-                <a:effectLst/>
-                <a:uFillTx/>
-                <a:latin typeface="DejaVu Serif"/>
-                <a:ea typeface="DejaVu Serif"/>
-              </a:rPr>
-              <a:t>ut </a:t>
-            </a:r>
-            <a:r>
-              <a:rPr lang="en-US" sz="900" b="0" i="1" u="none" strike="noStrike">
-                <a:solidFill>
-                  <a:srgbClr val="5A6570"/>
-                </a:solidFill>
-                <a:effectLst/>
-                <a:uFillTx/>
-                <a:latin typeface="DejaVu Serif"/>
-                <a:ea typeface="DejaVu Serif"/>
-              </a:rPr>
-              <a:t>Repor</a:t>
-            </a:r>
-            <a:r>
-              <a:rPr lang="en-US" sz="900" b="0" i="1" u="none" strike="noStrike">
-                <a:solidFill>
-                  <a:srgbClr val="5A6570"/>
-                </a:solidFill>
-                <a:effectLst/>
-                <a:uFillTx/>
-                <a:latin typeface="DejaVu Serif"/>
-                <a:ea typeface="DejaVu Serif"/>
-              </a:rPr>
-              <a:t>t </a:t>
-            </a:r>
-            <a:r>
-              <a:rPr lang="en-US" sz="900" b="0" i="1" u="none" strike="noStrike">
-                <a:solidFill>
-                  <a:srgbClr val="5A6570"/>
-                </a:solidFill>
-                <a:effectLst/>
-                <a:uFillTx/>
-                <a:latin typeface="DejaVu Serif"/>
-                <a:ea typeface="DejaVu Serif"/>
-              </a:rPr>
-              <a:t>2024</a:t>
+              <a:t>Report 2024</a:t>
             </a:r>
             <a:endParaRPr lang="de-DE" sz="900" b="0" u="none" strike="noStrike">
               <a:solidFill>
@@ -22413,7 +20738,7 @@
         <p:spPr>
           <a:xfrm>
             <a:off x="365760" y="4864680"/>
-            <a:ext cx="6856920" cy="227520"/>
+            <a:ext cx="6856560" cy="227160"/>
           </a:xfrm>
           <a:prstGeom prst="rect">
             <a:avLst/>
@@ -22452,7 +20777,19 @@
                 <a:latin typeface="DejaVu Serif"/>
                 <a:ea typeface="DejaVu Serif"/>
               </a:rPr>
-              <a:t>AI-Anamnesis · Master Seminar · PwC × Hochschule Hannover · 2026</a:t>
+              <a:t>AI-Anamnesis · Master Seminar · PwC × </a:t>
+            </a:r>
+            <a:r>
+              <a:rPr lang="en-US" sz="800" b="0" u="none" strike="noStrike">
+                <a:solidFill>
+                  <a:srgbClr val="5A6570"/>
+                </a:solidFill>
+                <a:effectLst/>
+                <a:uFillTx/>
+                <a:latin typeface="DejaVu Serif"/>
+                <a:ea typeface="DejaVu Serif"/>
+              </a:rPr>
+              <a:t>Hochschule Hannover · 2026</a:t>
             </a:r>
             <a:endParaRPr lang="de-DE" sz="800" b="0" u="none" strike="noStrike">
               <a:solidFill>
@@ -22474,7 +20811,7 @@
         <p:spPr>
           <a:xfrm>
             <a:off x="7772400" y="4864680"/>
-            <a:ext cx="1004760" cy="227520"/>
+            <a:ext cx="1004400" cy="227160"/>
           </a:xfrm>
           <a:prstGeom prst="rect">
             <a:avLst/>
@@ -22572,7 +20909,7 @@
         <p:spPr>
           <a:xfrm>
             <a:off x="6400800" y="548640"/>
-            <a:ext cx="2376360" cy="318960"/>
+            <a:ext cx="2376000" cy="318600"/>
           </a:xfrm>
           <a:prstGeom prst="parallelogram">
             <a:avLst>
@@ -22620,7 +20957,7 @@
         <p:spPr>
           <a:xfrm>
             <a:off x="6583680" y="1005840"/>
-            <a:ext cx="2193480" cy="254880"/>
+            <a:ext cx="2193120" cy="254520"/>
           </a:xfrm>
           <a:prstGeom prst="parallelogram">
             <a:avLst>
@@ -22670,7 +21007,7 @@
         <p:spPr>
           <a:xfrm>
             <a:off x="457200" y="1645920"/>
-            <a:ext cx="8228520" cy="1644840"/>
+            <a:ext cx="8228160" cy="1644480"/>
           </a:xfrm>
           <a:prstGeom prst="rect">
             <a:avLst/>
@@ -22709,19 +21046,7 @@
                 <a:latin typeface="DejaVu Serif"/>
                 <a:ea typeface="DejaVu Serif"/>
               </a:rPr>
-              <a:t>Quest</a:t>
-            </a:r>
-            <a:r>
-              <a:rPr lang="en-US" sz="7200" b="0" u="none" strike="noStrike">
-                <a:solidFill>
-                  <a:srgbClr val="FFFFFF"/>
-                </a:solidFill>
-                <a:effectLst/>
-                <a:uFillTx/>
-                <a:latin typeface="DejaVu Serif"/>
-                <a:ea typeface="DejaVu Serif"/>
-              </a:rPr>
-              <a:t>ions?</a:t>
+              <a:t>Questions?</a:t>
             </a:r>
             <a:endParaRPr lang="de-DE" sz="7200" b="0" u="none" strike="noStrike">
               <a:solidFill>
@@ -22743,7 +21068,7 @@
         <p:spPr>
           <a:xfrm>
             <a:off x="457200" y="3749040"/>
-            <a:ext cx="8228520" cy="410400"/>
+            <a:ext cx="8228160" cy="410040"/>
           </a:xfrm>
           <a:prstGeom prst="rect">
             <a:avLst/>
@@ -22804,7 +21129,7 @@
         <p:spPr>
           <a:xfrm>
             <a:off x="365760" y="4864680"/>
-            <a:ext cx="6856920" cy="227520"/>
+            <a:ext cx="6856560" cy="227160"/>
           </a:xfrm>
           <a:prstGeom prst="rect">
             <a:avLst/>
@@ -22843,19 +21168,7 @@
                 <a:latin typeface="DejaVu Serif"/>
                 <a:ea typeface="DejaVu Serif"/>
               </a:rPr>
-              <a:t>AI-Anamnesis · Master Seminar · PwC × </a:t>
-            </a:r>
-            <a:r>
-              <a:rPr lang="en-US" sz="800" b="0" u="none" strike="noStrike">
-                <a:solidFill>
-                  <a:srgbClr val="5A6570"/>
-                </a:solidFill>
-                <a:effectLst/>
-                <a:uFillTx/>
-                <a:latin typeface="DejaVu Serif"/>
-                <a:ea typeface="DejaVu Serif"/>
-              </a:rPr>
-              <a:t>Hochschule Hannover · 2026</a:t>
+              <a:t>AI-Anamnesis · Master Seminar · PwC × Hochschule Hannover · 2026</a:t>
             </a:r>
             <a:endParaRPr lang="de-DE" sz="800" b="0" u="none" strike="noStrike">
               <a:solidFill>
@@ -22877,7 +21190,7 @@
         <p:spPr>
           <a:xfrm>
             <a:off x="7772400" y="4864680"/>
-            <a:ext cx="1004760" cy="227520"/>
+            <a:ext cx="1004400" cy="227160"/>
           </a:xfrm>
           <a:prstGeom prst="rect">
             <a:avLst/>
@@ -22975,7 +21288,7 @@
         <p:spPr>
           <a:xfrm>
             <a:off x="457200" y="274320"/>
-            <a:ext cx="8228520" cy="318960"/>
+            <a:ext cx="8228160" cy="318600"/>
           </a:xfrm>
           <a:prstGeom prst="rect">
             <a:avLst/>
@@ -23036,7 +21349,7 @@
         <p:spPr>
           <a:xfrm>
             <a:off x="457200" y="822960"/>
-            <a:ext cx="8228520" cy="1370520"/>
+            <a:ext cx="8228160" cy="1370160"/>
           </a:xfrm>
           <a:prstGeom prst="rect">
             <a:avLst/>
@@ -23157,7 +21470,7 @@
         <p:spPr>
           <a:xfrm>
             <a:off x="1490400" y="2743200"/>
-            <a:ext cx="584280" cy="584280"/>
+            <a:ext cx="583920" cy="583920"/>
           </a:xfrm>
           <a:prstGeom prst="rect">
             <a:avLst/>
@@ -23178,11 +21491,6 @@
             <a:noAutofit/>
           </a:bodyPr>
           <a:p>
-            <a:pPr defTabSz="914400">
-              <a:lnSpc>
-                <a:spcPct val="100000"/>
-              </a:lnSpc>
-            </a:pPr>
             <a:endParaRPr lang="en-US" sz="2200" b="0" u="none" strike="noStrike">
               <a:solidFill>
                 <a:schemeClr val="dk1"/>
@@ -23203,7 +21511,7 @@
         <p:spPr>
           <a:xfrm>
             <a:off x="502920" y="3474720"/>
-            <a:ext cx="2559240" cy="318960"/>
+            <a:ext cx="2558880" cy="318600"/>
           </a:xfrm>
           <a:prstGeom prst="rect">
             <a:avLst/>
@@ -23264,7 +21572,7 @@
         <p:spPr>
           <a:xfrm>
             <a:off x="502920" y="3794760"/>
-            <a:ext cx="2559240" cy="318960"/>
+            <a:ext cx="2558880" cy="318600"/>
           </a:xfrm>
           <a:prstGeom prst="rect">
             <a:avLst/>
@@ -23325,7 +21633,7 @@
         <p:spPr>
           <a:xfrm>
             <a:off x="3291840" y="3474720"/>
-            <a:ext cx="2559240" cy="318960"/>
+            <a:ext cx="2558880" cy="318600"/>
           </a:xfrm>
           <a:prstGeom prst="rect">
             <a:avLst/>
@@ -23386,7 +21694,7 @@
         <p:spPr>
           <a:xfrm>
             <a:off x="3291840" y="3794760"/>
-            <a:ext cx="2559240" cy="318960"/>
+            <a:ext cx="2558880" cy="318600"/>
           </a:xfrm>
           <a:prstGeom prst="rect">
             <a:avLst/>
@@ -23447,7 +21755,7 @@
         <p:spPr>
           <a:xfrm>
             <a:off x="6080760" y="3474720"/>
-            <a:ext cx="2559240" cy="318960"/>
+            <a:ext cx="2558880" cy="318600"/>
           </a:xfrm>
           <a:prstGeom prst="rect">
             <a:avLst/>
@@ -23508,7 +21816,7 @@
         <p:spPr>
           <a:xfrm>
             <a:off x="6080760" y="3794760"/>
-            <a:ext cx="2559240" cy="318960"/>
+            <a:ext cx="2558880" cy="318600"/>
           </a:xfrm>
           <a:prstGeom prst="rect">
             <a:avLst/>
@@ -23569,7 +21877,7 @@
         <p:spPr>
           <a:xfrm>
             <a:off x="365760" y="4864680"/>
-            <a:ext cx="6856920" cy="227520"/>
+            <a:ext cx="6856560" cy="227160"/>
           </a:xfrm>
           <a:prstGeom prst="rect">
             <a:avLst/>
@@ -23630,7 +21938,7 @@
         <p:spPr>
           <a:xfrm>
             <a:off x="7772400" y="4864680"/>
-            <a:ext cx="1004760" cy="227520"/>
+            <a:ext cx="1004400" cy="227160"/>
           </a:xfrm>
           <a:prstGeom prst="rect">
             <a:avLst/>
@@ -23695,7 +22003,7 @@
         <p:spPr>
           <a:xfrm>
             <a:off x="1483200" y="2759040"/>
-            <a:ext cx="591480" cy="590760"/>
+            <a:ext cx="591120" cy="590400"/>
           </a:xfrm>
           <a:prstGeom prst="rect">
             <a:avLst/>
@@ -23719,7 +22027,7 @@
         <p:spPr>
           <a:xfrm>
             <a:off x="4343760" y="2759040"/>
-            <a:ext cx="455040" cy="599760"/>
+            <a:ext cx="454680" cy="599400"/>
           </a:xfrm>
           <a:prstGeom prst="rect">
             <a:avLst/>
@@ -23743,7 +22051,7 @@
         <p:spPr>
           <a:xfrm>
             <a:off x="7048800" y="2759040"/>
-            <a:ext cx="611640" cy="611640"/>
+            <a:ext cx="611280" cy="611280"/>
           </a:xfrm>
           <a:prstGeom prst="rect">
             <a:avLst/>
@@ -23800,7 +22108,7 @@
         <p:spPr>
           <a:xfrm>
             <a:off x="452520" y="1626480"/>
-            <a:ext cx="1827720" cy="1461960"/>
+            <a:ext cx="1827360" cy="1461600"/>
           </a:xfrm>
           <a:prstGeom prst="roundRect">
             <a:avLst>
@@ -23853,7 +22161,7 @@
         <p:spPr>
           <a:xfrm>
             <a:off x="457200" y="274320"/>
-            <a:ext cx="8228520" cy="639000"/>
+            <a:ext cx="8228160" cy="638640"/>
           </a:xfrm>
           <a:prstGeom prst="rect">
             <a:avLst/>
@@ -23892,223 +22200,7 @@
                 <a:latin typeface="DejaVu Serif"/>
                 <a:ea typeface="DejaVu Serif"/>
               </a:rPr>
-              <a:t>F</a:t>
-            </a:r>
-            <a:r>
-              <a:rPr lang="en-US" sz="2400" b="1" u="none" strike="noStrike">
-                <a:solidFill>
-                  <a:srgbClr val="E8E8E8"/>
-                </a:solidFill>
-                <a:effectLst/>
-                <a:uFillTx/>
-                <a:latin typeface="DejaVu Serif"/>
-                <a:ea typeface="DejaVu Serif"/>
-              </a:rPr>
-              <a:t>o</a:t>
-            </a:r>
-            <a:r>
-              <a:rPr lang="en-US" sz="2400" b="1" u="none" strike="noStrike">
-                <a:solidFill>
-                  <a:srgbClr val="E8E8E8"/>
-                </a:solidFill>
-                <a:effectLst/>
-                <a:uFillTx/>
-                <a:latin typeface="DejaVu Serif"/>
-                <a:ea typeface="DejaVu Serif"/>
-              </a:rPr>
-              <a:t>u</a:t>
-            </a:r>
-            <a:r>
-              <a:rPr lang="en-US" sz="2400" b="1" u="none" strike="noStrike">
-                <a:solidFill>
-                  <a:srgbClr val="E8E8E8"/>
-                </a:solidFill>
-                <a:effectLst/>
-                <a:uFillTx/>
-                <a:latin typeface="DejaVu Serif"/>
-                <a:ea typeface="DejaVu Serif"/>
-              </a:rPr>
-              <a:t>r </a:t>
-            </a:r>
-            <a:r>
-              <a:rPr lang="en-US" sz="2400" b="1" u="none" strike="noStrike">
-                <a:solidFill>
-                  <a:srgbClr val="E8E8E8"/>
-                </a:solidFill>
-                <a:effectLst/>
-                <a:uFillTx/>
-                <a:latin typeface="DejaVu Serif"/>
-                <a:ea typeface="DejaVu Serif"/>
-              </a:rPr>
-              <a:t>st</a:t>
-            </a:r>
-            <a:r>
-              <a:rPr lang="en-US" sz="2400" b="1" u="none" strike="noStrike">
-                <a:solidFill>
-                  <a:srgbClr val="E8E8E8"/>
-                </a:solidFill>
-                <a:effectLst/>
-                <a:uFillTx/>
-                <a:latin typeface="DejaVu Serif"/>
-                <a:ea typeface="DejaVu Serif"/>
-              </a:rPr>
-              <a:t>a</a:t>
-            </a:r>
-            <a:r>
-              <a:rPr lang="en-US" sz="2400" b="1" u="none" strike="noStrike">
-                <a:solidFill>
-                  <a:srgbClr val="E8E8E8"/>
-                </a:solidFill>
-                <a:effectLst/>
-                <a:uFillTx/>
-                <a:latin typeface="DejaVu Serif"/>
-                <a:ea typeface="DejaVu Serif"/>
-              </a:rPr>
-              <a:t>g</a:t>
-            </a:r>
-            <a:r>
-              <a:rPr lang="en-US" sz="2400" b="1" u="none" strike="noStrike">
-                <a:solidFill>
-                  <a:srgbClr val="E8E8E8"/>
-                </a:solidFill>
-                <a:effectLst/>
-                <a:uFillTx/>
-                <a:latin typeface="DejaVu Serif"/>
-                <a:ea typeface="DejaVu Serif"/>
-              </a:rPr>
-              <a:t>e</a:t>
-            </a:r>
-            <a:r>
-              <a:rPr lang="en-US" sz="2400" b="1" u="none" strike="noStrike">
-                <a:solidFill>
-                  <a:srgbClr val="E8E8E8"/>
-                </a:solidFill>
-                <a:effectLst/>
-                <a:uFillTx/>
-                <a:latin typeface="DejaVu Serif"/>
-                <a:ea typeface="DejaVu Serif"/>
-              </a:rPr>
-              <a:t>s </a:t>
-            </a:r>
-            <a:r>
-              <a:rPr lang="en-US" sz="2400" b="1" u="none" strike="noStrike">
-                <a:solidFill>
-                  <a:srgbClr val="E8E8E8"/>
-                </a:solidFill>
-                <a:effectLst/>
-                <a:uFillTx/>
-                <a:latin typeface="DejaVu Serif"/>
-                <a:ea typeface="DejaVu Serif"/>
-              </a:rPr>
-              <a:t>— </a:t>
-            </a:r>
-            <a:r>
-              <a:rPr lang="en-US" sz="2400" b="1" u="none" strike="noStrike">
-                <a:solidFill>
-                  <a:srgbClr val="E8E8E8"/>
-                </a:solidFill>
-                <a:effectLst/>
-                <a:uFillTx/>
-                <a:latin typeface="DejaVu Serif"/>
-                <a:ea typeface="DejaVu Serif"/>
-              </a:rPr>
-              <a:t>o</a:t>
-            </a:r>
-            <a:r>
-              <a:rPr lang="en-US" sz="2400" b="1" u="none" strike="noStrike">
-                <a:solidFill>
-                  <a:srgbClr val="E8E8E8"/>
-                </a:solidFill>
-                <a:effectLst/>
-                <a:uFillTx/>
-                <a:latin typeface="DejaVu Serif"/>
-                <a:ea typeface="DejaVu Serif"/>
-              </a:rPr>
-              <a:t>n</a:t>
-            </a:r>
-            <a:r>
-              <a:rPr lang="en-US" sz="2400" b="1" u="none" strike="noStrike">
-                <a:solidFill>
-                  <a:srgbClr val="E8E8E8"/>
-                </a:solidFill>
-                <a:effectLst/>
-                <a:uFillTx/>
-                <a:latin typeface="DejaVu Serif"/>
-                <a:ea typeface="DejaVu Serif"/>
-              </a:rPr>
-              <a:t>e </a:t>
-            </a:r>
-            <a:r>
-              <a:rPr lang="en-US" sz="2400" b="1" u="none" strike="noStrike">
-                <a:solidFill>
-                  <a:srgbClr val="E8E8E8"/>
-                </a:solidFill>
-                <a:effectLst/>
-                <a:uFillTx/>
-                <a:latin typeface="DejaVu Serif"/>
-                <a:ea typeface="DejaVu Serif"/>
-              </a:rPr>
-              <a:t>w</a:t>
-            </a:r>
-            <a:r>
-              <a:rPr lang="en-US" sz="2400" b="1" u="none" strike="noStrike">
-                <a:solidFill>
-                  <a:srgbClr val="E8E8E8"/>
-                </a:solidFill>
-                <a:effectLst/>
-                <a:uFillTx/>
-                <a:latin typeface="DejaVu Serif"/>
-                <a:ea typeface="DejaVu Serif"/>
-              </a:rPr>
-              <a:t>o</a:t>
-            </a:r>
-            <a:r>
-              <a:rPr lang="en-US" sz="2400" b="1" u="none" strike="noStrike">
-                <a:solidFill>
-                  <a:srgbClr val="E8E8E8"/>
-                </a:solidFill>
-                <a:effectLst/>
-                <a:uFillTx/>
-                <a:latin typeface="DejaVu Serif"/>
-                <a:ea typeface="DejaVu Serif"/>
-              </a:rPr>
-              <a:t>r</a:t>
-            </a:r>
-            <a:r>
-              <a:rPr lang="en-US" sz="2400" b="1" u="none" strike="noStrike">
-                <a:solidFill>
-                  <a:srgbClr val="E8E8E8"/>
-                </a:solidFill>
-                <a:effectLst/>
-                <a:uFillTx/>
-                <a:latin typeface="DejaVu Serif"/>
-                <a:ea typeface="DejaVu Serif"/>
-              </a:rPr>
-              <a:t>kf</a:t>
-            </a:r>
-            <a:r>
-              <a:rPr lang="en-US" sz="2400" b="1" u="none" strike="noStrike">
-                <a:solidFill>
-                  <a:srgbClr val="E8E8E8"/>
-                </a:solidFill>
-                <a:effectLst/>
-                <a:uFillTx/>
-                <a:latin typeface="DejaVu Serif"/>
-                <a:ea typeface="DejaVu Serif"/>
-              </a:rPr>
-              <a:t>lo</a:t>
-            </a:r>
-            <a:r>
-              <a:rPr lang="en-US" sz="2400" b="1" u="none" strike="noStrike">
-                <a:solidFill>
-                  <a:srgbClr val="E8E8E8"/>
-                </a:solidFill>
-                <a:effectLst/>
-                <a:uFillTx/>
-                <a:latin typeface="DejaVu Serif"/>
-                <a:ea typeface="DejaVu Serif"/>
-              </a:rPr>
-              <a:t>w</a:t>
+              <a:t>Four stages — one workflow</a:t>
             </a:r>
             <a:endParaRPr lang="de-DE" sz="2400" b="0" u="none" strike="noStrike">
               <a:solidFill>
@@ -24130,7 +22222,7 @@
         <p:spPr>
           <a:xfrm>
             <a:off x="589680" y="2175120"/>
-            <a:ext cx="1553400" cy="364680"/>
+            <a:ext cx="1553040" cy="364320"/>
           </a:xfrm>
           <a:prstGeom prst="rect">
             <a:avLst/>
@@ -24191,7 +22283,7 @@
         <p:spPr>
           <a:xfrm>
             <a:off x="2281320" y="2175120"/>
-            <a:ext cx="282240" cy="364680"/>
+            <a:ext cx="281880" cy="364320"/>
           </a:xfrm>
           <a:prstGeom prst="rect">
             <a:avLst/>
@@ -24252,7 +22344,7 @@
         <p:spPr>
           <a:xfrm>
             <a:off x="2583360" y="1626480"/>
-            <a:ext cx="1827720" cy="1461960"/>
+            <a:ext cx="1827360" cy="1461600"/>
           </a:xfrm>
           <a:prstGeom prst="roundRect">
             <a:avLst>
@@ -24305,7 +22397,7 @@
         <p:spPr>
           <a:xfrm>
             <a:off x="2715840" y="2175120"/>
-            <a:ext cx="1553400" cy="364680"/>
+            <a:ext cx="1553040" cy="364320"/>
           </a:xfrm>
           <a:prstGeom prst="rect">
             <a:avLst/>
@@ -24366,7 +22458,7 @@
         <p:spPr>
           <a:xfrm>
             <a:off x="4430160" y="2175120"/>
-            <a:ext cx="282240" cy="364680"/>
+            <a:ext cx="281880" cy="364320"/>
           </a:xfrm>
           <a:prstGeom prst="rect">
             <a:avLst/>
@@ -24427,7 +22519,7 @@
         <p:spPr>
           <a:xfrm>
             <a:off x="4732200" y="1626480"/>
-            <a:ext cx="1827720" cy="1461960"/>
+            <a:ext cx="1827360" cy="1461600"/>
           </a:xfrm>
           <a:prstGeom prst="roundRect">
             <a:avLst>
@@ -24480,7 +22572,7 @@
         <p:spPr>
           <a:xfrm>
             <a:off x="4869360" y="2175120"/>
-            <a:ext cx="1553400" cy="364680"/>
+            <a:ext cx="1553040" cy="364320"/>
           </a:xfrm>
           <a:prstGeom prst="rect">
             <a:avLst/>
@@ -24541,7 +22633,7 @@
         <p:spPr>
           <a:xfrm>
             <a:off x="6579000" y="2175120"/>
-            <a:ext cx="282240" cy="364680"/>
+            <a:ext cx="281880" cy="364320"/>
           </a:xfrm>
           <a:prstGeom prst="rect">
             <a:avLst/>
@@ -24602,7 +22694,7 @@
         <p:spPr>
           <a:xfrm>
             <a:off x="6881040" y="1626480"/>
-            <a:ext cx="1827720" cy="1461960"/>
+            <a:ext cx="1827360" cy="1461600"/>
           </a:xfrm>
           <a:prstGeom prst="roundRect">
             <a:avLst>
@@ -24655,7 +22747,7 @@
         <p:spPr>
           <a:xfrm>
             <a:off x="6995160" y="2178360"/>
-            <a:ext cx="1553400" cy="364680"/>
+            <a:ext cx="1553040" cy="364320"/>
           </a:xfrm>
           <a:prstGeom prst="rect">
             <a:avLst/>
@@ -24716,7 +22808,7 @@
         <p:spPr>
           <a:xfrm>
             <a:off x="434520" y="3226680"/>
-            <a:ext cx="1827720" cy="273240"/>
+            <a:ext cx="1827360" cy="272880"/>
           </a:xfrm>
           <a:prstGeom prst="rect">
             <a:avLst/>
@@ -24777,7 +22869,7 @@
         <p:spPr>
           <a:xfrm>
             <a:off x="2583360" y="3226680"/>
-            <a:ext cx="1827720" cy="273240"/>
+            <a:ext cx="1827360" cy="272880"/>
           </a:xfrm>
           <a:prstGeom prst="rect">
             <a:avLst/>
@@ -24838,7 +22930,7 @@
         <p:spPr>
           <a:xfrm>
             <a:off x="4732200" y="3226680"/>
-            <a:ext cx="1827720" cy="273240"/>
+            <a:ext cx="1827360" cy="272880"/>
           </a:xfrm>
           <a:prstGeom prst="rect">
             <a:avLst/>
@@ -24899,7 +22991,7 @@
         <p:spPr>
           <a:xfrm>
             <a:off x="6881040" y="3226680"/>
-            <a:ext cx="1827720" cy="273240"/>
+            <a:ext cx="1827360" cy="272880"/>
           </a:xfrm>
           <a:prstGeom prst="rect">
             <a:avLst/>
@@ -24960,7 +23052,7 @@
         <p:spPr>
           <a:xfrm>
             <a:off x="365760" y="4864680"/>
-            <a:ext cx="6856920" cy="227520"/>
+            <a:ext cx="6856560" cy="227160"/>
           </a:xfrm>
           <a:prstGeom prst="rect">
             <a:avLst/>
@@ -25021,7 +23113,7 @@
         <p:spPr>
           <a:xfrm>
             <a:off x="7772400" y="4864680"/>
-            <a:ext cx="1004760" cy="227520"/>
+            <a:ext cx="1004400" cy="227160"/>
           </a:xfrm>
           <a:prstGeom prst="rect">
             <a:avLst/>
@@ -25626,7 +23718,7 @@
         <p:spPr>
           <a:xfrm>
             <a:off x="457200" y="274320"/>
-            <a:ext cx="8228520" cy="639000"/>
+            <a:ext cx="8228160" cy="638640"/>
           </a:xfrm>
           <a:prstGeom prst="rect">
             <a:avLst/>
@@ -25687,7 +23779,7 @@
         <p:spPr>
           <a:xfrm>
             <a:off x="457200" y="1280160"/>
-            <a:ext cx="3930840" cy="318960"/>
+            <a:ext cx="3930480" cy="318600"/>
           </a:xfrm>
           <a:prstGeom prst="rect">
             <a:avLst/>
@@ -26294,7 +24386,7 @@
         <p:spPr>
           <a:xfrm>
             <a:off x="4754880" y="1280160"/>
-            <a:ext cx="3930840" cy="318960"/>
+            <a:ext cx="3930480" cy="318600"/>
           </a:xfrm>
           <a:prstGeom prst="rect">
             <a:avLst/>
@@ -27031,7 +25123,7 @@
         <p:spPr>
           <a:xfrm>
             <a:off x="457200" y="3291840"/>
-            <a:ext cx="8228520" cy="318960"/>
+            <a:ext cx="8228160" cy="318600"/>
           </a:xfrm>
           <a:prstGeom prst="rect">
             <a:avLst/>
@@ -27092,7 +25184,7 @@
         <p:spPr>
           <a:xfrm>
             <a:off x="411480" y="3703320"/>
-            <a:ext cx="1553400" cy="821880"/>
+            <a:ext cx="1553040" cy="821520"/>
           </a:xfrm>
           <a:prstGeom prst="roundRect">
             <a:avLst>
@@ -27145,7 +25237,7 @@
         <p:spPr>
           <a:xfrm>
             <a:off x="502920" y="3960000"/>
-            <a:ext cx="1370520" cy="318960"/>
+            <a:ext cx="1370160" cy="318600"/>
           </a:xfrm>
           <a:prstGeom prst="rect">
             <a:avLst/>
@@ -27206,7 +25298,7 @@
         <p:spPr>
           <a:xfrm>
             <a:off x="2103120" y="3703320"/>
-            <a:ext cx="1553400" cy="821880"/>
+            <a:ext cx="1553040" cy="821520"/>
           </a:xfrm>
           <a:prstGeom prst="roundRect">
             <a:avLst>
@@ -27259,7 +25351,7 @@
         <p:spPr>
           <a:xfrm>
             <a:off x="2194560" y="3954960"/>
-            <a:ext cx="1370520" cy="318960"/>
+            <a:ext cx="1370160" cy="318600"/>
           </a:xfrm>
           <a:prstGeom prst="rect">
             <a:avLst/>
@@ -27320,7 +25412,7 @@
         <p:spPr>
           <a:xfrm>
             <a:off x="3794760" y="3703320"/>
-            <a:ext cx="1553400" cy="821880"/>
+            <a:ext cx="1553040" cy="821520"/>
           </a:xfrm>
           <a:prstGeom prst="roundRect">
             <a:avLst>
@@ -27373,7 +25465,7 @@
         <p:spPr>
           <a:xfrm>
             <a:off x="3886200" y="3954960"/>
-            <a:ext cx="1370520" cy="318960"/>
+            <a:ext cx="1370160" cy="318600"/>
           </a:xfrm>
           <a:prstGeom prst="rect">
             <a:avLst/>
@@ -27434,7 +25526,7 @@
         <p:spPr>
           <a:xfrm>
             <a:off x="5486400" y="3703320"/>
-            <a:ext cx="1553400" cy="821880"/>
+            <a:ext cx="1553040" cy="821520"/>
           </a:xfrm>
           <a:prstGeom prst="roundRect">
             <a:avLst>
@@ -27487,7 +25579,7 @@
         <p:spPr>
           <a:xfrm>
             <a:off x="5578200" y="3954960"/>
-            <a:ext cx="1370520" cy="318960"/>
+            <a:ext cx="1370160" cy="318600"/>
           </a:xfrm>
           <a:prstGeom prst="rect">
             <a:avLst/>
@@ -27548,7 +25640,7 @@
         <p:spPr>
           <a:xfrm>
             <a:off x="7178040" y="3703320"/>
-            <a:ext cx="1553400" cy="821880"/>
+            <a:ext cx="1553040" cy="821520"/>
           </a:xfrm>
           <a:prstGeom prst="roundRect">
             <a:avLst>
@@ -27601,7 +25693,7 @@
         <p:spPr>
           <a:xfrm>
             <a:off x="7269480" y="3960000"/>
-            <a:ext cx="1370520" cy="318960"/>
+            <a:ext cx="1370160" cy="318600"/>
           </a:xfrm>
           <a:prstGeom prst="rect">
             <a:avLst/>
@@ -27662,7 +25754,7 @@
         <p:spPr>
           <a:xfrm>
             <a:off x="365760" y="4864680"/>
-            <a:ext cx="6856920" cy="227520"/>
+            <a:ext cx="6856560" cy="227160"/>
           </a:xfrm>
           <a:prstGeom prst="rect">
             <a:avLst/>
@@ -27723,7 +25815,7 @@
         <p:spPr>
           <a:xfrm>
             <a:off x="7772400" y="4864680"/>
-            <a:ext cx="1004760" cy="227520"/>
+            <a:ext cx="1004400" cy="227160"/>
           </a:xfrm>
           <a:prstGeom prst="rect">
             <a:avLst/>
@@ -27788,7 +25880,7 @@
         <p:spPr>
           <a:xfrm>
             <a:off x="2933280" y="1986480"/>
-            <a:ext cx="179280" cy="99720"/>
+            <a:ext cx="178920" cy="99360"/>
           </a:xfrm>
           <a:prstGeom prst="rect">
             <a:avLst/>
@@ -27812,7 +25904,7 @@
         <p:spPr>
           <a:xfrm>
             <a:off x="2933280" y="1986840"/>
-            <a:ext cx="179280" cy="99720"/>
+            <a:ext cx="178920" cy="99360"/>
           </a:xfrm>
           <a:prstGeom prst="rect">
             <a:avLst/>
@@ -27836,7 +25928,7 @@
         <p:spPr>
           <a:xfrm>
             <a:off x="2933280" y="1987200"/>
-            <a:ext cx="179280" cy="99720"/>
+            <a:ext cx="178920" cy="99360"/>
           </a:xfrm>
           <a:prstGeom prst="rect">
             <a:avLst/>
@@ -27860,7 +25952,7 @@
         <p:spPr>
           <a:xfrm>
             <a:off x="2933280" y="2239560"/>
-            <a:ext cx="179280" cy="99720"/>
+            <a:ext cx="178920" cy="99360"/>
           </a:xfrm>
           <a:prstGeom prst="rect">
             <a:avLst/>
@@ -27884,7 +25976,7 @@
         <p:spPr>
           <a:xfrm>
             <a:off x="7217280" y="1987920"/>
-            <a:ext cx="179280" cy="99720"/>
+            <a:ext cx="178920" cy="99360"/>
           </a:xfrm>
           <a:prstGeom prst="rect">
             <a:avLst/>
@@ -28286,7 +26378,7 @@
         <p:spPr>
           <a:xfrm>
             <a:off x="457200" y="274320"/>
-            <a:ext cx="8228520" cy="639000"/>
+            <a:ext cx="8228160" cy="638640"/>
           </a:xfrm>
           <a:prstGeom prst="rect">
             <a:avLst/>
@@ -28325,31 +26417,7 @@
                 <a:latin typeface="DejaVu Serif"/>
                 <a:ea typeface="DejaVu Serif"/>
               </a:rPr>
-              <a:t>Hardware </a:t>
-            </a:r>
-            <a:r>
-              <a:rPr lang="en-US" sz="2400" b="1" u="none" strike="noStrike">
-                <a:solidFill>
-                  <a:srgbClr val="E8E8E8"/>
-                </a:solidFill>
-                <a:effectLst/>
-                <a:uFillTx/>
-                <a:latin typeface="DejaVu Serif"/>
-                <a:ea typeface="DejaVu Serif"/>
-              </a:rPr>
-              <a:t>draws the </a:t>
-            </a:r>
-            <a:r>
-              <a:rPr lang="en-US" sz="2400" b="1" u="none" strike="noStrike">
-                <a:solidFill>
-                  <a:srgbClr val="E8E8E8"/>
-                </a:solidFill>
-                <a:effectLst/>
-                <a:uFillTx/>
-                <a:latin typeface="DejaVu Serif"/>
-                <a:ea typeface="DejaVu Serif"/>
-              </a:rPr>
-              <a:t>line</a:t>
+              <a:t>Hardware draws the line</a:t>
             </a:r>
             <a:endParaRPr lang="de-DE" sz="2400" b="0" u="none" strike="noStrike">
               <a:solidFill>
@@ -28371,7 +26439,7 @@
         <p:spPr>
           <a:xfrm>
             <a:off x="457200" y="1491120"/>
-            <a:ext cx="3930840" cy="2467800"/>
+            <a:ext cx="3930480" cy="2467440"/>
           </a:xfrm>
           <a:prstGeom prst="roundRect">
             <a:avLst>
@@ -28419,7 +26487,7 @@
         <p:spPr>
           <a:xfrm>
             <a:off x="640080" y="1628280"/>
-            <a:ext cx="3565080" cy="318960"/>
+            <a:ext cx="3564720" cy="318600"/>
           </a:xfrm>
           <a:prstGeom prst="rect">
             <a:avLst/>
@@ -28480,7 +26548,7 @@
         <p:spPr>
           <a:xfrm>
             <a:off x="685800" y="2131200"/>
-            <a:ext cx="3382200" cy="1644840"/>
+            <a:ext cx="3381840" cy="1644480"/>
           </a:xfrm>
           <a:prstGeom prst="rect">
             <a:avLst/>
@@ -28652,7 +26720,7 @@
         <p:spPr>
           <a:xfrm>
             <a:off x="4754880" y="1491120"/>
-            <a:ext cx="3930840" cy="2467800"/>
+            <a:ext cx="3930480" cy="2467440"/>
           </a:xfrm>
           <a:prstGeom prst="roundRect">
             <a:avLst>
@@ -28705,7 +26773,7 @@
         <p:spPr>
           <a:xfrm>
             <a:off x="4937760" y="1628280"/>
-            <a:ext cx="3565080" cy="318960"/>
+            <a:ext cx="3564720" cy="318600"/>
           </a:xfrm>
           <a:prstGeom prst="rect">
             <a:avLst/>
@@ -28766,7 +26834,7 @@
         <p:spPr>
           <a:xfrm>
             <a:off x="4983480" y="2131200"/>
-            <a:ext cx="3382200" cy="1644840"/>
+            <a:ext cx="3381840" cy="1644480"/>
           </a:xfrm>
           <a:prstGeom prst="rect">
             <a:avLst/>
@@ -28977,7 +27045,7 @@
         <p:spPr>
           <a:xfrm>
             <a:off x="365760" y="4864680"/>
-            <a:ext cx="6856920" cy="227520"/>
+            <a:ext cx="6856560" cy="227160"/>
           </a:xfrm>
           <a:prstGeom prst="rect">
             <a:avLst/>
@@ -29038,7 +27106,7 @@
         <p:spPr>
           <a:xfrm>
             <a:off x="7772400" y="4864680"/>
-            <a:ext cx="1004760" cy="227520"/>
+            <a:ext cx="1004400" cy="227160"/>
           </a:xfrm>
           <a:prstGeom prst="rect">
             <a:avLst/>
@@ -29265,7 +27333,7 @@
         <p:spPr>
           <a:xfrm>
             <a:off x="457200" y="274320"/>
-            <a:ext cx="8228520" cy="639000"/>
+            <a:ext cx="8228160" cy="638640"/>
           </a:xfrm>
           <a:prstGeom prst="rect">
             <a:avLst/>
@@ -29326,7 +27394,7 @@
         <p:spPr>
           <a:xfrm>
             <a:off x="457200" y="1188720"/>
-            <a:ext cx="8228520" cy="776160"/>
+            <a:ext cx="8228160" cy="775800"/>
           </a:xfrm>
           <a:prstGeom prst="roundRect">
             <a:avLst>
@@ -29381,7 +27449,7 @@
         <p:spPr>
           <a:xfrm>
             <a:off x="640080" y="1188720"/>
-            <a:ext cx="1644840" cy="776160"/>
+            <a:ext cx="1644480" cy="775800"/>
           </a:xfrm>
           <a:prstGeom prst="rect">
             <a:avLst/>
@@ -29490,7 +27558,7 @@
         <p:spPr>
           <a:xfrm>
             <a:off x="2651760" y="1188720"/>
-            <a:ext cx="2010600" cy="776160"/>
+            <a:ext cx="2010240" cy="775800"/>
           </a:xfrm>
           <a:prstGeom prst="rect">
             <a:avLst/>
@@ -29551,7 +27619,7 @@
         <p:spPr>
           <a:xfrm>
             <a:off x="4663440" y="1188720"/>
-            <a:ext cx="2010600" cy="776160"/>
+            <a:ext cx="2010240" cy="775800"/>
           </a:xfrm>
           <a:prstGeom prst="rect">
             <a:avLst/>
@@ -29612,7 +27680,7 @@
         <p:spPr>
           <a:xfrm>
             <a:off x="6675120" y="1188720"/>
-            <a:ext cx="2010600" cy="776160"/>
+            <a:ext cx="2010240" cy="775800"/>
           </a:xfrm>
           <a:prstGeom prst="rect">
             <a:avLst/>
@@ -29673,7 +27741,7 @@
         <p:spPr>
           <a:xfrm>
             <a:off x="457200" y="2103120"/>
-            <a:ext cx="8228520" cy="776160"/>
+            <a:ext cx="8228160" cy="775800"/>
           </a:xfrm>
           <a:prstGeom prst="roundRect">
             <a:avLst>
@@ -29728,7 +27796,7 @@
         <p:spPr>
           <a:xfrm>
             <a:off x="640080" y="2103120"/>
-            <a:ext cx="1644840" cy="776160"/>
+            <a:ext cx="1644480" cy="775800"/>
           </a:xfrm>
           <a:prstGeom prst="rect">
             <a:avLst/>
@@ -29837,7 +27905,7 @@
         <p:spPr>
           <a:xfrm>
             <a:off x="2651760" y="2103120"/>
-            <a:ext cx="2010600" cy="776160"/>
+            <a:ext cx="2010240" cy="775800"/>
           </a:xfrm>
           <a:prstGeom prst="rect">
             <a:avLst/>
@@ -29898,7 +27966,7 @@
         <p:spPr>
           <a:xfrm>
             <a:off x="4663440" y="2103120"/>
-            <a:ext cx="2010600" cy="776160"/>
+            <a:ext cx="2010240" cy="775800"/>
           </a:xfrm>
           <a:prstGeom prst="rect">
             <a:avLst/>
@@ -29959,7 +28027,7 @@
         <p:spPr>
           <a:xfrm>
             <a:off x="6675120" y="2103120"/>
-            <a:ext cx="2010600" cy="776160"/>
+            <a:ext cx="2010240" cy="775800"/>
           </a:xfrm>
           <a:prstGeom prst="rect">
             <a:avLst/>
@@ -30020,7 +28088,7 @@
         <p:spPr>
           <a:xfrm>
             <a:off x="457200" y="3017520"/>
-            <a:ext cx="8228520" cy="776160"/>
+            <a:ext cx="8228160" cy="775800"/>
           </a:xfrm>
           <a:prstGeom prst="roundRect">
             <a:avLst>
@@ -30075,7 +28143,7 @@
         <p:spPr>
           <a:xfrm>
             <a:off x="640080" y="3017520"/>
-            <a:ext cx="1644840" cy="776160"/>
+            <a:ext cx="1644480" cy="775800"/>
           </a:xfrm>
           <a:prstGeom prst="rect">
             <a:avLst/>
@@ -30184,7 +28252,7 @@
         <p:spPr>
           <a:xfrm>
             <a:off x="2651760" y="3017520"/>
-            <a:ext cx="2010600" cy="776160"/>
+            <a:ext cx="2010240" cy="775800"/>
           </a:xfrm>
           <a:prstGeom prst="rect">
             <a:avLst/>
@@ -30245,7 +28313,7 @@
         <p:spPr>
           <a:xfrm>
             <a:off x="4663440" y="3017520"/>
-            <a:ext cx="2010600" cy="776160"/>
+            <a:ext cx="2010240" cy="775800"/>
           </a:xfrm>
           <a:prstGeom prst="rect">
             <a:avLst/>
@@ -30306,7 +28374,7 @@
         <p:spPr>
           <a:xfrm>
             <a:off x="6675120" y="3017520"/>
-            <a:ext cx="2010600" cy="776160"/>
+            <a:ext cx="2010240" cy="775800"/>
           </a:xfrm>
           <a:prstGeom prst="rect">
             <a:avLst/>
@@ -30367,7 +28435,7 @@
         <p:spPr>
           <a:xfrm>
             <a:off x="457200" y="3931920"/>
-            <a:ext cx="8228520" cy="776160"/>
+            <a:ext cx="8228160" cy="775800"/>
           </a:xfrm>
           <a:prstGeom prst="roundRect">
             <a:avLst>
@@ -30422,7 +28490,7 @@
         <p:spPr>
           <a:xfrm>
             <a:off x="640080" y="3931920"/>
-            <a:ext cx="1644840" cy="776160"/>
+            <a:ext cx="1644480" cy="775800"/>
           </a:xfrm>
           <a:prstGeom prst="rect">
             <a:avLst/>
@@ -30531,7 +28599,7 @@
         <p:spPr>
           <a:xfrm>
             <a:off x="2651760" y="3931920"/>
-            <a:ext cx="3016440" cy="776160"/>
+            <a:ext cx="3016080" cy="775800"/>
           </a:xfrm>
           <a:prstGeom prst="rect">
             <a:avLst/>
@@ -30592,7 +28660,7 @@
         <p:spPr>
           <a:xfrm>
             <a:off x="4663080" y="3931920"/>
-            <a:ext cx="3016440" cy="776160"/>
+            <a:ext cx="3016080" cy="775800"/>
           </a:xfrm>
           <a:prstGeom prst="rect">
             <a:avLst/>
@@ -30653,7 +28721,7 @@
         <p:spPr>
           <a:xfrm>
             <a:off x="365760" y="4864680"/>
-            <a:ext cx="6856920" cy="227520"/>
+            <a:ext cx="6856560" cy="227160"/>
           </a:xfrm>
           <a:prstGeom prst="rect">
             <a:avLst/>
@@ -30692,163 +28760,7 @@
                 <a:latin typeface="DejaVu Serif"/>
                 <a:ea typeface="DejaVu Serif"/>
               </a:rPr>
-              <a:t>AI-</a:t>
-            </a:r>
-            <a:r>
-              <a:rPr lang="en-US" sz="800" b="0" u="none" strike="noStrike">
-                <a:solidFill>
-                  <a:srgbClr val="5A6570"/>
-                </a:solidFill>
-                <a:effectLst/>
-                <a:uFillTx/>
-                <a:latin typeface="DejaVu Serif"/>
-                <a:ea typeface="DejaVu Serif"/>
-              </a:rPr>
-              <a:t>Anam</a:t>
-            </a:r>
-            <a:r>
-              <a:rPr lang="en-US" sz="800" b="0" u="none" strike="noStrike">
-                <a:solidFill>
-                  <a:srgbClr val="5A6570"/>
-                </a:solidFill>
-                <a:effectLst/>
-                <a:uFillTx/>
-                <a:latin typeface="DejaVu Serif"/>
-                <a:ea typeface="DejaVu Serif"/>
-              </a:rPr>
-              <a:t>nesis · </a:t>
-            </a:r>
-            <a:r>
-              <a:rPr lang="en-US" sz="800" b="0" u="none" strike="noStrike">
-                <a:solidFill>
-                  <a:srgbClr val="5A6570"/>
-                </a:solidFill>
-                <a:effectLst/>
-                <a:uFillTx/>
-                <a:latin typeface="DejaVu Serif"/>
-                <a:ea typeface="DejaVu Serif"/>
-              </a:rPr>
-              <a:t>Maste</a:t>
-            </a:r>
-            <a:r>
-              <a:rPr lang="en-US" sz="800" b="0" u="none" strike="noStrike">
-                <a:solidFill>
-                  <a:srgbClr val="5A6570"/>
-                </a:solidFill>
-                <a:effectLst/>
-                <a:uFillTx/>
-                <a:latin typeface="DejaVu Serif"/>
-                <a:ea typeface="DejaVu Serif"/>
-              </a:rPr>
-              <a:t>r </a:t>
-            </a:r>
-            <a:r>
-              <a:rPr lang="en-US" sz="800" b="0" u="none" strike="noStrike">
-                <a:solidFill>
-                  <a:srgbClr val="5A6570"/>
-                </a:solidFill>
-                <a:effectLst/>
-                <a:uFillTx/>
-                <a:latin typeface="DejaVu Serif"/>
-                <a:ea typeface="DejaVu Serif"/>
-              </a:rPr>
-              <a:t>Semin</a:t>
-            </a:r>
-            <a:r>
-              <a:rPr lang="en-US" sz="800" b="0" u="none" strike="noStrike">
-                <a:solidFill>
-                  <a:srgbClr val="5A6570"/>
-                </a:solidFill>
-                <a:effectLst/>
-                <a:uFillTx/>
-                <a:latin typeface="DejaVu Serif"/>
-                <a:ea typeface="DejaVu Serif"/>
-              </a:rPr>
-              <a:t>ar · </a:t>
-            </a:r>
-            <a:r>
-              <a:rPr lang="en-US" sz="800" b="0" u="none" strike="noStrike">
-                <a:solidFill>
-                  <a:srgbClr val="5A6570"/>
-                </a:solidFill>
-                <a:effectLst/>
-                <a:uFillTx/>
-                <a:latin typeface="DejaVu Serif"/>
-                <a:ea typeface="DejaVu Serif"/>
-              </a:rPr>
-              <a:t>PwC </a:t>
-            </a:r>
-            <a:r>
-              <a:rPr lang="en-US" sz="800" b="0" u="none" strike="noStrike">
-                <a:solidFill>
-                  <a:srgbClr val="5A6570"/>
-                </a:solidFill>
-                <a:effectLst/>
-                <a:uFillTx/>
-                <a:latin typeface="DejaVu Serif"/>
-                <a:ea typeface="DejaVu Serif"/>
-              </a:rPr>
-              <a:t>× </a:t>
-            </a:r>
-            <a:r>
-              <a:rPr lang="en-US" sz="800" b="0" u="none" strike="noStrike">
-                <a:solidFill>
-                  <a:srgbClr val="5A6570"/>
-                </a:solidFill>
-                <a:effectLst/>
-                <a:uFillTx/>
-                <a:latin typeface="DejaVu Serif"/>
-                <a:ea typeface="DejaVu Serif"/>
-              </a:rPr>
-              <a:t>Hochs</a:t>
-            </a:r>
-            <a:r>
-              <a:rPr lang="en-US" sz="800" b="0" u="none" strike="noStrike">
-                <a:solidFill>
-                  <a:srgbClr val="5A6570"/>
-                </a:solidFill>
-                <a:effectLst/>
-                <a:uFillTx/>
-                <a:latin typeface="DejaVu Serif"/>
-                <a:ea typeface="DejaVu Serif"/>
-              </a:rPr>
-              <a:t>chule </a:t>
-            </a:r>
-            <a:r>
-              <a:rPr lang="en-US" sz="800" b="0" u="none" strike="noStrike">
-                <a:solidFill>
-                  <a:srgbClr val="5A6570"/>
-                </a:solidFill>
-                <a:effectLst/>
-                <a:uFillTx/>
-                <a:latin typeface="DejaVu Serif"/>
-                <a:ea typeface="DejaVu Serif"/>
-              </a:rPr>
-              <a:t>Hanno</a:t>
-            </a:r>
-            <a:r>
-              <a:rPr lang="en-US" sz="800" b="0" u="none" strike="noStrike">
-                <a:solidFill>
-                  <a:srgbClr val="5A6570"/>
-                </a:solidFill>
-                <a:effectLst/>
-                <a:uFillTx/>
-                <a:latin typeface="DejaVu Serif"/>
-                <a:ea typeface="DejaVu Serif"/>
-              </a:rPr>
-              <a:t>ver · </a:t>
-            </a:r>
-            <a:r>
-              <a:rPr lang="en-US" sz="800" b="0" u="none" strike="noStrike">
-                <a:solidFill>
-                  <a:srgbClr val="5A6570"/>
-                </a:solidFill>
-                <a:effectLst/>
-                <a:uFillTx/>
-                <a:latin typeface="DejaVu Serif"/>
-                <a:ea typeface="DejaVu Serif"/>
-              </a:rPr>
-              <a:t>2026</a:t>
+              <a:t>AI-Anamnesis · Master Seminar · PwC × Hochschule Hannover · 2026</a:t>
             </a:r>
             <a:endParaRPr lang="de-DE" sz="800" b="0" u="none" strike="noStrike">
               <a:solidFill>
@@ -30870,7 +28782,7 @@
         <p:spPr>
           <a:xfrm>
             <a:off x="7772400" y="4864680"/>
-            <a:ext cx="1004760" cy="227520"/>
+            <a:ext cx="1004400" cy="227160"/>
           </a:xfrm>
           <a:prstGeom prst="rect">
             <a:avLst/>
@@ -31691,7 +29603,7 @@
         <p:spPr>
           <a:xfrm>
             <a:off x="457200" y="274320"/>
-            <a:ext cx="8228520" cy="639000"/>
+            <a:ext cx="8228160" cy="638640"/>
           </a:xfrm>
           <a:prstGeom prst="rect">
             <a:avLst/>
@@ -31752,7 +29664,7 @@
         <p:spPr>
           <a:xfrm>
             <a:off x="411480" y="1280160"/>
-            <a:ext cx="2650680" cy="2559240"/>
+            <a:ext cx="2650320" cy="2558880"/>
           </a:xfrm>
           <a:prstGeom prst="roundRect">
             <a:avLst>
@@ -31805,7 +29717,7 @@
         <p:spPr>
           <a:xfrm>
             <a:off x="411480" y="1280160"/>
-            <a:ext cx="2650680" cy="108720"/>
+            <a:ext cx="2650320" cy="108360"/>
           </a:xfrm>
           <a:prstGeom prst="roundRect">
             <a:avLst>
@@ -31858,7 +29770,7 @@
         <p:spPr>
           <a:xfrm>
             <a:off x="411480" y="1508760"/>
-            <a:ext cx="2650680" cy="456120"/>
+            <a:ext cx="2650320" cy="455760"/>
           </a:xfrm>
           <a:prstGeom prst="rect">
             <a:avLst/>
@@ -31918,7 +29830,7 @@
         <p:spPr>
           <a:xfrm>
             <a:off x="411480" y="2011680"/>
-            <a:ext cx="2650680" cy="364680"/>
+            <a:ext cx="2650320" cy="364320"/>
           </a:xfrm>
           <a:prstGeom prst="rect">
             <a:avLst/>
@@ -31979,7 +29891,7 @@
         <p:spPr>
           <a:xfrm>
             <a:off x="411480" y="2423160"/>
-            <a:ext cx="2650680" cy="273240"/>
+            <a:ext cx="2650320" cy="272880"/>
           </a:xfrm>
           <a:prstGeom prst="rect">
             <a:avLst/>
@@ -32040,7 +29952,7 @@
         <p:spPr>
           <a:xfrm>
             <a:off x="548640" y="2926080"/>
-            <a:ext cx="2376360" cy="273240"/>
+            <a:ext cx="2376000" cy="272880"/>
           </a:xfrm>
           <a:prstGeom prst="rect">
             <a:avLst/>
@@ -32101,7 +30013,7 @@
         <p:spPr>
           <a:xfrm>
             <a:off x="3246120" y="1280160"/>
-            <a:ext cx="2650680" cy="2559240"/>
+            <a:ext cx="2650320" cy="2558880"/>
           </a:xfrm>
           <a:prstGeom prst="roundRect">
             <a:avLst>
@@ -32154,7 +30066,7 @@
         <p:spPr>
           <a:xfrm>
             <a:off x="3246120" y="1280160"/>
-            <a:ext cx="2650680" cy="108720"/>
+            <a:ext cx="2650320" cy="108360"/>
           </a:xfrm>
           <a:prstGeom prst="roundRect">
             <a:avLst>
@@ -32207,7 +30119,7 @@
         <p:spPr>
           <a:xfrm>
             <a:off x="3246120" y="1508760"/>
-            <a:ext cx="2650680" cy="456120"/>
+            <a:ext cx="2650320" cy="455760"/>
           </a:xfrm>
           <a:prstGeom prst="rect">
             <a:avLst/>
@@ -32267,7 +30179,7 @@
         <p:spPr>
           <a:xfrm>
             <a:off x="3246120" y="2011680"/>
-            <a:ext cx="2650680" cy="364680"/>
+            <a:ext cx="2650320" cy="364320"/>
           </a:xfrm>
           <a:prstGeom prst="rect">
             <a:avLst/>
@@ -32328,7 +30240,7 @@
         <p:spPr>
           <a:xfrm>
             <a:off x="3246120" y="2423160"/>
-            <a:ext cx="2650680" cy="273240"/>
+            <a:ext cx="2650320" cy="272880"/>
           </a:xfrm>
           <a:prstGeom prst="rect">
             <a:avLst/>
@@ -32389,7 +30301,7 @@
         <p:spPr>
           <a:xfrm>
             <a:off x="3383280" y="2926080"/>
-            <a:ext cx="2376360" cy="273240"/>
+            <a:ext cx="2376000" cy="272880"/>
           </a:xfrm>
           <a:prstGeom prst="rect">
             <a:avLst/>
@@ -32450,7 +30362,7 @@
         <p:spPr>
           <a:xfrm>
             <a:off x="6080760" y="1280160"/>
-            <a:ext cx="2650680" cy="2559240"/>
+            <a:ext cx="2650320" cy="2558880"/>
           </a:xfrm>
           <a:prstGeom prst="roundRect">
             <a:avLst>
@@ -32503,7 +30415,7 @@
         <p:spPr>
           <a:xfrm>
             <a:off x="6080760" y="1280160"/>
-            <a:ext cx="2650680" cy="108720"/>
+            <a:ext cx="2650320" cy="108360"/>
           </a:xfrm>
           <a:prstGeom prst="roundRect">
             <a:avLst>
@@ -32556,7 +30468,7 @@
         <p:spPr>
           <a:xfrm>
             <a:off x="6080760" y="1508760"/>
-            <a:ext cx="2650680" cy="456120"/>
+            <a:ext cx="2650320" cy="455760"/>
           </a:xfrm>
           <a:prstGeom prst="rect">
             <a:avLst/>
@@ -32616,7 +30528,7 @@
         <p:spPr>
           <a:xfrm>
             <a:off x="6080760" y="2011680"/>
-            <a:ext cx="2650680" cy="364680"/>
+            <a:ext cx="2650320" cy="364320"/>
           </a:xfrm>
           <a:prstGeom prst="rect">
             <a:avLst/>
@@ -32677,7 +30589,7 @@
         <p:spPr>
           <a:xfrm>
             <a:off x="6080760" y="2423160"/>
-            <a:ext cx="2650680" cy="273240"/>
+            <a:ext cx="2650320" cy="272880"/>
           </a:xfrm>
           <a:prstGeom prst="rect">
             <a:avLst/>
@@ -32738,7 +30650,7 @@
         <p:spPr>
           <a:xfrm>
             <a:off x="6217920" y="2926080"/>
-            <a:ext cx="2376360" cy="273240"/>
+            <a:ext cx="2376000" cy="272880"/>
           </a:xfrm>
           <a:prstGeom prst="rect">
             <a:avLst/>
@@ -32799,7 +30711,7 @@
         <p:spPr>
           <a:xfrm>
             <a:off x="457200" y="4114800"/>
-            <a:ext cx="8228520" cy="501840"/>
+            <a:ext cx="8228160" cy="501480"/>
           </a:xfrm>
           <a:prstGeom prst="roundRect">
             <a:avLst>
@@ -32852,7 +30764,7 @@
         <p:spPr>
           <a:xfrm>
             <a:off x="594360" y="4160520"/>
-            <a:ext cx="7954200" cy="410400"/>
+            <a:ext cx="7953840" cy="410040"/>
           </a:xfrm>
           <a:prstGeom prst="rect">
             <a:avLst/>
@@ -32949,7 +30861,7 @@
         <p:spPr>
           <a:xfrm>
             <a:off x="365760" y="4864680"/>
-            <a:ext cx="6856920" cy="227520"/>
+            <a:ext cx="6856560" cy="227160"/>
           </a:xfrm>
           <a:prstGeom prst="rect">
             <a:avLst/>
@@ -33010,7 +30922,7 @@
         <p:spPr>
           <a:xfrm>
             <a:off x="7772400" y="4864680"/>
-            <a:ext cx="1004760" cy="227520"/>
+            <a:ext cx="1004400" cy="227160"/>
           </a:xfrm>
           <a:prstGeom prst="rect">
             <a:avLst/>
@@ -33750,7 +31662,7 @@
         <p:spPr>
           <a:xfrm>
             <a:off x="457200" y="274320"/>
-            <a:ext cx="8229240" cy="639720"/>
+            <a:ext cx="8228880" cy="639360"/>
           </a:xfrm>
           <a:prstGeom prst="rect">
             <a:avLst/>
@@ -33811,7 +31723,7 @@
         <p:spPr>
           <a:xfrm>
             <a:off x="388800" y="1460160"/>
-            <a:ext cx="1919880" cy="2559960"/>
+            <a:ext cx="1919520" cy="2559600"/>
           </a:xfrm>
           <a:prstGeom prst="roundRect">
             <a:avLst>
@@ -33839,6 +31751,11 @@
             <a:noAutofit/>
           </a:bodyPr>
           <a:p>
+            <a:pPr>
+              <a:lnSpc>
+                <a:spcPct val="100000"/>
+              </a:lnSpc>
+            </a:pPr>
             <a:endParaRPr lang="de-DE" sz="1800" b="0" u="none" strike="noStrike">
               <a:solidFill>
                 <a:srgbClr val="FFFFFF"/>
@@ -33859,7 +31776,7 @@
         <p:spPr>
           <a:xfrm>
             <a:off x="388800" y="1643040"/>
-            <a:ext cx="1919880" cy="1096920"/>
+            <a:ext cx="1919520" cy="1096560"/>
           </a:xfrm>
           <a:prstGeom prst="rect">
             <a:avLst/>
@@ -33920,7 +31837,7 @@
         <p:spPr>
           <a:xfrm>
             <a:off x="388800" y="2831760"/>
-            <a:ext cx="1919880" cy="365400"/>
+            <a:ext cx="1919520" cy="365040"/>
           </a:xfrm>
           <a:prstGeom prst="rect">
             <a:avLst/>
@@ -33981,7 +31898,7 @@
         <p:spPr>
           <a:xfrm>
             <a:off x="388800" y="3243240"/>
-            <a:ext cx="1919880" cy="365400"/>
+            <a:ext cx="1919520" cy="365040"/>
           </a:xfrm>
           <a:prstGeom prst="rect">
             <a:avLst/>
@@ -34042,7 +31959,7 @@
         <p:spPr>
           <a:xfrm>
             <a:off x="2537640" y="1460160"/>
-            <a:ext cx="1919880" cy="2559960"/>
+            <a:ext cx="1919520" cy="2559600"/>
           </a:xfrm>
           <a:prstGeom prst="roundRect">
             <a:avLst>
@@ -34070,6 +31987,11 @@
             <a:noAutofit/>
           </a:bodyPr>
           <a:p>
+            <a:pPr>
+              <a:lnSpc>
+                <a:spcPct val="100000"/>
+              </a:lnSpc>
+            </a:pPr>
             <a:endParaRPr lang="de-DE" sz="1800" b="0" u="none" strike="noStrike">
               <a:solidFill>
                 <a:srgbClr val="FFFFFF"/>
@@ -34090,7 +32012,7 @@
         <p:spPr>
           <a:xfrm>
             <a:off x="2537640" y="1643040"/>
-            <a:ext cx="1919880" cy="1096920"/>
+            <a:ext cx="1919520" cy="1096560"/>
           </a:xfrm>
           <a:prstGeom prst="rect">
             <a:avLst/>
@@ -34151,7 +32073,7 @@
         <p:spPr>
           <a:xfrm>
             <a:off x="2537640" y="2831760"/>
-            <a:ext cx="1919880" cy="365400"/>
+            <a:ext cx="1919520" cy="365040"/>
           </a:xfrm>
           <a:prstGeom prst="rect">
             <a:avLst/>
@@ -34212,7 +32134,7 @@
         <p:spPr>
           <a:xfrm>
             <a:off x="2537640" y="3243240"/>
-            <a:ext cx="1919880" cy="365400"/>
+            <a:ext cx="1919520" cy="365040"/>
           </a:xfrm>
           <a:prstGeom prst="rect">
             <a:avLst/>
@@ -34273,7 +32195,7 @@
         <p:spPr>
           <a:xfrm>
             <a:off x="4686480" y="1460160"/>
-            <a:ext cx="1919880" cy="2559960"/>
+            <a:ext cx="1919520" cy="2559600"/>
           </a:xfrm>
           <a:prstGeom prst="roundRect">
             <a:avLst>
@@ -34301,6 +32223,11 @@
             <a:noAutofit/>
           </a:bodyPr>
           <a:p>
+            <a:pPr>
+              <a:lnSpc>
+                <a:spcPct val="100000"/>
+              </a:lnSpc>
+            </a:pPr>
             <a:endParaRPr lang="de-DE" sz="1800" b="0" u="none" strike="noStrike">
               <a:solidFill>
                 <a:srgbClr val="FFFFFF"/>
@@ -34321,7 +32248,7 @@
         <p:spPr>
           <a:xfrm>
             <a:off x="4686480" y="1643040"/>
-            <a:ext cx="1919880" cy="1096920"/>
+            <a:ext cx="1919520" cy="1096560"/>
           </a:xfrm>
           <a:prstGeom prst="rect">
             <a:avLst/>
@@ -34382,7 +32309,7 @@
         <p:spPr>
           <a:xfrm>
             <a:off x="4686480" y="2831760"/>
-            <a:ext cx="1919880" cy="365400"/>
+            <a:ext cx="1919520" cy="365040"/>
           </a:xfrm>
           <a:prstGeom prst="rect">
             <a:avLst/>
@@ -34443,7 +32370,7 @@
         <p:spPr>
           <a:xfrm>
             <a:off x="4686480" y="3243240"/>
-            <a:ext cx="1919880" cy="365400"/>
+            <a:ext cx="1919520" cy="365040"/>
           </a:xfrm>
           <a:prstGeom prst="rect">
             <a:avLst/>
@@ -34504,7 +32431,7 @@
         <p:spPr>
           <a:xfrm>
             <a:off x="6835320" y="1460160"/>
-            <a:ext cx="1919880" cy="2559960"/>
+            <a:ext cx="1919520" cy="2559600"/>
           </a:xfrm>
           <a:prstGeom prst="roundRect">
             <a:avLst>
@@ -34532,6 +32459,11 @@
             <a:noAutofit/>
           </a:bodyPr>
           <a:p>
+            <a:pPr>
+              <a:lnSpc>
+                <a:spcPct val="100000"/>
+              </a:lnSpc>
+            </a:pPr>
             <a:endParaRPr lang="de-DE" sz="1800" b="0" u="none" strike="noStrike">
               <a:solidFill>
                 <a:srgbClr val="FFFFFF"/>
@@ -34552,7 +32484,7 @@
         <p:spPr>
           <a:xfrm>
             <a:off x="6835320" y="1643040"/>
-            <a:ext cx="1919880" cy="1096920"/>
+            <a:ext cx="1919520" cy="1096560"/>
           </a:xfrm>
           <a:prstGeom prst="rect">
             <a:avLst/>
@@ -34613,7 +32545,7 @@
         <p:spPr>
           <a:xfrm>
             <a:off x="6835320" y="2831760"/>
-            <a:ext cx="1919880" cy="365400"/>
+            <a:ext cx="1919520" cy="365040"/>
           </a:xfrm>
           <a:prstGeom prst="rect">
             <a:avLst/>
@@ -34674,7 +32606,7 @@
         <p:spPr>
           <a:xfrm>
             <a:off x="6835320" y="3243240"/>
-            <a:ext cx="1919880" cy="365400"/>
+            <a:ext cx="1919520" cy="365040"/>
           </a:xfrm>
           <a:prstGeom prst="rect">
             <a:avLst/>
@@ -34735,7 +32667,7 @@
         <p:spPr>
           <a:xfrm>
             <a:off x="365760" y="4864680"/>
-            <a:ext cx="6857640" cy="228240"/>
+            <a:ext cx="6857280" cy="227880"/>
           </a:xfrm>
           <a:prstGeom prst="rect">
             <a:avLst/>
@@ -34796,7 +32728,7 @@
         <p:spPr>
           <a:xfrm>
             <a:off x="7772400" y="4864680"/>
-            <a:ext cx="1005480" cy="228240"/>
+            <a:ext cx="1005120" cy="227880"/>
           </a:xfrm>
           <a:prstGeom prst="rect">
             <a:avLst/>
